--- a/workspace/AI_Enablement_Super_Portal_Proposal.pptx
+++ b/workspace/AI_Enablement_Super_Portal_Proposal.pptx
@@ -19,6 +19,10 @@
     <p:sldId id="267" r:id="rId19"/>
     <p:sldId id="268" r:id="rId20"/>
     <p:sldId id="269" r:id="rId21"/>
+    <p:sldId id="270" r:id="rId22"/>
+    <p:sldId id="271" r:id="rId23"/>
+    <p:sldId id="272" r:id="rId24"/>
+    <p:sldId id="273" r:id="rId25"/>
   </p:sldIdLst>
   <p:sldSz cx="12191695" cy="6858000" type="screen4x3"/>
   <p:notesSz cx="6858000" cy="9144000"/>
@@ -585,7 +589,7 @@
           <a:lstStyle/>
           <a:p>
             <a:r>
-              <a:t>Hailey + Gurkirat action from Antofelix's mail: tables/datasets for training &amp; grounding, and the gaps.</a:t>
+              <a:t>FEEL is a formal DMN grammar: generate → parse → preview → maker request. Zero customer data needed to start. Recommended v1.</a:t>
             </a:r>
           </a:p>
         </p:txBody>
@@ -655,7 +659,7 @@
           <a:lstStyle/>
           <a:p>
             <a:r>
-              <a:t>Research-method structure: each feature ships only after its experiment passes its gate. Gates are agreed with BAs/ops, not invented.</a:t>
+              <a:t>Target experience: modal over the formula list; generate → parse → preview → maker request. Same assist creates RE variables (use case 5).</a:t>
             </a:r>
           </a:p>
         </p:txBody>
@@ -725,7 +729,7 @@
           <a:lstStyle/>
           <a:p>
             <a:r>
-              <a:t>Sequence by data readiness, not appeal. Dates land in Cathal's technical session; sequence and dependencies fixed here.</a:t>
+              <a:t>Answers agenda §3–5: one base SLM + per-task adapters; RAG first, fine-tune where evals prove gaps; prompts/schemas/evals/guardrails stay model-agnostic.</a:t>
             </a:r>
           </a:p>
         </p:txBody>
@@ -795,6 +799,286 @@
           <a:lstStyle/>
           <a:p>
             <a:r>
+              <a:t>CBUAE Feb 2026 guidance mapped to design choices. AI stops at draft; decisions stay deterministic.</a:t>
+            </a:r>
+          </a:p>
+        </p:txBody>
+      </p:sp>
+      <p:sp>
+        <p:nvSpPr>
+          <p:cNvPr id="4" name="Slide Number Placeholder 3"/>
+          <p:cNvSpPr>
+            <a:spLocks noGrp="1"/>
+          </p:cNvSpPr>
+          <p:nvPr>
+            <p:ph type="sldNum" idx="5" sz="quarter"/>
+          </p:nvPr>
+        </p:nvSpPr>
+        <p:spPr/>
+      </p:sp>
+    </p:spTree>
+  </p:cSld>
+  <p:clrMapOvr>
+    <a:masterClrMapping/>
+  </p:clrMapOvr>
+</p:notes>
+</file>
+
+<file path=ppt/notesSlides/notesSlide14.xml><?xml version="1.0" encoding="utf-8"?>
+<p:notes xmlns:a="http://schemas.openxmlformats.org/drawingml/2006/main" xmlns:p="http://schemas.openxmlformats.org/presentationml/2006/main" xmlns:r="http://schemas.openxmlformats.org/officeDocument/2006/relationships">
+  <p:cSld>
+    <p:spTree>
+      <p:nvGrpSpPr>
+        <p:cNvPr id="1" name=""/>
+        <p:cNvGrpSpPr/>
+        <p:nvPr/>
+      </p:nvGrpSpPr>
+      <p:grpSpPr>
+        <a:xfrm>
+          <a:off x="0" y="0"/>
+          <a:ext cx="0" cy="0"/>
+          <a:chOff x="0" y="0"/>
+          <a:chExt cx="0" cy="0"/>
+        </a:xfrm>
+      </p:grpSpPr>
+      <p:sp>
+        <p:nvSpPr>
+          <p:cNvPr id="2" name="Slide Image Placeholder 1"/>
+          <p:cNvSpPr>
+            <a:spLocks noGrp="1"/>
+          </p:cNvSpPr>
+          <p:nvPr>
+            <p:ph type="sldImg" idx="2"/>
+          </p:nvPr>
+        </p:nvSpPr>
+        <p:spPr/>
+      </p:sp>
+      <p:sp>
+        <p:nvSpPr>
+          <p:cNvPr id="3" name="Notes Placeholder 2"/>
+          <p:cNvSpPr>
+            <a:spLocks noGrp="1"/>
+          </p:cNvSpPr>
+          <p:nvPr>
+            <p:ph type="body" idx="3" sz="quarter"/>
+          </p:nvPr>
+        </p:nvSpPr>
+        <p:spPr/>
+        <p:txBody>
+          <a:bodyPr/>
+          <a:lstStyle/>
+          <a:p>
+            <a:r>
+              <a:t>Hailey + Gurkirat action from Antofelix's mail: tables/datasets for training &amp; grounding, and the gaps.</a:t>
+            </a:r>
+          </a:p>
+        </p:txBody>
+      </p:sp>
+      <p:sp>
+        <p:nvSpPr>
+          <p:cNvPr id="4" name="Slide Number Placeholder 3"/>
+          <p:cNvSpPr>
+            <a:spLocks noGrp="1"/>
+          </p:cNvSpPr>
+          <p:nvPr>
+            <p:ph type="sldNum" idx="5" sz="quarter"/>
+          </p:nvPr>
+        </p:nvSpPr>
+        <p:spPr/>
+      </p:sp>
+    </p:spTree>
+  </p:cSld>
+  <p:clrMapOvr>
+    <a:masterClrMapping/>
+  </p:clrMapOvr>
+</p:notes>
+</file>
+
+<file path=ppt/notesSlides/notesSlide15.xml><?xml version="1.0" encoding="utf-8"?>
+<p:notes xmlns:a="http://schemas.openxmlformats.org/drawingml/2006/main" xmlns:p="http://schemas.openxmlformats.org/presentationml/2006/main" xmlns:r="http://schemas.openxmlformats.org/officeDocument/2006/relationships">
+  <p:cSld>
+    <p:spTree>
+      <p:nvGrpSpPr>
+        <p:cNvPr id="1" name=""/>
+        <p:cNvGrpSpPr/>
+        <p:nvPr/>
+      </p:nvGrpSpPr>
+      <p:grpSpPr>
+        <a:xfrm>
+          <a:off x="0" y="0"/>
+          <a:ext cx="0" cy="0"/>
+          <a:chOff x="0" y="0"/>
+          <a:chExt cx="0" cy="0"/>
+        </a:xfrm>
+      </p:grpSpPr>
+      <p:sp>
+        <p:nvSpPr>
+          <p:cNvPr id="2" name="Slide Image Placeholder 1"/>
+          <p:cNvSpPr>
+            <a:spLocks noGrp="1"/>
+          </p:cNvSpPr>
+          <p:nvPr>
+            <p:ph type="sldImg" idx="2"/>
+          </p:nvPr>
+        </p:nvSpPr>
+        <p:spPr/>
+      </p:sp>
+      <p:sp>
+        <p:nvSpPr>
+          <p:cNvPr id="3" name="Notes Placeholder 2"/>
+          <p:cNvSpPr>
+            <a:spLocks noGrp="1"/>
+          </p:cNvSpPr>
+          <p:nvPr>
+            <p:ph type="body" idx="3" sz="quarter"/>
+          </p:nvPr>
+        </p:nvSpPr>
+        <p:spPr/>
+        <p:txBody>
+          <a:bodyPr/>
+          <a:lstStyle/>
+          <a:p>
+            <a:r>
+              <a:t>Research-method structure: each feature ships only after its experiment passes its gate. Gates are agreed with BAs/ops, not invented.</a:t>
+            </a:r>
+          </a:p>
+        </p:txBody>
+      </p:sp>
+      <p:sp>
+        <p:nvSpPr>
+          <p:cNvPr id="4" name="Slide Number Placeholder 3"/>
+          <p:cNvSpPr>
+            <a:spLocks noGrp="1"/>
+          </p:cNvSpPr>
+          <p:nvPr>
+            <p:ph type="sldNum" idx="5" sz="quarter"/>
+          </p:nvPr>
+        </p:nvSpPr>
+        <p:spPr/>
+      </p:sp>
+    </p:spTree>
+  </p:cSld>
+  <p:clrMapOvr>
+    <a:masterClrMapping/>
+  </p:clrMapOvr>
+</p:notes>
+</file>
+
+<file path=ppt/notesSlides/notesSlide16.xml><?xml version="1.0" encoding="utf-8"?>
+<p:notes xmlns:a="http://schemas.openxmlformats.org/drawingml/2006/main" xmlns:p="http://schemas.openxmlformats.org/presentationml/2006/main" xmlns:r="http://schemas.openxmlformats.org/officeDocument/2006/relationships">
+  <p:cSld>
+    <p:spTree>
+      <p:nvGrpSpPr>
+        <p:cNvPr id="1" name=""/>
+        <p:cNvGrpSpPr/>
+        <p:nvPr/>
+      </p:nvGrpSpPr>
+      <p:grpSpPr>
+        <a:xfrm>
+          <a:off x="0" y="0"/>
+          <a:ext cx="0" cy="0"/>
+          <a:chOff x="0" y="0"/>
+          <a:chExt cx="0" cy="0"/>
+        </a:xfrm>
+      </p:grpSpPr>
+      <p:sp>
+        <p:nvSpPr>
+          <p:cNvPr id="2" name="Slide Image Placeholder 1"/>
+          <p:cNvSpPr>
+            <a:spLocks noGrp="1"/>
+          </p:cNvSpPr>
+          <p:nvPr>
+            <p:ph type="sldImg" idx="2"/>
+          </p:nvPr>
+        </p:nvSpPr>
+        <p:spPr/>
+      </p:sp>
+      <p:sp>
+        <p:nvSpPr>
+          <p:cNvPr id="3" name="Notes Placeholder 2"/>
+          <p:cNvSpPr>
+            <a:spLocks noGrp="1"/>
+          </p:cNvSpPr>
+          <p:nvPr>
+            <p:ph type="body" idx="3" sz="quarter"/>
+          </p:nvPr>
+        </p:nvSpPr>
+        <p:spPr/>
+        <p:txBody>
+          <a:bodyPr/>
+          <a:lstStyle/>
+          <a:p>
+            <a:r>
+              <a:t>Sequence by data readiness, not appeal. Dates land in Cathal's technical session; sequence and dependencies fixed here.</a:t>
+            </a:r>
+          </a:p>
+        </p:txBody>
+      </p:sp>
+      <p:sp>
+        <p:nvSpPr>
+          <p:cNvPr id="4" name="Slide Number Placeholder 3"/>
+          <p:cNvSpPr>
+            <a:spLocks noGrp="1"/>
+          </p:cNvSpPr>
+          <p:nvPr>
+            <p:ph type="sldNum" idx="5" sz="quarter"/>
+          </p:nvPr>
+        </p:nvSpPr>
+        <p:spPr/>
+      </p:sp>
+    </p:spTree>
+  </p:cSld>
+  <p:clrMapOvr>
+    <a:masterClrMapping/>
+  </p:clrMapOvr>
+</p:notes>
+</file>
+
+<file path=ppt/notesSlides/notesSlide17.xml><?xml version="1.0" encoding="utf-8"?>
+<p:notes xmlns:a="http://schemas.openxmlformats.org/drawingml/2006/main" xmlns:p="http://schemas.openxmlformats.org/presentationml/2006/main" xmlns:r="http://schemas.openxmlformats.org/officeDocument/2006/relationships">
+  <p:cSld>
+    <p:spTree>
+      <p:nvGrpSpPr>
+        <p:cNvPr id="1" name=""/>
+        <p:cNvGrpSpPr/>
+        <p:nvPr/>
+      </p:nvGrpSpPr>
+      <p:grpSpPr>
+        <a:xfrm>
+          <a:off x="0" y="0"/>
+          <a:ext cx="0" cy="0"/>
+          <a:chOff x="0" y="0"/>
+          <a:chExt cx="0" cy="0"/>
+        </a:xfrm>
+      </p:grpSpPr>
+      <p:sp>
+        <p:nvSpPr>
+          <p:cNvPr id="2" name="Slide Image Placeholder 1"/>
+          <p:cNvSpPr>
+            <a:spLocks noGrp="1"/>
+          </p:cNvSpPr>
+          <p:nvPr>
+            <p:ph type="sldImg" idx="2"/>
+          </p:nvPr>
+        </p:nvSpPr>
+        <p:spPr/>
+      </p:sp>
+      <p:sp>
+        <p:nvSpPr>
+          <p:cNvPr id="3" name="Notes Placeholder 2"/>
+          <p:cNvSpPr>
+            <a:spLocks noGrp="1"/>
+          </p:cNvSpPr>
+          <p:nvPr>
+            <p:ph type="body" idx="3" sz="quarter"/>
+          </p:nvPr>
+        </p:nvSpPr>
+        <p:spPr/>
+        <p:txBody>
+          <a:bodyPr/>
+          <a:lstStyle/>
+          <a:p>
+            <a:r>
               <a:t>Ask: approve scope + sequence today; dates follow the technical session. After approval: clickable walkthrough link.</a:t>
             </a:r>
           </a:p>
@@ -1075,7 +1359,7 @@
           <a:lstStyle/>
           <a:p>
             <a:r>
-              <a:t>Honest feasibility: enterprise text-to-SQL accuracy collapses on raw schemas (BEAVER 10.8%, Spider 2.0 21.3%). Constrain to curated views + always show SQL. MCP exposes the same governed layer.</a:t>
+              <a:t>Target experience: the model drafts the rule and the checklist; pass-rate impact comes from rule-engine replay; shadow mode and maker-checker gate production.</a:t>
             </a:r>
           </a:p>
         </p:txBody>
@@ -1145,7 +1429,7 @@
           <a:lstStyle/>
           <a:p>
             <a:r>
-              <a:t>Extraction + comparison vs application data. Main dependency is labelled samples — the largest data gap (slide 10).</a:t>
+              <a:t>Honest feasibility: enterprise text-to-SQL accuracy collapses on raw schemas (BEAVER 10.8%, Spider 2.0 21.3%). Constrain to curated views + always show SQL. MCP exposes the same governed layer.</a:t>
             </a:r>
           </a:p>
         </p:txBody>
@@ -1215,7 +1499,7 @@
           <a:lstStyle/>
           <a:p>
             <a:r>
-              <a:t>FEEL is a formal DMN grammar: generate → parse → preview → maker request. Zero customer data needed to start. Recommended v1.</a:t>
+              <a:t>Target experience: prompt bar on top of the existing Report Enquiry screen; SQL visible; curated views only.</a:t>
             </a:r>
           </a:p>
         </p:txBody>
@@ -1285,7 +1569,7 @@
           <a:lstStyle/>
           <a:p>
             <a:r>
-              <a:t>Answers agenda §3–5: one base SLM + per-task adapters; RAG first, fine-tune where evals prove gaps; prompts/schemas/evals/guardrails stay model-agnostic.</a:t>
+              <a:t>Extraction + comparison vs application data. Main dependency is labelled samples — the largest data gap (data-readiness slide).</a:t>
             </a:r>
           </a:p>
         </p:txBody>
@@ -1355,7 +1639,7 @@
           <a:lstStyle/>
           <a:p>
             <a:r>
-              <a:t>CBUAE Feb 2026 guidance mapped to design choices. AI stops at draft; decisions stay deterministic.</a:t>
+              <a:t>Target experience: per-document AI status in the list; field-by-field comparison with the mismatch flagged as an exception.</a:t>
             </a:r>
           </a:p>
         </p:txBody>
@@ -4817,7 +5101,7 @@
                 </a:solidFill>
                 <a:latin typeface="Lato"/>
               </a:rPr>
-              <a:t>Data Readiness </a:t>
+              <a:t>FEEL Assist </a:t>
             </a:r>
             <a:r>
               <a:rPr sz="2000" b="1" i="0">
@@ -4826,7 +5110,7 @@
                 </a:solidFill>
                 <a:latin typeface="Lato"/>
               </a:rPr>
-              <a:t>— What We Have vs What Training Needs</a:t>
+              <a:t>— The Fastest Win On The List</a:t>
             </a:r>
           </a:p>
         </p:txBody>
@@ -5073,6 +5357,4974 @@
                 <a:latin typeface="Lato"/>
               </a:rPr>
               <a:t>9</a:t>
+            </a:r>
+          </a:p>
+        </p:txBody>
+      </p:sp>
+      <p:sp>
+        <p:nvSpPr>
+          <p:cNvPr id="13" name="Rounded Rectangle 12"/>
+          <p:cNvSpPr/>
+          <p:nvPr/>
+        </p:nvSpPr>
+        <p:spPr>
+          <a:xfrm>
+            <a:off x="457200" y="969264"/>
+            <a:ext cx="9921240" cy="749808"/>
+          </a:xfrm>
+          <a:prstGeom prst="roundRect">
+            <a:avLst>
+              <a:gd name="adj" fmla="val 18000"/>
+            </a:avLst>
+          </a:prstGeom>
+          <a:solidFill>
+            <a:srgbClr val="EDF2FF"/>
+          </a:solidFill>
+          <a:ln w="9525">
+            <a:solidFill>
+              <a:srgbClr val="3B7EF6"/>
+            </a:solidFill>
+          </a:ln>
+          <a:effectLst/>
+        </p:spPr>
+        <p:style>
+          <a:lnRef idx="1">
+            <a:schemeClr val="accent1"/>
+          </a:lnRef>
+          <a:fillRef idx="3">
+            <a:schemeClr val="accent1"/>
+          </a:fillRef>
+          <a:effectRef idx="0">
+            <a:schemeClr val="accent1"/>
+          </a:effectRef>
+          <a:fontRef idx="minor">
+            <a:schemeClr val="lt1"/>
+          </a:fontRef>
+        </p:style>
+        <p:txBody>
+          <a:bodyPr rtlCol="0" anchor="ctr"/>
+          <a:lstStyle/>
+          <a:p>
+            <a:pPr algn="ctr"/>
+          </a:p>
+        </p:txBody>
+      </p:sp>
+      <p:sp>
+        <p:nvSpPr>
+          <p:cNvPr id="14" name="TextBox 13"/>
+          <p:cNvSpPr txBox="1"/>
+          <p:nvPr/>
+        </p:nvSpPr>
+        <p:spPr>
+          <a:xfrm>
+            <a:off x="658368" y="969264"/>
+            <a:ext cx="9518904" cy="749808"/>
+          </a:xfrm>
+          <a:prstGeom prst="rect">
+            <a:avLst/>
+          </a:prstGeom>
+          <a:noFill/>
+        </p:spPr>
+        <p:txBody>
+          <a:bodyPr wrap="square" lIns="0" rIns="0" anchor="ctr">
+            <a:spAutoFit/>
+          </a:bodyPr>
+          <a:lstStyle/>
+          <a:p>
+            <a:r>
+              <a:rPr sz="1200" b="1" i="0">
+                <a:solidFill>
+                  <a:srgbClr val="1A214D"/>
+                </a:solidFill>
+                <a:latin typeface="Lato"/>
+              </a:rPr>
+              <a:t>The fastest win: FEEL has a formal grammar, a built-in validator — and users who struggle with it today.</a:t>
+            </a:r>
+          </a:p>
+        </p:txBody>
+      </p:sp>
+      <p:pic>
+        <p:nvPicPr>
+          <p:cNvPr id="15" name="Picture 14" descr="04-calculated-variable.png"/>
+          <p:cNvPicPr>
+            <a:picLocks noChangeAspect="1"/>
+          </p:cNvPicPr>
+          <p:nvPr/>
+        </p:nvPicPr>
+        <p:blipFill>
+          <a:blip r:embed="rId4"/>
+          <a:stretch>
+            <a:fillRect/>
+          </a:stretch>
+        </p:blipFill>
+        <p:spPr>
+          <a:xfrm>
+            <a:off x="457200" y="1920240"/>
+            <a:ext cx="6675120" cy="3608737"/>
+          </a:xfrm>
+          <a:prstGeom prst="rect">
+            <a:avLst/>
+          </a:prstGeom>
+        </p:spPr>
+      </p:pic>
+      <p:sp>
+        <p:nvSpPr>
+          <p:cNvPr id="16" name="Rounded Rectangle 15"/>
+          <p:cNvSpPr/>
+          <p:nvPr/>
+        </p:nvSpPr>
+        <p:spPr>
+          <a:xfrm>
+            <a:off x="443484" y="1906524"/>
+            <a:ext cx="6702552" cy="3636168"/>
+          </a:xfrm>
+          <a:prstGeom prst="roundRect">
+            <a:avLst>
+              <a:gd name="adj" fmla="val 3000"/>
+            </a:avLst>
+          </a:prstGeom>
+          <a:noFill/>
+          <a:ln w="12700">
+            <a:solidFill>
+              <a:srgbClr val="1A214D"/>
+            </a:solidFill>
+          </a:ln>
+          <a:effectLst/>
+        </p:spPr>
+        <p:style>
+          <a:lnRef idx="1">
+            <a:schemeClr val="accent1"/>
+          </a:lnRef>
+          <a:fillRef idx="3">
+            <a:schemeClr val="accent1"/>
+          </a:fillRef>
+          <a:effectRef idx="0">
+            <a:schemeClr val="accent1"/>
+          </a:effectRef>
+          <a:fontRef idx="minor">
+            <a:schemeClr val="lt1"/>
+          </a:fontRef>
+        </p:style>
+        <p:txBody>
+          <a:bodyPr rtlCol="0" anchor="ctr"/>
+          <a:lstStyle/>
+          <a:p>
+            <a:pPr algn="ctr"/>
+          </a:p>
+        </p:txBody>
+      </p:sp>
+      <p:sp>
+        <p:nvSpPr>
+          <p:cNvPr id="17" name="TextBox 16"/>
+          <p:cNvSpPr txBox="1"/>
+          <p:nvPr/>
+        </p:nvSpPr>
+        <p:spPr>
+          <a:xfrm>
+            <a:off x="457200" y="5592984"/>
+            <a:ext cx="6675120" cy="228600"/>
+          </a:xfrm>
+          <a:prstGeom prst="rect">
+            <a:avLst/>
+          </a:prstGeom>
+          <a:noFill/>
+        </p:spPr>
+        <p:txBody>
+          <a:bodyPr wrap="square" lIns="0" rIns="0" tIns="0" bIns="0">
+            <a:spAutoFit/>
+          </a:bodyPr>
+          <a:lstStyle/>
+          <a:p>
+            <a:pPr algn="l"/>
+            <a:r>
+              <a:rPr sz="800" b="0" i="1">
+                <a:solidFill>
+                  <a:srgbClr val="1A214D"/>
+                </a:solidFill>
+                <a:latin typeface="Lato"/>
+              </a:rPr>
+              <a:t>Limit Assignment › Calculated Variable — DBR, MUEx, Max Eligibility: the formulas users build by hand today.</a:t>
+            </a:r>
+          </a:p>
+        </p:txBody>
+      </p:sp>
+      <p:sp>
+        <p:nvSpPr>
+          <p:cNvPr id="18" name="Rounded Rectangle 17"/>
+          <p:cNvSpPr/>
+          <p:nvPr/>
+        </p:nvSpPr>
+        <p:spPr>
+          <a:xfrm>
+            <a:off x="7315200" y="1920240"/>
+            <a:ext cx="4206240" cy="1444752"/>
+          </a:xfrm>
+          <a:prstGeom prst="roundRect">
+            <a:avLst>
+              <a:gd name="adj" fmla="val 12000"/>
+            </a:avLst>
+          </a:prstGeom>
+          <a:solidFill>
+            <a:srgbClr val="FFFFFF"/>
+          </a:solidFill>
+          <a:ln w="9525">
+            <a:solidFill>
+              <a:srgbClr val="1A214D"/>
+            </a:solidFill>
+          </a:ln>
+          <a:effectLst/>
+        </p:spPr>
+        <p:style>
+          <a:lnRef idx="1">
+            <a:schemeClr val="accent1"/>
+          </a:lnRef>
+          <a:fillRef idx="3">
+            <a:schemeClr val="accent1"/>
+          </a:fillRef>
+          <a:effectRef idx="0">
+            <a:schemeClr val="accent1"/>
+          </a:effectRef>
+          <a:fontRef idx="minor">
+            <a:schemeClr val="lt1"/>
+          </a:fontRef>
+        </p:style>
+        <p:txBody>
+          <a:bodyPr rtlCol="0" anchor="ctr"/>
+          <a:lstStyle/>
+          <a:p>
+            <a:pPr algn="ctr"/>
+          </a:p>
+        </p:txBody>
+      </p:sp>
+      <p:sp>
+        <p:nvSpPr>
+          <p:cNvPr id="19" name="TextBox 18"/>
+          <p:cNvSpPr txBox="1"/>
+          <p:nvPr/>
+        </p:nvSpPr>
+        <p:spPr>
+          <a:xfrm>
+            <a:off x="7461504" y="2029968"/>
+            <a:ext cx="3913631" cy="274320"/>
+          </a:xfrm>
+          <a:prstGeom prst="rect">
+            <a:avLst/>
+          </a:prstGeom>
+          <a:noFill/>
+        </p:spPr>
+        <p:txBody>
+          <a:bodyPr wrap="square" lIns="0" rIns="0" tIns="0" bIns="0">
+            <a:spAutoFit/>
+          </a:bodyPr>
+          <a:lstStyle/>
+          <a:p>
+            <a:pPr algn="l"/>
+            <a:r>
+              <a:rPr sz="1100" b="1" i="0">
+                <a:solidFill>
+                  <a:srgbClr val="3B7EF6"/>
+                </a:solidFill>
+                <a:latin typeface="Lato"/>
+              </a:rPr>
+              <a:t>Requirement · prompt → FEEL  (20 Oct)</a:t>
+            </a:r>
+          </a:p>
+        </p:txBody>
+      </p:sp>
+      <p:sp>
+        <p:nvSpPr>
+          <p:cNvPr id="20" name="TextBox 19"/>
+          <p:cNvSpPr txBox="1"/>
+          <p:nvPr/>
+        </p:nvSpPr>
+        <p:spPr>
+          <a:xfrm>
+            <a:off x="7461504" y="2340864"/>
+            <a:ext cx="3913631" cy="914400"/>
+          </a:xfrm>
+          <a:prstGeom prst="rect">
+            <a:avLst/>
+          </a:prstGeom>
+          <a:noFill/>
+        </p:spPr>
+        <p:txBody>
+          <a:bodyPr wrap="square" lIns="0" rIns="0" tIns="0">
+            <a:spAutoFit/>
+          </a:bodyPr>
+          <a:lstStyle/>
+          <a:p>
+            <a:pPr>
+              <a:spcAft>
+                <a:spcPts val="300"/>
+              </a:spcAft>
+            </a:pPr>
+            <a:r>
+              <a:rPr sz="900" b="1" i="0">
+                <a:solidFill>
+                  <a:srgbClr val="1A214D"/>
+                </a:solidFill>
+                <a:latin typeface="Lato"/>
+              </a:rPr>
+              <a:t>Write FEEL formulas from a prompt </a:t>
+            </a:r>
+            <a:r>
+              <a:rPr sz="900" b="0" i="0">
+                <a:solidFill>
+                  <a:srgbClr val="1A214D"/>
+                </a:solidFill>
+                <a:latin typeface="Lato"/>
+              </a:rPr>
+              <a:t>in Limit Assignment › Calculated Variables — configuring them is too difficult for users today (Anto).</a:t>
+            </a:r>
+          </a:p>
+          <a:p>
+            <a:pPr>
+              <a:spcAft>
+                <a:spcPts val="300"/>
+              </a:spcAft>
+            </a:pPr>
+            <a:r>
+              <a:rPr sz="900" b="1" i="0">
+                <a:solidFill>
+                  <a:srgbClr val="1A214D"/>
+                </a:solidFill>
+                <a:latin typeface="Lato"/>
+              </a:rPr>
+              <a:t>Use case 5 folds in: </a:t>
+            </a:r>
+            <a:r>
+              <a:rPr sz="900" b="0" i="0">
+                <a:solidFill>
+                  <a:srgbClr val="1A214D"/>
+                </a:solidFill>
+                <a:latin typeface="Lato"/>
+              </a:rPr>
+              <a:t>create new Rule Engine variables with FEEL expressions.</a:t>
+            </a:r>
+          </a:p>
+        </p:txBody>
+      </p:sp>
+      <p:sp>
+        <p:nvSpPr>
+          <p:cNvPr id="21" name="Rounded Rectangle 20"/>
+          <p:cNvSpPr/>
+          <p:nvPr/>
+        </p:nvSpPr>
+        <p:spPr>
+          <a:xfrm>
+            <a:off x="7315200" y="3456432"/>
+            <a:ext cx="4206240" cy="1353312"/>
+          </a:xfrm>
+          <a:prstGeom prst="roundRect">
+            <a:avLst>
+              <a:gd name="adj" fmla="val 12000"/>
+            </a:avLst>
+          </a:prstGeom>
+          <a:solidFill>
+            <a:srgbClr val="FFFFFF"/>
+          </a:solidFill>
+          <a:ln w="9525">
+            <a:solidFill>
+              <a:srgbClr val="1A214D"/>
+            </a:solidFill>
+          </a:ln>
+          <a:effectLst/>
+        </p:spPr>
+        <p:style>
+          <a:lnRef idx="1">
+            <a:schemeClr val="accent1"/>
+          </a:lnRef>
+          <a:fillRef idx="3">
+            <a:schemeClr val="accent1"/>
+          </a:fillRef>
+          <a:effectRef idx="0">
+            <a:schemeClr val="accent1"/>
+          </a:effectRef>
+          <a:fontRef idx="minor">
+            <a:schemeClr val="lt1"/>
+          </a:fontRef>
+        </p:style>
+        <p:txBody>
+          <a:bodyPr rtlCol="0" anchor="ctr"/>
+          <a:lstStyle/>
+          <a:p>
+            <a:pPr algn="ctr"/>
+          </a:p>
+        </p:txBody>
+      </p:sp>
+      <p:sp>
+        <p:nvSpPr>
+          <p:cNvPr id="22" name="TextBox 21"/>
+          <p:cNvSpPr txBox="1"/>
+          <p:nvPr/>
+        </p:nvSpPr>
+        <p:spPr>
+          <a:xfrm>
+            <a:off x="7461504" y="3566160"/>
+            <a:ext cx="3913631" cy="274320"/>
+          </a:xfrm>
+          <a:prstGeom prst="rect">
+            <a:avLst/>
+          </a:prstGeom>
+          <a:noFill/>
+        </p:spPr>
+        <p:txBody>
+          <a:bodyPr wrap="square" lIns="0" rIns="0" tIns="0" bIns="0">
+            <a:spAutoFit/>
+          </a:bodyPr>
+          <a:lstStyle/>
+          <a:p>
+            <a:pPr algn="l"/>
+            <a:r>
+              <a:rPr sz="1100" b="1" i="0">
+                <a:solidFill>
+                  <a:srgbClr val="3B7EF6"/>
+                </a:solidFill>
+                <a:latin typeface="Lato"/>
+              </a:rPr>
+              <a:t>Technical base</a:t>
+            </a:r>
+          </a:p>
+        </p:txBody>
+      </p:sp>
+      <p:sp>
+        <p:nvSpPr>
+          <p:cNvPr id="23" name="TextBox 22"/>
+          <p:cNvSpPr txBox="1"/>
+          <p:nvPr/>
+        </p:nvSpPr>
+        <p:spPr>
+          <a:xfrm>
+            <a:off x="7461504" y="3877056"/>
+            <a:ext cx="3913631" cy="822960"/>
+          </a:xfrm>
+          <a:prstGeom prst="rect">
+            <a:avLst/>
+          </a:prstGeom>
+          <a:noFill/>
+        </p:spPr>
+        <p:txBody>
+          <a:bodyPr wrap="square" lIns="0" rIns="0" tIns="0">
+            <a:spAutoFit/>
+          </a:bodyPr>
+          <a:lstStyle/>
+          <a:p>
+            <a:pPr>
+              <a:spcAft>
+                <a:spcPts val="300"/>
+              </a:spcAft>
+            </a:pPr>
+            <a:r>
+              <a:rPr sz="900" b="1" i="0">
+                <a:solidFill>
+                  <a:srgbClr val="1A214D"/>
+                </a:solidFill>
+                <a:latin typeface="Lato"/>
+              </a:rPr>
+              <a:t>FEEL </a:t>
+            </a:r>
+            <a:r>
+              <a:rPr sz="900" b="0" i="0">
+                <a:solidFill>
+                  <a:srgbClr val="1A214D"/>
+                </a:solidFill>
+                <a:latin typeface="Lato"/>
+              </a:rPr>
+              <a:t>is the DMN-standard expression language — a small formal grammar.</a:t>
+            </a:r>
+          </a:p>
+          <a:p>
+            <a:pPr>
+              <a:spcAft>
+                <a:spcPts val="300"/>
+              </a:spcAft>
+            </a:pPr>
+            <a:r>
+              <a:rPr sz="900" b="1" i="0">
+                <a:solidFill>
+                  <a:srgbClr val="1A214D"/>
+                </a:solidFill>
+                <a:latin typeface="Lato"/>
+              </a:rPr>
+              <a:t>Constrained code generation </a:t>
+            </a:r>
+            <a:r>
+              <a:rPr sz="900" b="0" i="0">
+                <a:solidFill>
+                  <a:srgbClr val="1A214D"/>
+                </a:solidFill>
+                <a:latin typeface="Lato"/>
+              </a:rPr>
+              <a:t>with instant parser validation is the most mature LLM pattern in production copilots.</a:t>
+            </a:r>
+          </a:p>
+        </p:txBody>
+      </p:sp>
+      <p:sp>
+        <p:nvSpPr>
+          <p:cNvPr id="24" name="Rounded Rectangle 23"/>
+          <p:cNvSpPr/>
+          <p:nvPr/>
+        </p:nvSpPr>
+        <p:spPr>
+          <a:xfrm>
+            <a:off x="7315200" y="4901184"/>
+            <a:ext cx="4206240" cy="1362456"/>
+          </a:xfrm>
+          <a:prstGeom prst="roundRect">
+            <a:avLst>
+              <a:gd name="adj" fmla="val 12000"/>
+            </a:avLst>
+          </a:prstGeom>
+          <a:solidFill>
+            <a:srgbClr val="FFFFFF"/>
+          </a:solidFill>
+          <a:ln w="9525">
+            <a:solidFill>
+              <a:srgbClr val="1A214D"/>
+            </a:solidFill>
+          </a:ln>
+          <a:effectLst/>
+        </p:spPr>
+        <p:style>
+          <a:lnRef idx="1">
+            <a:schemeClr val="accent1"/>
+          </a:lnRef>
+          <a:fillRef idx="3">
+            <a:schemeClr val="accent1"/>
+          </a:fillRef>
+          <a:effectRef idx="0">
+            <a:schemeClr val="accent1"/>
+          </a:effectRef>
+          <a:fontRef idx="minor">
+            <a:schemeClr val="lt1"/>
+          </a:fontRef>
+        </p:style>
+        <p:txBody>
+          <a:bodyPr rtlCol="0" anchor="ctr"/>
+          <a:lstStyle/>
+          <a:p>
+            <a:pPr algn="ctr"/>
+          </a:p>
+        </p:txBody>
+      </p:sp>
+      <p:sp>
+        <p:nvSpPr>
+          <p:cNvPr id="25" name="TextBox 24"/>
+          <p:cNvSpPr txBox="1"/>
+          <p:nvPr/>
+        </p:nvSpPr>
+        <p:spPr>
+          <a:xfrm>
+            <a:off x="7461504" y="5010912"/>
+            <a:ext cx="3913631" cy="274320"/>
+          </a:xfrm>
+          <a:prstGeom prst="rect">
+            <a:avLst/>
+          </a:prstGeom>
+          <a:noFill/>
+        </p:spPr>
+        <p:txBody>
+          <a:bodyPr wrap="square" lIns="0" rIns="0" tIns="0" bIns="0">
+            <a:spAutoFit/>
+          </a:bodyPr>
+          <a:lstStyle/>
+          <a:p>
+            <a:pPr algn="l"/>
+            <a:r>
+              <a:rPr sz="1100" b="1" i="0">
+                <a:solidFill>
+                  <a:srgbClr val="3B7EF6"/>
+                </a:solidFill>
+                <a:latin typeface="Lato"/>
+              </a:rPr>
+              <a:t>Feasibility &amp; gate</a:t>
+            </a:r>
+          </a:p>
+        </p:txBody>
+      </p:sp>
+      <p:sp>
+        <p:nvSpPr>
+          <p:cNvPr id="26" name="TextBox 25"/>
+          <p:cNvSpPr txBox="1"/>
+          <p:nvPr/>
+        </p:nvSpPr>
+        <p:spPr>
+          <a:xfrm>
+            <a:off x="7461504" y="5321808"/>
+            <a:ext cx="3913631" cy="832104"/>
+          </a:xfrm>
+          <a:prstGeom prst="rect">
+            <a:avLst/>
+          </a:prstGeom>
+          <a:noFill/>
+        </p:spPr>
+        <p:txBody>
+          <a:bodyPr wrap="square" lIns="0" rIns="0" tIns="0">
+            <a:spAutoFit/>
+          </a:bodyPr>
+          <a:lstStyle/>
+          <a:p>
+            <a:pPr>
+              <a:spcAft>
+                <a:spcPts val="300"/>
+              </a:spcAft>
+            </a:pPr>
+            <a:r>
+              <a:rPr sz="900" b="1" i="0">
+                <a:solidFill>
+                  <a:srgbClr val="1A214D"/>
+                </a:solidFill>
+                <a:latin typeface="Lato"/>
+              </a:rPr>
+              <a:t>Flow: </a:t>
+            </a:r>
+            <a:r>
+              <a:rPr sz="900" b="0" i="0">
+                <a:solidFill>
+                  <a:srgbClr val="1A214D"/>
+                </a:solidFill>
+                <a:latin typeface="Lato"/>
+              </a:rPr>
+              <a:t>generate → parse → preview on sample values → save as Maker request.</a:t>
+            </a:r>
+          </a:p>
+          <a:p>
+            <a:pPr>
+              <a:spcAft>
+                <a:spcPts val="300"/>
+              </a:spcAft>
+            </a:pPr>
+            <a:r>
+              <a:rPr sz="900" b="1" i="0">
+                <a:solidFill>
+                  <a:srgbClr val="1A214D"/>
+                </a:solidFill>
+                <a:latin typeface="Lato"/>
+              </a:rPr>
+              <a:t>Zero customer data to start: </a:t>
+            </a:r>
+            <a:r>
+              <a:rPr sz="900" b="0" i="0">
+                <a:solidFill>
+                  <a:srgbClr val="1A214D"/>
+                </a:solidFill>
+                <a:latin typeface="Lato"/>
+              </a:rPr>
+              <a:t>ground on the existing formula library. Gate: BA panel signs off a replay of the current formulas from plain-language descriptions. Recommended v1.</a:t>
+            </a:r>
+          </a:p>
+        </p:txBody>
+      </p:sp>
+      <p:sp>
+        <p:nvSpPr>
+          <p:cNvPr id="27" name="TextBox 26"/>
+          <p:cNvSpPr txBox="1"/>
+          <p:nvPr/>
+        </p:nvSpPr>
+        <p:spPr>
+          <a:xfrm>
+            <a:off x="457200" y="6336792"/>
+            <a:ext cx="10515600" cy="164592"/>
+          </a:xfrm>
+          <a:prstGeom prst="rect">
+            <a:avLst/>
+          </a:prstGeom>
+          <a:noFill/>
+        </p:spPr>
+        <p:txBody>
+          <a:bodyPr wrap="square" lIns="0" rIns="0" tIns="0" bIns="0">
+            <a:spAutoFit/>
+          </a:bodyPr>
+          <a:lstStyle/>
+          <a:p>
+            <a:pPr algn="l"/>
+            <a:r>
+              <a:rPr sz="700" b="0" i="1">
+                <a:solidFill>
+                  <a:srgbClr val="1A214D"/>
+                </a:solidFill>
+                <a:latin typeface="Lato"/>
+              </a:rPr>
+              <a:t>Sources: OMG DMN / FEEL specification · SMBP portal mirror (Appro build)</a:t>
+            </a:r>
+          </a:p>
+        </p:txBody>
+      </p:sp>
+    </p:spTree>
+  </p:cSld>
+  <p:clrMapOvr>
+    <a:masterClrMapping/>
+  </p:clrMapOvr>
+</p:sld>
+</file>
+
+<file path=ppt/slides/slide11.xml><?xml version="1.0" encoding="utf-8"?>
+<p:sld xmlns:a="http://schemas.openxmlformats.org/drawingml/2006/main" xmlns:p="http://schemas.openxmlformats.org/presentationml/2006/main" xmlns:r="http://schemas.openxmlformats.org/officeDocument/2006/relationships">
+  <p:cSld>
+    <p:bg>
+      <p:bgPr>
+        <a:solidFill>
+          <a:srgbClr val="FFFFFF"/>
+        </a:solidFill>
+        <a:effectLst/>
+      </p:bgPr>
+    </p:bg>
+    <p:spTree>
+      <p:nvGrpSpPr>
+        <p:cNvPr id="1" name=""/>
+        <p:cNvGrpSpPr/>
+        <p:nvPr/>
+      </p:nvGrpSpPr>
+      <p:grpSpPr/>
+      <p:sp>
+        <p:nvSpPr>
+          <p:cNvPr id="2" name="Oval 1"/>
+          <p:cNvSpPr/>
+          <p:nvPr/>
+        </p:nvSpPr>
+        <p:spPr>
+          <a:xfrm>
+            <a:off x="10515600" y="-2011680"/>
+            <a:ext cx="4114800" cy="4114800"/>
+          </a:xfrm>
+          <a:prstGeom prst="ellipse">
+            <a:avLst/>
+          </a:prstGeom>
+          <a:solidFill>
+            <a:srgbClr val="1A214D"/>
+          </a:solidFill>
+          <a:ln>
+            <a:noFill/>
+          </a:ln>
+          <a:effectLst/>
+        </p:spPr>
+        <p:style>
+          <a:lnRef idx="1">
+            <a:schemeClr val="accent1"/>
+          </a:lnRef>
+          <a:fillRef idx="3">
+            <a:schemeClr val="accent1"/>
+          </a:fillRef>
+          <a:effectRef idx="0">
+            <a:schemeClr val="accent1"/>
+          </a:effectRef>
+          <a:fontRef idx="minor">
+            <a:schemeClr val="lt1"/>
+          </a:fontRef>
+        </p:style>
+        <p:txBody>
+          <a:bodyPr rtlCol="0" anchor="ctr"/>
+          <a:lstStyle/>
+          <a:p>
+            <a:pPr algn="ctr"/>
+          </a:p>
+        </p:txBody>
+      </p:sp>
+      <p:sp>
+        <p:nvSpPr>
+          <p:cNvPr id="3" name="TextBox 2"/>
+          <p:cNvSpPr txBox="1"/>
+          <p:nvPr/>
+        </p:nvSpPr>
+        <p:spPr>
+          <a:xfrm>
+            <a:off x="228600" y="36576"/>
+            <a:ext cx="10058400" cy="164592"/>
+          </a:xfrm>
+          <a:prstGeom prst="rect">
+            <a:avLst/>
+          </a:prstGeom>
+          <a:noFill/>
+        </p:spPr>
+        <p:txBody>
+          <a:bodyPr wrap="square" lIns="0" rIns="0" tIns="0" bIns="0">
+            <a:spAutoFit/>
+          </a:bodyPr>
+          <a:lstStyle/>
+          <a:p>
+            <a:pPr algn="l"/>
+            <a:r>
+              <a:rPr sz="700" b="0" i="0">
+                <a:solidFill>
+                  <a:srgbClr val="1A214D"/>
+                </a:solidFill>
+                <a:latin typeface="Lato"/>
+              </a:rPr>
+              <a:t>APPRO – INTERNAL &amp; APPROVED DOMAINS | Controlled Distribution</a:t>
+            </a:r>
+          </a:p>
+        </p:txBody>
+      </p:sp>
+      <p:pic>
+        <p:nvPicPr>
+          <p:cNvPr id="4" name="Picture 3" descr="logo-white.png"/>
+          <p:cNvPicPr>
+            <a:picLocks noChangeAspect="1"/>
+          </p:cNvPicPr>
+          <p:nvPr/>
+        </p:nvPicPr>
+        <p:blipFill>
+          <a:blip r:embed="rId2"/>
+          <a:stretch>
+            <a:fillRect/>
+          </a:stretch>
+        </p:blipFill>
+        <p:spPr>
+          <a:xfrm>
+            <a:off x="10744200" y="274320"/>
+            <a:ext cx="1280160" cy="373807"/>
+          </a:xfrm>
+          <a:prstGeom prst="rect">
+            <a:avLst/>
+          </a:prstGeom>
+        </p:spPr>
+      </p:pic>
+      <p:sp>
+        <p:nvSpPr>
+          <p:cNvPr id="5" name="Rounded Rectangle 4"/>
+          <p:cNvSpPr/>
+          <p:nvPr/>
+        </p:nvSpPr>
+        <p:spPr>
+          <a:xfrm>
+            <a:off x="228600" y="493776"/>
+            <a:ext cx="1640433" cy="274320"/>
+          </a:xfrm>
+          <a:prstGeom prst="roundRect">
+            <a:avLst>
+              <a:gd name="adj" fmla="val 50000"/>
+            </a:avLst>
+          </a:prstGeom>
+          <a:solidFill>
+            <a:srgbClr val="FDBA23"/>
+          </a:solidFill>
+          <a:ln>
+            <a:noFill/>
+          </a:ln>
+          <a:effectLst/>
+        </p:spPr>
+        <p:style>
+          <a:lnRef idx="1">
+            <a:schemeClr val="accent1"/>
+          </a:lnRef>
+          <a:fillRef idx="3">
+            <a:schemeClr val="accent1"/>
+          </a:fillRef>
+          <a:effectRef idx="0">
+            <a:schemeClr val="accent1"/>
+          </a:effectRef>
+          <a:fontRef idx="minor">
+            <a:schemeClr val="lt1"/>
+          </a:fontRef>
+        </p:style>
+        <p:txBody>
+          <a:bodyPr rtlCol="0" anchor="ctr"/>
+          <a:lstStyle/>
+          <a:p>
+            <a:pPr algn="ctr"/>
+          </a:p>
+        </p:txBody>
+      </p:sp>
+      <p:sp>
+        <p:nvSpPr>
+          <p:cNvPr id="6" name="TextBox 5"/>
+          <p:cNvSpPr txBox="1"/>
+          <p:nvPr/>
+        </p:nvSpPr>
+        <p:spPr>
+          <a:xfrm>
+            <a:off x="274320" y="365760"/>
+            <a:ext cx="10058400" cy="502920"/>
+          </a:xfrm>
+          <a:prstGeom prst="rect">
+            <a:avLst/>
+          </a:prstGeom>
+          <a:noFill/>
+        </p:spPr>
+        <p:txBody>
+          <a:bodyPr wrap="square" lIns="0" rIns="0" tIns="0" bIns="0">
+            <a:spAutoFit/>
+          </a:bodyPr>
+          <a:lstStyle/>
+          <a:p>
+            <a:pPr algn="l"/>
+            <a:r>
+              <a:rPr sz="2000" b="1" i="0">
+                <a:solidFill>
+                  <a:srgbClr val="1A214D"/>
+                </a:solidFill>
+                <a:latin typeface="Lato"/>
+              </a:rPr>
+              <a:t>FEEL Assist </a:t>
+            </a:r>
+            <a:r>
+              <a:rPr sz="2000" b="1" i="0">
+                <a:solidFill>
+                  <a:srgbClr val="3B7EF6"/>
+                </a:solidFill>
+                <a:latin typeface="Lato"/>
+              </a:rPr>
+              <a:t>— How It Looks</a:t>
+            </a:r>
+          </a:p>
+        </p:txBody>
+      </p:sp>
+      <p:sp>
+        <p:nvSpPr>
+          <p:cNvPr id="7" name="Oval 6"/>
+          <p:cNvSpPr/>
+          <p:nvPr/>
+        </p:nvSpPr>
+        <p:spPr>
+          <a:xfrm>
+            <a:off x="274320" y="6473952"/>
+            <a:ext cx="164592" cy="164592"/>
+          </a:xfrm>
+          <a:prstGeom prst="ellipse">
+            <a:avLst/>
+          </a:prstGeom>
+          <a:solidFill>
+            <a:srgbClr val="3B7EF6"/>
+          </a:solidFill>
+          <a:ln>
+            <a:noFill/>
+          </a:ln>
+          <a:effectLst/>
+        </p:spPr>
+        <p:style>
+          <a:lnRef idx="1">
+            <a:schemeClr val="accent1"/>
+          </a:lnRef>
+          <a:fillRef idx="3">
+            <a:schemeClr val="accent1"/>
+          </a:fillRef>
+          <a:effectRef idx="0">
+            <a:schemeClr val="accent1"/>
+          </a:effectRef>
+          <a:fontRef idx="minor">
+            <a:schemeClr val="lt1"/>
+          </a:fontRef>
+        </p:style>
+        <p:txBody>
+          <a:bodyPr rtlCol="0" anchor="ctr"/>
+          <a:lstStyle/>
+          <a:p>
+            <a:pPr algn="ctr"/>
+          </a:p>
+        </p:txBody>
+      </p:sp>
+      <p:sp>
+        <p:nvSpPr>
+          <p:cNvPr id="8" name="Oval 7"/>
+          <p:cNvSpPr/>
+          <p:nvPr/>
+        </p:nvSpPr>
+        <p:spPr>
+          <a:xfrm>
+            <a:off x="493776" y="6473952"/>
+            <a:ext cx="164592" cy="164592"/>
+          </a:xfrm>
+          <a:prstGeom prst="ellipse">
+            <a:avLst/>
+          </a:prstGeom>
+          <a:solidFill>
+            <a:srgbClr val="3B7EF6"/>
+          </a:solidFill>
+          <a:ln>
+            <a:noFill/>
+          </a:ln>
+          <a:effectLst/>
+        </p:spPr>
+        <p:style>
+          <a:lnRef idx="1">
+            <a:schemeClr val="accent1"/>
+          </a:lnRef>
+          <a:fillRef idx="3">
+            <a:schemeClr val="accent1"/>
+          </a:fillRef>
+          <a:effectRef idx="0">
+            <a:schemeClr val="accent1"/>
+          </a:effectRef>
+          <a:fontRef idx="minor">
+            <a:schemeClr val="lt1"/>
+          </a:fontRef>
+        </p:style>
+        <p:txBody>
+          <a:bodyPr rtlCol="0" anchor="ctr"/>
+          <a:lstStyle/>
+          <a:p>
+            <a:pPr algn="ctr"/>
+          </a:p>
+        </p:txBody>
+      </p:sp>
+      <p:sp>
+        <p:nvSpPr>
+          <p:cNvPr id="9" name="Oval 8"/>
+          <p:cNvSpPr/>
+          <p:nvPr/>
+        </p:nvSpPr>
+        <p:spPr>
+          <a:xfrm>
+            <a:off x="713232" y="6473952"/>
+            <a:ext cx="164592" cy="164592"/>
+          </a:xfrm>
+          <a:prstGeom prst="ellipse">
+            <a:avLst/>
+          </a:prstGeom>
+          <a:solidFill>
+            <a:srgbClr val="3B7EF6"/>
+          </a:solidFill>
+          <a:ln>
+            <a:noFill/>
+          </a:ln>
+          <a:effectLst/>
+        </p:spPr>
+        <p:style>
+          <a:lnRef idx="1">
+            <a:schemeClr val="accent1"/>
+          </a:lnRef>
+          <a:fillRef idx="3">
+            <a:schemeClr val="accent1"/>
+          </a:fillRef>
+          <a:effectRef idx="0">
+            <a:schemeClr val="accent1"/>
+          </a:effectRef>
+          <a:fontRef idx="minor">
+            <a:schemeClr val="lt1"/>
+          </a:fontRef>
+        </p:style>
+        <p:txBody>
+          <a:bodyPr rtlCol="0" anchor="ctr"/>
+          <a:lstStyle/>
+          <a:p>
+            <a:pPr algn="ctr"/>
+          </a:p>
+        </p:txBody>
+      </p:sp>
+      <p:sp>
+        <p:nvSpPr>
+          <p:cNvPr id="10" name="Oval 9"/>
+          <p:cNvSpPr/>
+          <p:nvPr/>
+        </p:nvSpPr>
+        <p:spPr>
+          <a:xfrm>
+            <a:off x="969264" y="6473952"/>
+            <a:ext cx="164592" cy="164592"/>
+          </a:xfrm>
+          <a:prstGeom prst="ellipse">
+            <a:avLst/>
+          </a:prstGeom>
+          <a:solidFill>
+            <a:srgbClr val="3B7EF6"/>
+          </a:solidFill>
+          <a:ln>
+            <a:noFill/>
+          </a:ln>
+          <a:effectLst/>
+        </p:spPr>
+        <p:style>
+          <a:lnRef idx="1">
+            <a:schemeClr val="accent1"/>
+          </a:lnRef>
+          <a:fillRef idx="3">
+            <a:schemeClr val="accent1"/>
+          </a:fillRef>
+          <a:effectRef idx="0">
+            <a:schemeClr val="accent1"/>
+          </a:effectRef>
+          <a:fontRef idx="minor">
+            <a:schemeClr val="lt1"/>
+          </a:fontRef>
+        </p:style>
+        <p:txBody>
+          <a:bodyPr rtlCol="0" anchor="ctr"/>
+          <a:lstStyle/>
+          <a:p>
+            <a:pPr algn="ctr"/>
+          </a:p>
+        </p:txBody>
+      </p:sp>
+      <p:sp>
+        <p:nvSpPr>
+          <p:cNvPr id="11" name="TextBox 10"/>
+          <p:cNvSpPr txBox="1"/>
+          <p:nvPr/>
+        </p:nvSpPr>
+        <p:spPr>
+          <a:xfrm>
+            <a:off x="1371600" y="6565392"/>
+            <a:ext cx="9144000" cy="182880"/>
+          </a:xfrm>
+          <a:prstGeom prst="rect">
+            <a:avLst/>
+          </a:prstGeom>
+          <a:noFill/>
+        </p:spPr>
+        <p:txBody>
+          <a:bodyPr wrap="square" lIns="0" rIns="0" tIns="0" bIns="0">
+            <a:spAutoFit/>
+          </a:bodyPr>
+          <a:lstStyle/>
+          <a:p>
+            <a:pPr algn="ctr"/>
+            <a:r>
+              <a:rPr sz="700" b="0" i="0">
+                <a:solidFill>
+                  <a:srgbClr val="1A214D"/>
+                </a:solidFill>
+                <a:latin typeface="Lato"/>
+              </a:rPr>
+              <a:t>This document is classified as INTERNAL &amp; WHITELISTED | Sharing allowed only with approved external domains</a:t>
+            </a:r>
+          </a:p>
+        </p:txBody>
+      </p:sp>
+      <p:sp>
+        <p:nvSpPr>
+          <p:cNvPr id="12" name="TextBox 11"/>
+          <p:cNvSpPr txBox="1"/>
+          <p:nvPr/>
+        </p:nvSpPr>
+        <p:spPr>
+          <a:xfrm>
+            <a:off x="11475720" y="6565392"/>
+            <a:ext cx="548640" cy="182880"/>
+          </a:xfrm>
+          <a:prstGeom prst="rect">
+            <a:avLst/>
+          </a:prstGeom>
+          <a:noFill/>
+        </p:spPr>
+        <p:txBody>
+          <a:bodyPr wrap="square" lIns="0" rIns="0" tIns="0" bIns="0">
+            <a:spAutoFit/>
+          </a:bodyPr>
+          <a:lstStyle/>
+          <a:p>
+            <a:pPr algn="r"/>
+            <a:r>
+              <a:rPr sz="800" b="0" i="0">
+                <a:solidFill>
+                  <a:srgbClr val="1A214D"/>
+                </a:solidFill>
+                <a:latin typeface="Lato"/>
+              </a:rPr>
+              <a:t>10</a:t>
+            </a:r>
+          </a:p>
+        </p:txBody>
+      </p:sp>
+      <p:sp>
+        <p:nvSpPr>
+          <p:cNvPr id="13" name="Rounded Rectangle 12"/>
+          <p:cNvSpPr/>
+          <p:nvPr/>
+        </p:nvSpPr>
+        <p:spPr>
+          <a:xfrm>
+            <a:off x="457200" y="1024128"/>
+            <a:ext cx="3063240" cy="292608"/>
+          </a:xfrm>
+          <a:prstGeom prst="roundRect">
+            <a:avLst>
+              <a:gd name="adj" fmla="val 50000"/>
+            </a:avLst>
+          </a:prstGeom>
+          <a:solidFill>
+            <a:srgbClr val="FDBA23"/>
+          </a:solidFill>
+          <a:ln>
+            <a:noFill/>
+          </a:ln>
+          <a:effectLst/>
+        </p:spPr>
+        <p:style>
+          <a:lnRef idx="1">
+            <a:schemeClr val="accent1"/>
+          </a:lnRef>
+          <a:fillRef idx="3">
+            <a:schemeClr val="accent1"/>
+          </a:fillRef>
+          <a:effectRef idx="0">
+            <a:schemeClr val="accent1"/>
+          </a:effectRef>
+          <a:fontRef idx="minor">
+            <a:schemeClr val="lt1"/>
+          </a:fontRef>
+        </p:style>
+        <p:txBody>
+          <a:bodyPr rtlCol="0" anchor="ctr"/>
+          <a:lstStyle/>
+          <a:p>
+            <a:pPr algn="ctr"/>
+          </a:p>
+        </p:txBody>
+      </p:sp>
+      <p:sp>
+        <p:nvSpPr>
+          <p:cNvPr id="14" name="TextBox 13"/>
+          <p:cNvSpPr txBox="1"/>
+          <p:nvPr/>
+        </p:nvSpPr>
+        <p:spPr>
+          <a:xfrm>
+            <a:off x="457200" y="1074420"/>
+            <a:ext cx="3063240" cy="228600"/>
+          </a:xfrm>
+          <a:prstGeom prst="rect">
+            <a:avLst/>
+          </a:prstGeom>
+          <a:noFill/>
+        </p:spPr>
+        <p:txBody>
+          <a:bodyPr wrap="square" lIns="0" rIns="0" tIns="0" bIns="0">
+            <a:spAutoFit/>
+          </a:bodyPr>
+          <a:lstStyle/>
+          <a:p>
+            <a:pPr algn="ctr"/>
+            <a:r>
+              <a:rPr sz="1000" b="1" i="0">
+                <a:solidFill>
+                  <a:srgbClr val="1A214D"/>
+                </a:solidFill>
+                <a:latin typeface="Lato"/>
+              </a:rPr>
+              <a:t>ILLUSTRATIVE MOCKUP — SAMPLE DATA</a:t>
+            </a:r>
+          </a:p>
+        </p:txBody>
+      </p:sp>
+      <p:pic>
+        <p:nvPicPr>
+          <p:cNvPr id="15" name="Picture 14" descr="mock-4-feel-assist.png"/>
+          <p:cNvPicPr>
+            <a:picLocks noChangeAspect="1"/>
+          </p:cNvPicPr>
+          <p:nvPr/>
+        </p:nvPicPr>
+        <p:blipFill>
+          <a:blip r:embed="rId4"/>
+          <a:stretch>
+            <a:fillRect/>
+          </a:stretch>
+        </p:blipFill>
+        <p:spPr>
+          <a:xfrm>
+            <a:off x="1843887" y="1911667"/>
+            <a:ext cx="8503920" cy="3720465"/>
+          </a:xfrm>
+          <a:prstGeom prst="rect">
+            <a:avLst/>
+          </a:prstGeom>
+        </p:spPr>
+      </p:pic>
+      <p:sp>
+        <p:nvSpPr>
+          <p:cNvPr id="16" name="Rounded Rectangle 15"/>
+          <p:cNvSpPr/>
+          <p:nvPr/>
+        </p:nvSpPr>
+        <p:spPr>
+          <a:xfrm>
+            <a:off x="1830171" y="1897951"/>
+            <a:ext cx="8531352" cy="3747897"/>
+          </a:xfrm>
+          <a:prstGeom prst="roundRect">
+            <a:avLst>
+              <a:gd name="adj" fmla="val 3000"/>
+            </a:avLst>
+          </a:prstGeom>
+          <a:noFill/>
+          <a:ln w="12700">
+            <a:solidFill>
+              <a:srgbClr val="1A214D"/>
+            </a:solidFill>
+          </a:ln>
+          <a:effectLst/>
+        </p:spPr>
+        <p:style>
+          <a:lnRef idx="1">
+            <a:schemeClr val="accent1"/>
+          </a:lnRef>
+          <a:fillRef idx="3">
+            <a:schemeClr val="accent1"/>
+          </a:fillRef>
+          <a:effectRef idx="0">
+            <a:schemeClr val="accent1"/>
+          </a:effectRef>
+          <a:fontRef idx="minor">
+            <a:schemeClr val="lt1"/>
+          </a:fontRef>
+        </p:style>
+        <p:txBody>
+          <a:bodyPr rtlCol="0" anchor="ctr"/>
+          <a:lstStyle/>
+          <a:p>
+            <a:pPr algn="ctr"/>
+          </a:p>
+        </p:txBody>
+      </p:sp>
+      <p:sp>
+        <p:nvSpPr>
+          <p:cNvPr id="17" name="TextBox 16"/>
+          <p:cNvSpPr txBox="1"/>
+          <p:nvPr/>
+        </p:nvSpPr>
+        <p:spPr>
+          <a:xfrm>
+            <a:off x="1843887" y="5723572"/>
+            <a:ext cx="8503920" cy="365760"/>
+          </a:xfrm>
+          <a:prstGeom prst="rect">
+            <a:avLst/>
+          </a:prstGeom>
+          <a:noFill/>
+        </p:spPr>
+        <p:txBody>
+          <a:bodyPr wrap="square" lIns="0" rIns="0" tIns="0" bIns="0">
+            <a:spAutoFit/>
+          </a:bodyPr>
+          <a:lstStyle/>
+          <a:p>
+            <a:pPr algn="l"/>
+            <a:r>
+              <a:rPr sz="900" b="0" i="1">
+                <a:solidFill>
+                  <a:srgbClr val="1A214D"/>
+                </a:solidFill>
+                <a:latin typeface="Lato"/>
+              </a:rPr>
+              <a:t>FEEL Assist in Limit Assignment › Calculated Variables — plain-language prompt, generated FEEL expression with parser validation, preview on sample values, saved as a Maker request.</a:t>
+            </a:r>
+          </a:p>
+        </p:txBody>
+      </p:sp>
+    </p:spTree>
+  </p:cSld>
+  <p:clrMapOvr>
+    <a:masterClrMapping/>
+  </p:clrMapOvr>
+</p:sld>
+</file>
+
+<file path=ppt/slides/slide12.xml><?xml version="1.0" encoding="utf-8"?>
+<p:sld xmlns:a="http://schemas.openxmlformats.org/drawingml/2006/main" xmlns:p="http://schemas.openxmlformats.org/presentationml/2006/main" xmlns:r="http://schemas.openxmlformats.org/officeDocument/2006/relationships">
+  <p:cSld>
+    <p:bg>
+      <p:bgPr>
+        <a:solidFill>
+          <a:srgbClr val="FFFFFF"/>
+        </a:solidFill>
+        <a:effectLst/>
+      </p:bgPr>
+    </p:bg>
+    <p:spTree>
+      <p:nvGrpSpPr>
+        <p:cNvPr id="1" name=""/>
+        <p:cNvGrpSpPr/>
+        <p:nvPr/>
+      </p:nvGrpSpPr>
+      <p:grpSpPr/>
+      <p:sp>
+        <p:nvSpPr>
+          <p:cNvPr id="2" name="Oval 1"/>
+          <p:cNvSpPr/>
+          <p:nvPr/>
+        </p:nvSpPr>
+        <p:spPr>
+          <a:xfrm>
+            <a:off x="10515600" y="-2011680"/>
+            <a:ext cx="4114800" cy="4114800"/>
+          </a:xfrm>
+          <a:prstGeom prst="ellipse">
+            <a:avLst/>
+          </a:prstGeom>
+          <a:solidFill>
+            <a:srgbClr val="1A214D"/>
+          </a:solidFill>
+          <a:ln>
+            <a:noFill/>
+          </a:ln>
+          <a:effectLst/>
+        </p:spPr>
+        <p:style>
+          <a:lnRef idx="1">
+            <a:schemeClr val="accent1"/>
+          </a:lnRef>
+          <a:fillRef idx="3">
+            <a:schemeClr val="accent1"/>
+          </a:fillRef>
+          <a:effectRef idx="0">
+            <a:schemeClr val="accent1"/>
+          </a:effectRef>
+          <a:fontRef idx="minor">
+            <a:schemeClr val="lt1"/>
+          </a:fontRef>
+        </p:style>
+        <p:txBody>
+          <a:bodyPr rtlCol="0" anchor="ctr"/>
+          <a:lstStyle/>
+          <a:p>
+            <a:pPr algn="ctr"/>
+          </a:p>
+        </p:txBody>
+      </p:sp>
+      <p:sp>
+        <p:nvSpPr>
+          <p:cNvPr id="3" name="TextBox 2"/>
+          <p:cNvSpPr txBox="1"/>
+          <p:nvPr/>
+        </p:nvSpPr>
+        <p:spPr>
+          <a:xfrm>
+            <a:off x="228600" y="36576"/>
+            <a:ext cx="10058400" cy="164592"/>
+          </a:xfrm>
+          <a:prstGeom prst="rect">
+            <a:avLst/>
+          </a:prstGeom>
+          <a:noFill/>
+        </p:spPr>
+        <p:txBody>
+          <a:bodyPr wrap="square" lIns="0" rIns="0" tIns="0" bIns="0">
+            <a:spAutoFit/>
+          </a:bodyPr>
+          <a:lstStyle/>
+          <a:p>
+            <a:pPr algn="l"/>
+            <a:r>
+              <a:rPr sz="700" b="0" i="0">
+                <a:solidFill>
+                  <a:srgbClr val="1A214D"/>
+                </a:solidFill>
+                <a:latin typeface="Lato"/>
+              </a:rPr>
+              <a:t>APPRO – INTERNAL &amp; APPROVED DOMAINS | Controlled Distribution</a:t>
+            </a:r>
+          </a:p>
+        </p:txBody>
+      </p:sp>
+      <p:pic>
+        <p:nvPicPr>
+          <p:cNvPr id="4" name="Picture 3" descr="logo-white.png"/>
+          <p:cNvPicPr>
+            <a:picLocks noChangeAspect="1"/>
+          </p:cNvPicPr>
+          <p:nvPr/>
+        </p:nvPicPr>
+        <p:blipFill>
+          <a:blip r:embed="rId2"/>
+          <a:stretch>
+            <a:fillRect/>
+          </a:stretch>
+        </p:blipFill>
+        <p:spPr>
+          <a:xfrm>
+            <a:off x="10744200" y="274320"/>
+            <a:ext cx="1280160" cy="373807"/>
+          </a:xfrm>
+          <a:prstGeom prst="rect">
+            <a:avLst/>
+          </a:prstGeom>
+        </p:spPr>
+      </p:pic>
+      <p:sp>
+        <p:nvSpPr>
+          <p:cNvPr id="5" name="Rounded Rectangle 4"/>
+          <p:cNvSpPr/>
+          <p:nvPr/>
+        </p:nvSpPr>
+        <p:spPr>
+          <a:xfrm>
+            <a:off x="228600" y="493776"/>
+            <a:ext cx="1640433" cy="274320"/>
+          </a:xfrm>
+          <a:prstGeom prst="roundRect">
+            <a:avLst>
+              <a:gd name="adj" fmla="val 50000"/>
+            </a:avLst>
+          </a:prstGeom>
+          <a:solidFill>
+            <a:srgbClr val="FDBA23"/>
+          </a:solidFill>
+          <a:ln>
+            <a:noFill/>
+          </a:ln>
+          <a:effectLst/>
+        </p:spPr>
+        <p:style>
+          <a:lnRef idx="1">
+            <a:schemeClr val="accent1"/>
+          </a:lnRef>
+          <a:fillRef idx="3">
+            <a:schemeClr val="accent1"/>
+          </a:fillRef>
+          <a:effectRef idx="0">
+            <a:schemeClr val="accent1"/>
+          </a:effectRef>
+          <a:fontRef idx="minor">
+            <a:schemeClr val="lt1"/>
+          </a:fontRef>
+        </p:style>
+        <p:txBody>
+          <a:bodyPr rtlCol="0" anchor="ctr"/>
+          <a:lstStyle/>
+          <a:p>
+            <a:pPr algn="ctr"/>
+          </a:p>
+        </p:txBody>
+      </p:sp>
+      <p:sp>
+        <p:nvSpPr>
+          <p:cNvPr id="6" name="TextBox 5"/>
+          <p:cNvSpPr txBox="1"/>
+          <p:nvPr/>
+        </p:nvSpPr>
+        <p:spPr>
+          <a:xfrm>
+            <a:off x="274320" y="365760"/>
+            <a:ext cx="10058400" cy="502920"/>
+          </a:xfrm>
+          <a:prstGeom prst="rect">
+            <a:avLst/>
+          </a:prstGeom>
+          <a:noFill/>
+        </p:spPr>
+        <p:txBody>
+          <a:bodyPr wrap="square" lIns="0" rIns="0" tIns="0" bIns="0">
+            <a:spAutoFit/>
+          </a:bodyPr>
+          <a:lstStyle/>
+          <a:p>
+            <a:pPr algn="l"/>
+            <a:r>
+              <a:rPr sz="2000" b="1" i="0">
+                <a:solidFill>
+                  <a:srgbClr val="1A214D"/>
+                </a:solidFill>
+                <a:latin typeface="Lato"/>
+              </a:rPr>
+              <a:t>Solution Direction </a:t>
+            </a:r>
+            <a:r>
+              <a:rPr sz="2000" b="1" i="0">
+                <a:solidFill>
+                  <a:srgbClr val="3B7EF6"/>
+                </a:solidFill>
+                <a:latin typeface="Lato"/>
+              </a:rPr>
+              <a:t>— One Model, Four Adapters</a:t>
+            </a:r>
+          </a:p>
+        </p:txBody>
+      </p:sp>
+      <p:sp>
+        <p:nvSpPr>
+          <p:cNvPr id="7" name="Oval 6"/>
+          <p:cNvSpPr/>
+          <p:nvPr/>
+        </p:nvSpPr>
+        <p:spPr>
+          <a:xfrm>
+            <a:off x="274320" y="6473952"/>
+            <a:ext cx="164592" cy="164592"/>
+          </a:xfrm>
+          <a:prstGeom prst="ellipse">
+            <a:avLst/>
+          </a:prstGeom>
+          <a:solidFill>
+            <a:srgbClr val="3B7EF6"/>
+          </a:solidFill>
+          <a:ln>
+            <a:noFill/>
+          </a:ln>
+          <a:effectLst/>
+        </p:spPr>
+        <p:style>
+          <a:lnRef idx="1">
+            <a:schemeClr val="accent1"/>
+          </a:lnRef>
+          <a:fillRef idx="3">
+            <a:schemeClr val="accent1"/>
+          </a:fillRef>
+          <a:effectRef idx="0">
+            <a:schemeClr val="accent1"/>
+          </a:effectRef>
+          <a:fontRef idx="minor">
+            <a:schemeClr val="lt1"/>
+          </a:fontRef>
+        </p:style>
+        <p:txBody>
+          <a:bodyPr rtlCol="0" anchor="ctr"/>
+          <a:lstStyle/>
+          <a:p>
+            <a:pPr algn="ctr"/>
+          </a:p>
+        </p:txBody>
+      </p:sp>
+      <p:sp>
+        <p:nvSpPr>
+          <p:cNvPr id="8" name="Oval 7"/>
+          <p:cNvSpPr/>
+          <p:nvPr/>
+        </p:nvSpPr>
+        <p:spPr>
+          <a:xfrm>
+            <a:off x="493776" y="6473952"/>
+            <a:ext cx="164592" cy="164592"/>
+          </a:xfrm>
+          <a:prstGeom prst="ellipse">
+            <a:avLst/>
+          </a:prstGeom>
+          <a:solidFill>
+            <a:srgbClr val="3B7EF6"/>
+          </a:solidFill>
+          <a:ln>
+            <a:noFill/>
+          </a:ln>
+          <a:effectLst/>
+        </p:spPr>
+        <p:style>
+          <a:lnRef idx="1">
+            <a:schemeClr val="accent1"/>
+          </a:lnRef>
+          <a:fillRef idx="3">
+            <a:schemeClr val="accent1"/>
+          </a:fillRef>
+          <a:effectRef idx="0">
+            <a:schemeClr val="accent1"/>
+          </a:effectRef>
+          <a:fontRef idx="minor">
+            <a:schemeClr val="lt1"/>
+          </a:fontRef>
+        </p:style>
+        <p:txBody>
+          <a:bodyPr rtlCol="0" anchor="ctr"/>
+          <a:lstStyle/>
+          <a:p>
+            <a:pPr algn="ctr"/>
+          </a:p>
+        </p:txBody>
+      </p:sp>
+      <p:sp>
+        <p:nvSpPr>
+          <p:cNvPr id="9" name="Oval 8"/>
+          <p:cNvSpPr/>
+          <p:nvPr/>
+        </p:nvSpPr>
+        <p:spPr>
+          <a:xfrm>
+            <a:off x="713232" y="6473952"/>
+            <a:ext cx="164592" cy="164592"/>
+          </a:xfrm>
+          <a:prstGeom prst="ellipse">
+            <a:avLst/>
+          </a:prstGeom>
+          <a:solidFill>
+            <a:srgbClr val="3B7EF6"/>
+          </a:solidFill>
+          <a:ln>
+            <a:noFill/>
+          </a:ln>
+          <a:effectLst/>
+        </p:spPr>
+        <p:style>
+          <a:lnRef idx="1">
+            <a:schemeClr val="accent1"/>
+          </a:lnRef>
+          <a:fillRef idx="3">
+            <a:schemeClr val="accent1"/>
+          </a:fillRef>
+          <a:effectRef idx="0">
+            <a:schemeClr val="accent1"/>
+          </a:effectRef>
+          <a:fontRef idx="minor">
+            <a:schemeClr val="lt1"/>
+          </a:fontRef>
+        </p:style>
+        <p:txBody>
+          <a:bodyPr rtlCol="0" anchor="ctr"/>
+          <a:lstStyle/>
+          <a:p>
+            <a:pPr algn="ctr"/>
+          </a:p>
+        </p:txBody>
+      </p:sp>
+      <p:sp>
+        <p:nvSpPr>
+          <p:cNvPr id="10" name="Oval 9"/>
+          <p:cNvSpPr/>
+          <p:nvPr/>
+        </p:nvSpPr>
+        <p:spPr>
+          <a:xfrm>
+            <a:off x="969264" y="6473952"/>
+            <a:ext cx="164592" cy="164592"/>
+          </a:xfrm>
+          <a:prstGeom prst="ellipse">
+            <a:avLst/>
+          </a:prstGeom>
+          <a:solidFill>
+            <a:srgbClr val="3B7EF6"/>
+          </a:solidFill>
+          <a:ln>
+            <a:noFill/>
+          </a:ln>
+          <a:effectLst/>
+        </p:spPr>
+        <p:style>
+          <a:lnRef idx="1">
+            <a:schemeClr val="accent1"/>
+          </a:lnRef>
+          <a:fillRef idx="3">
+            <a:schemeClr val="accent1"/>
+          </a:fillRef>
+          <a:effectRef idx="0">
+            <a:schemeClr val="accent1"/>
+          </a:effectRef>
+          <a:fontRef idx="minor">
+            <a:schemeClr val="lt1"/>
+          </a:fontRef>
+        </p:style>
+        <p:txBody>
+          <a:bodyPr rtlCol="0" anchor="ctr"/>
+          <a:lstStyle/>
+          <a:p>
+            <a:pPr algn="ctr"/>
+          </a:p>
+        </p:txBody>
+      </p:sp>
+      <p:sp>
+        <p:nvSpPr>
+          <p:cNvPr id="11" name="TextBox 10"/>
+          <p:cNvSpPr txBox="1"/>
+          <p:nvPr/>
+        </p:nvSpPr>
+        <p:spPr>
+          <a:xfrm>
+            <a:off x="1371600" y="6565392"/>
+            <a:ext cx="9144000" cy="182880"/>
+          </a:xfrm>
+          <a:prstGeom prst="rect">
+            <a:avLst/>
+          </a:prstGeom>
+          <a:noFill/>
+        </p:spPr>
+        <p:txBody>
+          <a:bodyPr wrap="square" lIns="0" rIns="0" tIns="0" bIns="0">
+            <a:spAutoFit/>
+          </a:bodyPr>
+          <a:lstStyle/>
+          <a:p>
+            <a:pPr algn="ctr"/>
+            <a:r>
+              <a:rPr sz="700" b="0" i="0">
+                <a:solidFill>
+                  <a:srgbClr val="1A214D"/>
+                </a:solidFill>
+                <a:latin typeface="Lato"/>
+              </a:rPr>
+              <a:t>This document is classified as INTERNAL &amp; WHITELISTED | Sharing allowed only with approved external domains</a:t>
+            </a:r>
+          </a:p>
+        </p:txBody>
+      </p:sp>
+      <p:sp>
+        <p:nvSpPr>
+          <p:cNvPr id="12" name="TextBox 11"/>
+          <p:cNvSpPr txBox="1"/>
+          <p:nvPr/>
+        </p:nvSpPr>
+        <p:spPr>
+          <a:xfrm>
+            <a:off x="11475720" y="6565392"/>
+            <a:ext cx="548640" cy="182880"/>
+          </a:xfrm>
+          <a:prstGeom prst="rect">
+            <a:avLst/>
+          </a:prstGeom>
+          <a:noFill/>
+        </p:spPr>
+        <p:txBody>
+          <a:bodyPr wrap="square" lIns="0" rIns="0" tIns="0" bIns="0">
+            <a:spAutoFit/>
+          </a:bodyPr>
+          <a:lstStyle/>
+          <a:p>
+            <a:pPr algn="r"/>
+            <a:r>
+              <a:rPr sz="800" b="0" i="0">
+                <a:solidFill>
+                  <a:srgbClr val="1A214D"/>
+                </a:solidFill>
+                <a:latin typeface="Lato"/>
+              </a:rPr>
+              <a:t>11</a:t>
+            </a:r>
+          </a:p>
+        </p:txBody>
+      </p:sp>
+      <p:sp>
+        <p:nvSpPr>
+          <p:cNvPr id="13" name="Rounded Rectangle 12"/>
+          <p:cNvSpPr/>
+          <p:nvPr/>
+        </p:nvSpPr>
+        <p:spPr>
+          <a:xfrm>
+            <a:off x="457200" y="969264"/>
+            <a:ext cx="9921240" cy="749808"/>
+          </a:xfrm>
+          <a:prstGeom prst="roundRect">
+            <a:avLst>
+              <a:gd name="adj" fmla="val 18000"/>
+            </a:avLst>
+          </a:prstGeom>
+          <a:solidFill>
+            <a:srgbClr val="EDF2FF"/>
+          </a:solidFill>
+          <a:ln w="9525">
+            <a:solidFill>
+              <a:srgbClr val="3B7EF6"/>
+            </a:solidFill>
+          </a:ln>
+          <a:effectLst/>
+        </p:spPr>
+        <p:style>
+          <a:lnRef idx="1">
+            <a:schemeClr val="accent1"/>
+          </a:lnRef>
+          <a:fillRef idx="3">
+            <a:schemeClr val="accent1"/>
+          </a:fillRef>
+          <a:effectRef idx="0">
+            <a:schemeClr val="accent1"/>
+          </a:effectRef>
+          <a:fontRef idx="minor">
+            <a:schemeClr val="lt1"/>
+          </a:fontRef>
+        </p:style>
+        <p:txBody>
+          <a:bodyPr rtlCol="0" anchor="ctr"/>
+          <a:lstStyle/>
+          <a:p>
+            <a:pPr algn="ctr"/>
+          </a:p>
+        </p:txBody>
+      </p:sp>
+      <p:sp>
+        <p:nvSpPr>
+          <p:cNvPr id="14" name="TextBox 13"/>
+          <p:cNvSpPr txBox="1"/>
+          <p:nvPr/>
+        </p:nvSpPr>
+        <p:spPr>
+          <a:xfrm>
+            <a:off x="658368" y="969264"/>
+            <a:ext cx="9518904" cy="749808"/>
+          </a:xfrm>
+          <a:prstGeom prst="rect">
+            <a:avLst/>
+          </a:prstGeom>
+          <a:noFill/>
+        </p:spPr>
+        <p:txBody>
+          <a:bodyPr wrap="square" lIns="0" rIns="0" anchor="ctr">
+            <a:spAutoFit/>
+          </a:bodyPr>
+          <a:lstStyle/>
+          <a:p>
+            <a:r>
+              <a:rPr sz="1200" b="1" i="0">
+                <a:solidFill>
+                  <a:srgbClr val="1A214D"/>
+                </a:solidFill>
+                <a:latin typeface="Lato"/>
+              </a:rPr>
+              <a:t>One offline small language model behind all four use cases — the adapters differ, the controls stay the same.</a:t>
+            </a:r>
+          </a:p>
+        </p:txBody>
+      </p:sp>
+      <p:sp>
+        <p:nvSpPr>
+          <p:cNvPr id="15" name="Rounded Rectangle 14"/>
+          <p:cNvSpPr/>
+          <p:nvPr/>
+        </p:nvSpPr>
+        <p:spPr>
+          <a:xfrm>
+            <a:off x="457200" y="1874519"/>
+            <a:ext cx="1691640" cy="914400"/>
+          </a:xfrm>
+          <a:prstGeom prst="roundRect">
+            <a:avLst>
+              <a:gd name="adj" fmla="val 15000"/>
+            </a:avLst>
+          </a:prstGeom>
+          <a:solidFill>
+            <a:srgbClr val="EDF2FF"/>
+          </a:solidFill>
+          <a:ln w="9525">
+            <a:solidFill>
+              <a:srgbClr val="3B7EF6"/>
+            </a:solidFill>
+          </a:ln>
+          <a:effectLst/>
+        </p:spPr>
+        <p:style>
+          <a:lnRef idx="1">
+            <a:schemeClr val="accent1"/>
+          </a:lnRef>
+          <a:fillRef idx="3">
+            <a:schemeClr val="accent1"/>
+          </a:fillRef>
+          <a:effectRef idx="0">
+            <a:schemeClr val="accent1"/>
+          </a:effectRef>
+          <a:fontRef idx="minor">
+            <a:schemeClr val="lt1"/>
+          </a:fontRef>
+        </p:style>
+        <p:txBody>
+          <a:bodyPr rtlCol="0" anchor="ctr"/>
+          <a:lstStyle/>
+          <a:p>
+            <a:pPr algn="ctr"/>
+          </a:p>
+        </p:txBody>
+      </p:sp>
+      <p:sp>
+        <p:nvSpPr>
+          <p:cNvPr id="16" name="TextBox 15"/>
+          <p:cNvSpPr txBox="1"/>
+          <p:nvPr/>
+        </p:nvSpPr>
+        <p:spPr>
+          <a:xfrm>
+            <a:off x="530352" y="2039112"/>
+            <a:ext cx="1545336" cy="274320"/>
+          </a:xfrm>
+          <a:prstGeom prst="rect">
+            <a:avLst/>
+          </a:prstGeom>
+          <a:noFill/>
+        </p:spPr>
+        <p:txBody>
+          <a:bodyPr wrap="square" lIns="0" rIns="0" tIns="0" bIns="0">
+            <a:spAutoFit/>
+          </a:bodyPr>
+          <a:lstStyle/>
+          <a:p>
+            <a:pPr algn="ctr"/>
+            <a:r>
+              <a:rPr sz="1100" b="1" i="0">
+                <a:solidFill>
+                  <a:srgbClr val="1A214D"/>
+                </a:solidFill>
+                <a:latin typeface="Lato"/>
+              </a:rPr>
+              <a:t>Prompt</a:t>
+            </a:r>
+          </a:p>
+        </p:txBody>
+      </p:sp>
+      <p:sp>
+        <p:nvSpPr>
+          <p:cNvPr id="17" name="TextBox 16"/>
+          <p:cNvSpPr txBox="1"/>
+          <p:nvPr/>
+        </p:nvSpPr>
+        <p:spPr>
+          <a:xfrm>
+            <a:off x="530352" y="2350008"/>
+            <a:ext cx="1545336" cy="365760"/>
+          </a:xfrm>
+          <a:prstGeom prst="rect">
+            <a:avLst/>
+          </a:prstGeom>
+          <a:noFill/>
+        </p:spPr>
+        <p:txBody>
+          <a:bodyPr wrap="square" lIns="0" rIns="0" tIns="0" bIns="0">
+            <a:spAutoFit/>
+          </a:bodyPr>
+          <a:lstStyle/>
+          <a:p>
+            <a:pPr algn="ctr"/>
+            <a:r>
+              <a:rPr sz="800" b="0" i="0">
+                <a:solidFill>
+                  <a:srgbClr val="1A214D"/>
+                </a:solidFill>
+                <a:latin typeface="Lato"/>
+              </a:rPr>
+              <a:t>in-module UI</a:t>
+            </a:r>
+          </a:p>
+        </p:txBody>
+      </p:sp>
+      <p:sp>
+        <p:nvSpPr>
+          <p:cNvPr id="18" name="TextBox 17"/>
+          <p:cNvSpPr txBox="1"/>
+          <p:nvPr/>
+        </p:nvSpPr>
+        <p:spPr>
+          <a:xfrm>
+            <a:off x="2130552" y="2167127"/>
+            <a:ext cx="283464" cy="320040"/>
+          </a:xfrm>
+          <a:prstGeom prst="rect">
+            <a:avLst/>
+          </a:prstGeom>
+          <a:noFill/>
+        </p:spPr>
+        <p:txBody>
+          <a:bodyPr wrap="square" lIns="0" rIns="0" tIns="0" bIns="0">
+            <a:spAutoFit/>
+          </a:bodyPr>
+          <a:lstStyle/>
+          <a:p>
+            <a:pPr algn="ctr"/>
+            <a:r>
+              <a:rPr sz="1600" b="1" i="0">
+                <a:solidFill>
+                  <a:srgbClr val="3B7EF6"/>
+                </a:solidFill>
+                <a:latin typeface="Lato"/>
+              </a:rPr>
+              <a:t>→</a:t>
+            </a:r>
+          </a:p>
+        </p:txBody>
+      </p:sp>
+      <p:sp>
+        <p:nvSpPr>
+          <p:cNvPr id="19" name="Rounded Rectangle 18"/>
+          <p:cNvSpPr/>
+          <p:nvPr/>
+        </p:nvSpPr>
+        <p:spPr>
+          <a:xfrm>
+            <a:off x="2377440" y="1874519"/>
+            <a:ext cx="1691640" cy="914400"/>
+          </a:xfrm>
+          <a:prstGeom prst="roundRect">
+            <a:avLst>
+              <a:gd name="adj" fmla="val 15000"/>
+            </a:avLst>
+          </a:prstGeom>
+          <a:solidFill>
+            <a:srgbClr val="EDF2FF"/>
+          </a:solidFill>
+          <a:ln w="9525">
+            <a:solidFill>
+              <a:srgbClr val="3B7EF6"/>
+            </a:solidFill>
+          </a:ln>
+          <a:effectLst/>
+        </p:spPr>
+        <p:style>
+          <a:lnRef idx="1">
+            <a:schemeClr val="accent1"/>
+          </a:lnRef>
+          <a:fillRef idx="3">
+            <a:schemeClr val="accent1"/>
+          </a:fillRef>
+          <a:effectRef idx="0">
+            <a:schemeClr val="accent1"/>
+          </a:effectRef>
+          <a:fontRef idx="minor">
+            <a:schemeClr val="lt1"/>
+          </a:fontRef>
+        </p:style>
+        <p:txBody>
+          <a:bodyPr rtlCol="0" anchor="ctr"/>
+          <a:lstStyle/>
+          <a:p>
+            <a:pPr algn="ctr"/>
+          </a:p>
+        </p:txBody>
+      </p:sp>
+      <p:sp>
+        <p:nvSpPr>
+          <p:cNvPr id="20" name="TextBox 19"/>
+          <p:cNvSpPr txBox="1"/>
+          <p:nvPr/>
+        </p:nvSpPr>
+        <p:spPr>
+          <a:xfrm>
+            <a:off x="2450592" y="2039112"/>
+            <a:ext cx="1545336" cy="274320"/>
+          </a:xfrm>
+          <a:prstGeom prst="rect">
+            <a:avLst/>
+          </a:prstGeom>
+          <a:noFill/>
+        </p:spPr>
+        <p:txBody>
+          <a:bodyPr wrap="square" lIns="0" rIns="0" tIns="0" bIns="0">
+            <a:spAutoFit/>
+          </a:bodyPr>
+          <a:lstStyle/>
+          <a:p>
+            <a:pPr algn="ctr"/>
+            <a:r>
+              <a:rPr sz="1100" b="1" i="0">
+                <a:solidFill>
+                  <a:srgbClr val="1A214D"/>
+                </a:solidFill>
+                <a:latin typeface="Lato"/>
+              </a:rPr>
+              <a:t>Guardrails</a:t>
+            </a:r>
+          </a:p>
+        </p:txBody>
+      </p:sp>
+      <p:sp>
+        <p:nvSpPr>
+          <p:cNvPr id="21" name="TextBox 20"/>
+          <p:cNvSpPr txBox="1"/>
+          <p:nvPr/>
+        </p:nvSpPr>
+        <p:spPr>
+          <a:xfrm>
+            <a:off x="2450592" y="2350008"/>
+            <a:ext cx="1545336" cy="365760"/>
+          </a:xfrm>
+          <a:prstGeom prst="rect">
+            <a:avLst/>
+          </a:prstGeom>
+          <a:noFill/>
+        </p:spPr>
+        <p:txBody>
+          <a:bodyPr wrap="square" lIns="0" rIns="0" tIns="0" bIns="0">
+            <a:spAutoFit/>
+          </a:bodyPr>
+          <a:lstStyle/>
+          <a:p>
+            <a:pPr algn="ctr"/>
+            <a:r>
+              <a:rPr sz="800" b="0" i="0">
+                <a:solidFill>
+                  <a:srgbClr val="1A214D"/>
+                </a:solidFill>
+                <a:latin typeface="Lato"/>
+              </a:rPr>
+              <a:t>scope + PII filter</a:t>
+            </a:r>
+          </a:p>
+        </p:txBody>
+      </p:sp>
+      <p:sp>
+        <p:nvSpPr>
+          <p:cNvPr id="22" name="TextBox 21"/>
+          <p:cNvSpPr txBox="1"/>
+          <p:nvPr/>
+        </p:nvSpPr>
+        <p:spPr>
+          <a:xfrm>
+            <a:off x="4050792" y="2167127"/>
+            <a:ext cx="283464" cy="320040"/>
+          </a:xfrm>
+          <a:prstGeom prst="rect">
+            <a:avLst/>
+          </a:prstGeom>
+          <a:noFill/>
+        </p:spPr>
+        <p:txBody>
+          <a:bodyPr wrap="square" lIns="0" rIns="0" tIns="0" bIns="0">
+            <a:spAutoFit/>
+          </a:bodyPr>
+          <a:lstStyle/>
+          <a:p>
+            <a:pPr algn="ctr"/>
+            <a:r>
+              <a:rPr sz="1600" b="1" i="0">
+                <a:solidFill>
+                  <a:srgbClr val="3B7EF6"/>
+                </a:solidFill>
+                <a:latin typeface="Lato"/>
+              </a:rPr>
+              <a:t>→</a:t>
+            </a:r>
+          </a:p>
+        </p:txBody>
+      </p:sp>
+      <p:sp>
+        <p:nvSpPr>
+          <p:cNvPr id="23" name="Rounded Rectangle 22"/>
+          <p:cNvSpPr/>
+          <p:nvPr/>
+        </p:nvSpPr>
+        <p:spPr>
+          <a:xfrm>
+            <a:off x="4297680" y="1874519"/>
+            <a:ext cx="1691640" cy="914400"/>
+          </a:xfrm>
+          <a:prstGeom prst="roundRect">
+            <a:avLst>
+              <a:gd name="adj" fmla="val 15000"/>
+            </a:avLst>
+          </a:prstGeom>
+          <a:solidFill>
+            <a:srgbClr val="FDBA23"/>
+          </a:solidFill>
+          <a:ln>
+            <a:noFill/>
+          </a:ln>
+          <a:effectLst/>
+        </p:spPr>
+        <p:style>
+          <a:lnRef idx="1">
+            <a:schemeClr val="accent1"/>
+          </a:lnRef>
+          <a:fillRef idx="3">
+            <a:schemeClr val="accent1"/>
+          </a:fillRef>
+          <a:effectRef idx="0">
+            <a:schemeClr val="accent1"/>
+          </a:effectRef>
+          <a:fontRef idx="minor">
+            <a:schemeClr val="lt1"/>
+          </a:fontRef>
+        </p:style>
+        <p:txBody>
+          <a:bodyPr rtlCol="0" anchor="ctr"/>
+          <a:lstStyle/>
+          <a:p>
+            <a:pPr algn="ctr"/>
+          </a:p>
+        </p:txBody>
+      </p:sp>
+      <p:sp>
+        <p:nvSpPr>
+          <p:cNvPr id="24" name="TextBox 23"/>
+          <p:cNvSpPr txBox="1"/>
+          <p:nvPr/>
+        </p:nvSpPr>
+        <p:spPr>
+          <a:xfrm>
+            <a:off x="4370832" y="2039112"/>
+            <a:ext cx="1545336" cy="274320"/>
+          </a:xfrm>
+          <a:prstGeom prst="rect">
+            <a:avLst/>
+          </a:prstGeom>
+          <a:noFill/>
+        </p:spPr>
+        <p:txBody>
+          <a:bodyPr wrap="square" lIns="0" rIns="0" tIns="0" bIns="0">
+            <a:spAutoFit/>
+          </a:bodyPr>
+          <a:lstStyle/>
+          <a:p>
+            <a:pPr algn="ctr"/>
+            <a:r>
+              <a:rPr sz="1100" b="1" i="0">
+                <a:solidFill>
+                  <a:srgbClr val="1A214D"/>
+                </a:solidFill>
+                <a:latin typeface="Lato"/>
+              </a:rPr>
+              <a:t>SLM</a:t>
+            </a:r>
+          </a:p>
+        </p:txBody>
+      </p:sp>
+      <p:sp>
+        <p:nvSpPr>
+          <p:cNvPr id="25" name="TextBox 24"/>
+          <p:cNvSpPr txBox="1"/>
+          <p:nvPr/>
+        </p:nvSpPr>
+        <p:spPr>
+          <a:xfrm>
+            <a:off x="4370832" y="2350008"/>
+            <a:ext cx="1545336" cy="365760"/>
+          </a:xfrm>
+          <a:prstGeom prst="rect">
+            <a:avLst/>
+          </a:prstGeom>
+          <a:noFill/>
+        </p:spPr>
+        <p:txBody>
+          <a:bodyPr wrap="square" lIns="0" rIns="0" tIns="0" bIns="0">
+            <a:spAutoFit/>
+          </a:bodyPr>
+          <a:lstStyle/>
+          <a:p>
+            <a:pPr algn="ctr"/>
+            <a:r>
+              <a:rPr sz="800" b="0" i="0">
+                <a:solidFill>
+                  <a:srgbClr val="1A214D"/>
+                </a:solidFill>
+                <a:latin typeface="Lato"/>
+              </a:rPr>
+              <a:t>offline · UAE-hosted</a:t>
+            </a:r>
+          </a:p>
+        </p:txBody>
+      </p:sp>
+      <p:sp>
+        <p:nvSpPr>
+          <p:cNvPr id="26" name="TextBox 25"/>
+          <p:cNvSpPr txBox="1"/>
+          <p:nvPr/>
+        </p:nvSpPr>
+        <p:spPr>
+          <a:xfrm>
+            <a:off x="5971032" y="2167127"/>
+            <a:ext cx="283464" cy="320040"/>
+          </a:xfrm>
+          <a:prstGeom prst="rect">
+            <a:avLst/>
+          </a:prstGeom>
+          <a:noFill/>
+        </p:spPr>
+        <p:txBody>
+          <a:bodyPr wrap="square" lIns="0" rIns="0" tIns="0" bIns="0">
+            <a:spAutoFit/>
+          </a:bodyPr>
+          <a:lstStyle/>
+          <a:p>
+            <a:pPr algn="ctr"/>
+            <a:r>
+              <a:rPr sz="1600" b="1" i="0">
+                <a:solidFill>
+                  <a:srgbClr val="3B7EF6"/>
+                </a:solidFill>
+                <a:latin typeface="Lato"/>
+              </a:rPr>
+              <a:t>→</a:t>
+            </a:r>
+          </a:p>
+        </p:txBody>
+      </p:sp>
+      <p:sp>
+        <p:nvSpPr>
+          <p:cNvPr id="27" name="Rounded Rectangle 26"/>
+          <p:cNvSpPr/>
+          <p:nvPr/>
+        </p:nvSpPr>
+        <p:spPr>
+          <a:xfrm>
+            <a:off x="6217920" y="1874519"/>
+            <a:ext cx="1691640" cy="914400"/>
+          </a:xfrm>
+          <a:prstGeom prst="roundRect">
+            <a:avLst>
+              <a:gd name="adj" fmla="val 15000"/>
+            </a:avLst>
+          </a:prstGeom>
+          <a:solidFill>
+            <a:srgbClr val="EDF2FF"/>
+          </a:solidFill>
+          <a:ln w="9525">
+            <a:solidFill>
+              <a:srgbClr val="3B7EF6"/>
+            </a:solidFill>
+          </a:ln>
+          <a:effectLst/>
+        </p:spPr>
+        <p:style>
+          <a:lnRef idx="1">
+            <a:schemeClr val="accent1"/>
+          </a:lnRef>
+          <a:fillRef idx="3">
+            <a:schemeClr val="accent1"/>
+          </a:fillRef>
+          <a:effectRef idx="0">
+            <a:schemeClr val="accent1"/>
+          </a:effectRef>
+          <a:fontRef idx="minor">
+            <a:schemeClr val="lt1"/>
+          </a:fontRef>
+        </p:style>
+        <p:txBody>
+          <a:bodyPr rtlCol="0" anchor="ctr"/>
+          <a:lstStyle/>
+          <a:p>
+            <a:pPr algn="ctr"/>
+          </a:p>
+        </p:txBody>
+      </p:sp>
+      <p:sp>
+        <p:nvSpPr>
+          <p:cNvPr id="28" name="TextBox 27"/>
+          <p:cNvSpPr txBox="1"/>
+          <p:nvPr/>
+        </p:nvSpPr>
+        <p:spPr>
+          <a:xfrm>
+            <a:off x="6291072" y="2039112"/>
+            <a:ext cx="1545336" cy="274320"/>
+          </a:xfrm>
+          <a:prstGeom prst="rect">
+            <a:avLst/>
+          </a:prstGeom>
+          <a:noFill/>
+        </p:spPr>
+        <p:txBody>
+          <a:bodyPr wrap="square" lIns="0" rIns="0" tIns="0" bIns="0">
+            <a:spAutoFit/>
+          </a:bodyPr>
+          <a:lstStyle/>
+          <a:p>
+            <a:pPr algn="ctr"/>
+            <a:r>
+              <a:rPr sz="1100" b="1" i="0">
+                <a:solidFill>
+                  <a:srgbClr val="1A214D"/>
+                </a:solidFill>
+                <a:latin typeface="Lato"/>
+              </a:rPr>
+              <a:t>Task adapter</a:t>
+            </a:r>
+          </a:p>
+        </p:txBody>
+      </p:sp>
+      <p:sp>
+        <p:nvSpPr>
+          <p:cNvPr id="29" name="TextBox 28"/>
+          <p:cNvSpPr txBox="1"/>
+          <p:nvPr/>
+        </p:nvSpPr>
+        <p:spPr>
+          <a:xfrm>
+            <a:off x="6291072" y="2350008"/>
+            <a:ext cx="1545336" cy="365760"/>
+          </a:xfrm>
+          <a:prstGeom prst="rect">
+            <a:avLst/>
+          </a:prstGeom>
+          <a:noFill/>
+        </p:spPr>
+        <p:txBody>
+          <a:bodyPr wrap="square" lIns="0" rIns="0" tIns="0" bIns="0">
+            <a:spAutoFit/>
+          </a:bodyPr>
+          <a:lstStyle/>
+          <a:p>
+            <a:pPr algn="ctr"/>
+            <a:r>
+              <a:rPr sz="800" b="0" i="0">
+                <a:solidFill>
+                  <a:srgbClr val="1A214D"/>
+                </a:solidFill>
+                <a:latin typeface="Lato"/>
+              </a:rPr>
+              <a:t>rule · SQL · doc · FEEL</a:t>
+            </a:r>
+          </a:p>
+        </p:txBody>
+      </p:sp>
+      <p:sp>
+        <p:nvSpPr>
+          <p:cNvPr id="30" name="TextBox 29"/>
+          <p:cNvSpPr txBox="1"/>
+          <p:nvPr/>
+        </p:nvSpPr>
+        <p:spPr>
+          <a:xfrm>
+            <a:off x="7891272" y="2167127"/>
+            <a:ext cx="283464" cy="320040"/>
+          </a:xfrm>
+          <a:prstGeom prst="rect">
+            <a:avLst/>
+          </a:prstGeom>
+          <a:noFill/>
+        </p:spPr>
+        <p:txBody>
+          <a:bodyPr wrap="square" lIns="0" rIns="0" tIns="0" bIns="0">
+            <a:spAutoFit/>
+          </a:bodyPr>
+          <a:lstStyle/>
+          <a:p>
+            <a:pPr algn="ctr"/>
+            <a:r>
+              <a:rPr sz="1600" b="1" i="0">
+                <a:solidFill>
+                  <a:srgbClr val="3B7EF6"/>
+                </a:solidFill>
+                <a:latin typeface="Lato"/>
+              </a:rPr>
+              <a:t>→</a:t>
+            </a:r>
+          </a:p>
+        </p:txBody>
+      </p:sp>
+      <p:sp>
+        <p:nvSpPr>
+          <p:cNvPr id="31" name="Rounded Rectangle 30"/>
+          <p:cNvSpPr/>
+          <p:nvPr/>
+        </p:nvSpPr>
+        <p:spPr>
+          <a:xfrm>
+            <a:off x="8138160" y="1874519"/>
+            <a:ext cx="1691640" cy="914400"/>
+          </a:xfrm>
+          <a:prstGeom prst="roundRect">
+            <a:avLst>
+              <a:gd name="adj" fmla="val 15000"/>
+            </a:avLst>
+          </a:prstGeom>
+          <a:solidFill>
+            <a:srgbClr val="EDF2FF"/>
+          </a:solidFill>
+          <a:ln w="9525">
+            <a:solidFill>
+              <a:srgbClr val="3B7EF6"/>
+            </a:solidFill>
+          </a:ln>
+          <a:effectLst/>
+        </p:spPr>
+        <p:style>
+          <a:lnRef idx="1">
+            <a:schemeClr val="accent1"/>
+          </a:lnRef>
+          <a:fillRef idx="3">
+            <a:schemeClr val="accent1"/>
+          </a:fillRef>
+          <a:effectRef idx="0">
+            <a:schemeClr val="accent1"/>
+          </a:effectRef>
+          <a:fontRef idx="minor">
+            <a:schemeClr val="lt1"/>
+          </a:fontRef>
+        </p:style>
+        <p:txBody>
+          <a:bodyPr rtlCol="0" anchor="ctr"/>
+          <a:lstStyle/>
+          <a:p>
+            <a:pPr algn="ctr"/>
+          </a:p>
+        </p:txBody>
+      </p:sp>
+      <p:sp>
+        <p:nvSpPr>
+          <p:cNvPr id="32" name="TextBox 31"/>
+          <p:cNvSpPr txBox="1"/>
+          <p:nvPr/>
+        </p:nvSpPr>
+        <p:spPr>
+          <a:xfrm>
+            <a:off x="8211312" y="2039112"/>
+            <a:ext cx="1545336" cy="274320"/>
+          </a:xfrm>
+          <a:prstGeom prst="rect">
+            <a:avLst/>
+          </a:prstGeom>
+          <a:noFill/>
+        </p:spPr>
+        <p:txBody>
+          <a:bodyPr wrap="square" lIns="0" rIns="0" tIns="0" bIns="0">
+            <a:spAutoFit/>
+          </a:bodyPr>
+          <a:lstStyle/>
+          <a:p>
+            <a:pPr algn="ctr"/>
+            <a:r>
+              <a:rPr sz="1100" b="1" i="0">
+                <a:solidFill>
+                  <a:srgbClr val="1A214D"/>
+                </a:solidFill>
+                <a:latin typeface="Lato"/>
+              </a:rPr>
+              <a:t>Validator</a:t>
+            </a:r>
+          </a:p>
+        </p:txBody>
+      </p:sp>
+      <p:sp>
+        <p:nvSpPr>
+          <p:cNvPr id="33" name="TextBox 32"/>
+          <p:cNvSpPr txBox="1"/>
+          <p:nvPr/>
+        </p:nvSpPr>
+        <p:spPr>
+          <a:xfrm>
+            <a:off x="8211312" y="2350008"/>
+            <a:ext cx="1545336" cy="365760"/>
+          </a:xfrm>
+          <a:prstGeom prst="rect">
+            <a:avLst/>
+          </a:prstGeom>
+          <a:noFill/>
+        </p:spPr>
+        <p:txBody>
+          <a:bodyPr wrap="square" lIns="0" rIns="0" tIns="0" bIns="0">
+            <a:spAutoFit/>
+          </a:bodyPr>
+          <a:lstStyle/>
+          <a:p>
+            <a:pPr algn="ctr"/>
+            <a:r>
+              <a:rPr sz="800" b="0" i="0">
+                <a:solidFill>
+                  <a:srgbClr val="1A214D"/>
+                </a:solidFill>
+                <a:latin typeface="Lato"/>
+              </a:rPr>
+              <a:t>parser · replay · match</a:t>
+            </a:r>
+          </a:p>
+        </p:txBody>
+      </p:sp>
+      <p:sp>
+        <p:nvSpPr>
+          <p:cNvPr id="34" name="TextBox 33"/>
+          <p:cNvSpPr txBox="1"/>
+          <p:nvPr/>
+        </p:nvSpPr>
+        <p:spPr>
+          <a:xfrm>
+            <a:off x="9811512" y="2167127"/>
+            <a:ext cx="283464" cy="320040"/>
+          </a:xfrm>
+          <a:prstGeom prst="rect">
+            <a:avLst/>
+          </a:prstGeom>
+          <a:noFill/>
+        </p:spPr>
+        <p:txBody>
+          <a:bodyPr wrap="square" lIns="0" rIns="0" tIns="0" bIns="0">
+            <a:spAutoFit/>
+          </a:bodyPr>
+          <a:lstStyle/>
+          <a:p>
+            <a:pPr algn="ctr"/>
+            <a:r>
+              <a:rPr sz="1600" b="1" i="0">
+                <a:solidFill>
+                  <a:srgbClr val="3B7EF6"/>
+                </a:solidFill>
+                <a:latin typeface="Lato"/>
+              </a:rPr>
+              <a:t>→</a:t>
+            </a:r>
+          </a:p>
+        </p:txBody>
+      </p:sp>
+      <p:sp>
+        <p:nvSpPr>
+          <p:cNvPr id="35" name="Rounded Rectangle 34"/>
+          <p:cNvSpPr/>
+          <p:nvPr/>
+        </p:nvSpPr>
+        <p:spPr>
+          <a:xfrm>
+            <a:off x="10058400" y="1874519"/>
+            <a:ext cx="1691640" cy="914400"/>
+          </a:xfrm>
+          <a:prstGeom prst="roundRect">
+            <a:avLst>
+              <a:gd name="adj" fmla="val 15000"/>
+            </a:avLst>
+          </a:prstGeom>
+          <a:solidFill>
+            <a:srgbClr val="EDF2FF"/>
+          </a:solidFill>
+          <a:ln w="9525">
+            <a:solidFill>
+              <a:srgbClr val="3B7EF6"/>
+            </a:solidFill>
+          </a:ln>
+          <a:effectLst/>
+        </p:spPr>
+        <p:style>
+          <a:lnRef idx="1">
+            <a:schemeClr val="accent1"/>
+          </a:lnRef>
+          <a:fillRef idx="3">
+            <a:schemeClr val="accent1"/>
+          </a:fillRef>
+          <a:effectRef idx="0">
+            <a:schemeClr val="accent1"/>
+          </a:effectRef>
+          <a:fontRef idx="minor">
+            <a:schemeClr val="lt1"/>
+          </a:fontRef>
+        </p:style>
+        <p:txBody>
+          <a:bodyPr rtlCol="0" anchor="ctr"/>
+          <a:lstStyle/>
+          <a:p>
+            <a:pPr algn="ctr"/>
+          </a:p>
+        </p:txBody>
+      </p:sp>
+      <p:sp>
+        <p:nvSpPr>
+          <p:cNvPr id="36" name="TextBox 35"/>
+          <p:cNvSpPr txBox="1"/>
+          <p:nvPr/>
+        </p:nvSpPr>
+        <p:spPr>
+          <a:xfrm>
+            <a:off x="10131552" y="2039112"/>
+            <a:ext cx="1545336" cy="274320"/>
+          </a:xfrm>
+          <a:prstGeom prst="rect">
+            <a:avLst/>
+          </a:prstGeom>
+          <a:noFill/>
+        </p:spPr>
+        <p:txBody>
+          <a:bodyPr wrap="square" lIns="0" rIns="0" tIns="0" bIns="0">
+            <a:spAutoFit/>
+          </a:bodyPr>
+          <a:lstStyle/>
+          <a:p>
+            <a:pPr algn="ctr"/>
+            <a:r>
+              <a:rPr sz="1100" b="1" i="0">
+                <a:solidFill>
+                  <a:srgbClr val="1A214D"/>
+                </a:solidFill>
+                <a:latin typeface="Lato"/>
+              </a:rPr>
+              <a:t>Maker-Checker</a:t>
+            </a:r>
+          </a:p>
+        </p:txBody>
+      </p:sp>
+      <p:sp>
+        <p:nvSpPr>
+          <p:cNvPr id="37" name="TextBox 36"/>
+          <p:cNvSpPr txBox="1"/>
+          <p:nvPr/>
+        </p:nvSpPr>
+        <p:spPr>
+          <a:xfrm>
+            <a:off x="10131552" y="2350008"/>
+            <a:ext cx="1545336" cy="365760"/>
+          </a:xfrm>
+          <a:prstGeom prst="rect">
+            <a:avLst/>
+          </a:prstGeom>
+          <a:noFill/>
+        </p:spPr>
+        <p:txBody>
+          <a:bodyPr wrap="square" lIns="0" rIns="0" tIns="0" bIns="0">
+            <a:spAutoFit/>
+          </a:bodyPr>
+          <a:lstStyle/>
+          <a:p>
+            <a:pPr algn="ctr"/>
+            <a:r>
+              <a:rPr sz="800" b="0" i="0">
+                <a:solidFill>
+                  <a:srgbClr val="1A214D"/>
+                </a:solidFill>
+                <a:latin typeface="Lato"/>
+              </a:rPr>
+              <a:t>approve &amp; publish</a:t>
+            </a:r>
+          </a:p>
+        </p:txBody>
+      </p:sp>
+      <p:sp>
+        <p:nvSpPr>
+          <p:cNvPr id="38" name="Rounded Rectangle 37"/>
+          <p:cNvSpPr/>
+          <p:nvPr/>
+        </p:nvSpPr>
+        <p:spPr>
+          <a:xfrm>
+            <a:off x="457200" y="3246120"/>
+            <a:ext cx="3535680" cy="2514600"/>
+          </a:xfrm>
+          <a:prstGeom prst="roundRect">
+            <a:avLst>
+              <a:gd name="adj" fmla="val 12000"/>
+            </a:avLst>
+          </a:prstGeom>
+          <a:solidFill>
+            <a:srgbClr val="FFFFFF"/>
+          </a:solidFill>
+          <a:ln w="9525">
+            <a:solidFill>
+              <a:srgbClr val="1A214D"/>
+            </a:solidFill>
+          </a:ln>
+          <a:effectLst/>
+        </p:spPr>
+        <p:style>
+          <a:lnRef idx="1">
+            <a:schemeClr val="accent1"/>
+          </a:lnRef>
+          <a:fillRef idx="3">
+            <a:schemeClr val="accent1"/>
+          </a:fillRef>
+          <a:effectRef idx="0">
+            <a:schemeClr val="accent1"/>
+          </a:effectRef>
+          <a:fontRef idx="minor">
+            <a:schemeClr val="lt1"/>
+          </a:fontRef>
+        </p:style>
+        <p:txBody>
+          <a:bodyPr rtlCol="0" anchor="ctr"/>
+          <a:lstStyle/>
+          <a:p>
+            <a:pPr algn="ctr"/>
+          </a:p>
+        </p:txBody>
+      </p:sp>
+      <p:sp>
+        <p:nvSpPr>
+          <p:cNvPr id="39" name="TextBox 38"/>
+          <p:cNvSpPr txBox="1"/>
+          <p:nvPr/>
+        </p:nvSpPr>
+        <p:spPr>
+          <a:xfrm>
+            <a:off x="603504" y="3355848"/>
+            <a:ext cx="3243072" cy="274320"/>
+          </a:xfrm>
+          <a:prstGeom prst="rect">
+            <a:avLst/>
+          </a:prstGeom>
+          <a:noFill/>
+        </p:spPr>
+        <p:txBody>
+          <a:bodyPr wrap="square" lIns="0" rIns="0" tIns="0" bIns="0">
+            <a:spAutoFit/>
+          </a:bodyPr>
+          <a:lstStyle/>
+          <a:p>
+            <a:pPr algn="l"/>
+            <a:r>
+              <a:rPr sz="1100" b="1" i="0">
+                <a:solidFill>
+                  <a:srgbClr val="3B7EF6"/>
+                </a:solidFill>
+                <a:latin typeface="Lato"/>
+              </a:rPr>
+              <a:t>Model direction — Foundry SLM</a:t>
+            </a:r>
+          </a:p>
+        </p:txBody>
+      </p:sp>
+      <p:sp>
+        <p:nvSpPr>
+          <p:cNvPr id="40" name="TextBox 39"/>
+          <p:cNvSpPr txBox="1"/>
+          <p:nvPr/>
+        </p:nvSpPr>
+        <p:spPr>
+          <a:xfrm>
+            <a:off x="603504" y="3666744"/>
+            <a:ext cx="3243072" cy="1984248"/>
+          </a:xfrm>
+          <a:prstGeom prst="rect">
+            <a:avLst/>
+          </a:prstGeom>
+          <a:noFill/>
+        </p:spPr>
+        <p:txBody>
+          <a:bodyPr wrap="square" lIns="0" rIns="0" tIns="0">
+            <a:spAutoFit/>
+          </a:bodyPr>
+          <a:lstStyle/>
+          <a:p>
+            <a:pPr>
+              <a:spcAft>
+                <a:spcPts val="300"/>
+              </a:spcAft>
+            </a:pPr>
+            <a:r>
+              <a:rPr sz="900" b="1" i="0">
+                <a:solidFill>
+                  <a:srgbClr val="1A214D"/>
+                </a:solidFill>
+                <a:latin typeface="Lato"/>
+              </a:rPr>
+              <a:t>Shortlist from the Foundry small-model catalog </a:t>
+            </a:r>
+            <a:r>
+              <a:rPr sz="900" b="0" i="0">
+                <a:solidFill>
+                  <a:srgbClr val="1A214D"/>
+                </a:solidFill>
+                <a:latin typeface="Lato"/>
+              </a:rPr>
+              <a:t>— e.g. the Phi-4 family: reported MIT-licensed and self-hostable (Foundry, Hugging Face, Ollama).</a:t>
+            </a:r>
+          </a:p>
+          <a:p>
+            <a:pPr>
+              <a:spcAft>
+                <a:spcPts val="300"/>
+              </a:spcAft>
+            </a:pPr>
+            <a:r>
+              <a:rPr sz="900" b="1" i="0">
+                <a:solidFill>
+                  <a:srgbClr val="1A214D"/>
+                </a:solidFill>
+                <a:latin typeface="Lato"/>
+              </a:rPr>
+              <a:t>Verify licence and commercials </a:t>
+            </a:r>
+            <a:r>
+              <a:rPr sz="900" b="0" i="0">
+                <a:solidFill>
+                  <a:srgbClr val="1A214D"/>
+                </a:solidFill>
+                <a:latin typeface="Lato"/>
+              </a:rPr>
+              <a:t>on the model card — Cathal's session output.</a:t>
+            </a:r>
+          </a:p>
+          <a:p>
+            <a:pPr>
+              <a:spcAft>
+                <a:spcPts val="300"/>
+              </a:spcAft>
+            </a:pPr>
+            <a:r>
+              <a:rPr sz="900" b="1" i="0">
+                <a:solidFill>
+                  <a:srgbClr val="1A214D"/>
+                </a:solidFill>
+                <a:latin typeface="Lato"/>
+              </a:rPr>
+              <a:t>One base model, </a:t>
+            </a:r>
+            <a:r>
+              <a:rPr sz="900" b="0" i="0">
+                <a:solidFill>
+                  <a:srgbClr val="1A214D"/>
+                </a:solidFill>
+                <a:latin typeface="Lato"/>
+              </a:rPr>
+              <a:t>per-task adapters — not four separate models.</a:t>
+            </a:r>
+          </a:p>
+        </p:txBody>
+      </p:sp>
+      <p:sp>
+        <p:nvSpPr>
+          <p:cNvPr id="41" name="Rounded Rectangle 40"/>
+          <p:cNvSpPr/>
+          <p:nvPr/>
+        </p:nvSpPr>
+        <p:spPr>
+          <a:xfrm>
+            <a:off x="4221480" y="3246120"/>
+            <a:ext cx="3535680" cy="2514600"/>
+          </a:xfrm>
+          <a:prstGeom prst="roundRect">
+            <a:avLst>
+              <a:gd name="adj" fmla="val 12000"/>
+            </a:avLst>
+          </a:prstGeom>
+          <a:solidFill>
+            <a:srgbClr val="FFFFFF"/>
+          </a:solidFill>
+          <a:ln w="9525">
+            <a:solidFill>
+              <a:srgbClr val="1A214D"/>
+            </a:solidFill>
+          </a:ln>
+          <a:effectLst/>
+        </p:spPr>
+        <p:style>
+          <a:lnRef idx="1">
+            <a:schemeClr val="accent1"/>
+          </a:lnRef>
+          <a:fillRef idx="3">
+            <a:schemeClr val="accent1"/>
+          </a:fillRef>
+          <a:effectRef idx="0">
+            <a:schemeClr val="accent1"/>
+          </a:effectRef>
+          <a:fontRef idx="minor">
+            <a:schemeClr val="lt1"/>
+          </a:fontRef>
+        </p:style>
+        <p:txBody>
+          <a:bodyPr rtlCol="0" anchor="ctr"/>
+          <a:lstStyle/>
+          <a:p>
+            <a:pPr algn="ctr"/>
+          </a:p>
+        </p:txBody>
+      </p:sp>
+      <p:sp>
+        <p:nvSpPr>
+          <p:cNvPr id="42" name="TextBox 41"/>
+          <p:cNvSpPr txBox="1"/>
+          <p:nvPr/>
+        </p:nvSpPr>
+        <p:spPr>
+          <a:xfrm>
+            <a:off x="4367784" y="3355848"/>
+            <a:ext cx="3243072" cy="274320"/>
+          </a:xfrm>
+          <a:prstGeom prst="rect">
+            <a:avLst/>
+          </a:prstGeom>
+          <a:noFill/>
+        </p:spPr>
+        <p:txBody>
+          <a:bodyPr wrap="square" lIns="0" rIns="0" tIns="0" bIns="0">
+            <a:spAutoFit/>
+          </a:bodyPr>
+          <a:lstStyle/>
+          <a:p>
+            <a:pPr algn="l"/>
+            <a:r>
+              <a:rPr sz="1100" b="1" i="0">
+                <a:solidFill>
+                  <a:srgbClr val="3B7EF6"/>
+                </a:solidFill>
+                <a:latin typeface="Lato"/>
+              </a:rPr>
+              <a:t>Grounding vs fine-tuning</a:t>
+            </a:r>
+          </a:p>
+        </p:txBody>
+      </p:sp>
+      <p:sp>
+        <p:nvSpPr>
+          <p:cNvPr id="43" name="TextBox 42"/>
+          <p:cNvSpPr txBox="1"/>
+          <p:nvPr/>
+        </p:nvSpPr>
+        <p:spPr>
+          <a:xfrm>
+            <a:off x="4367784" y="3666744"/>
+            <a:ext cx="3243072" cy="1984248"/>
+          </a:xfrm>
+          <a:prstGeom prst="rect">
+            <a:avLst/>
+          </a:prstGeom>
+          <a:noFill/>
+        </p:spPr>
+        <p:txBody>
+          <a:bodyPr wrap="square" lIns="0" rIns="0" tIns="0">
+            <a:spAutoFit/>
+          </a:bodyPr>
+          <a:lstStyle/>
+          <a:p>
+            <a:pPr>
+              <a:spcAft>
+                <a:spcPts val="300"/>
+              </a:spcAft>
+            </a:pPr>
+            <a:r>
+              <a:rPr sz="900" b="1" i="0">
+                <a:solidFill>
+                  <a:srgbClr val="1A214D"/>
+                </a:solidFill>
+                <a:latin typeface="Lato"/>
+              </a:rPr>
+              <a:t>Start with RAG + few-shot </a:t>
+            </a:r>
+            <a:r>
+              <a:rPr sz="900" b="0" i="0">
+                <a:solidFill>
+                  <a:srgbClr val="1A214D"/>
+                </a:solidFill>
+                <a:latin typeface="Lato"/>
+              </a:rPr>
+              <a:t>on our own artefacts: attribute catalog, schema dictionary, formula library, document profiles.</a:t>
+            </a:r>
+          </a:p>
+          <a:p>
+            <a:pPr>
+              <a:spcAft>
+                <a:spcPts val="300"/>
+              </a:spcAft>
+            </a:pPr>
+            <a:r>
+              <a:rPr sz="900" b="1" i="0">
+                <a:solidFill>
+                  <a:srgbClr val="1A214D"/>
+                </a:solidFill>
+                <a:latin typeface="Lato"/>
+              </a:rPr>
+              <a:t>Fine-tune only where evals prove a gap </a:t>
+            </a:r>
+            <a:r>
+              <a:rPr sz="900" b="0" i="0">
+                <a:solidFill>
+                  <a:srgbClr val="1A214D"/>
+                </a:solidFill>
+                <a:latin typeface="Lato"/>
+              </a:rPr>
+              <a:t>— most likely prompt→rule and prompt→FEEL.</a:t>
+            </a:r>
+          </a:p>
+          <a:p>
+            <a:pPr>
+              <a:spcAft>
+                <a:spcPts val="300"/>
+              </a:spcAft>
+            </a:pPr>
+            <a:r>
+              <a:rPr sz="900" b="1" i="0">
+                <a:solidFill>
+                  <a:srgbClr val="1A214D"/>
+                </a:solidFill>
+                <a:latin typeface="Lato"/>
+              </a:rPr>
+              <a:t>Each use case keeps its own eval set </a:t>
+            </a:r>
+            <a:r>
+              <a:rPr sz="900" b="0" i="0">
+                <a:solidFill>
+                  <a:srgbClr val="1A214D"/>
+                </a:solidFill>
+                <a:latin typeface="Lato"/>
+              </a:rPr>
+              <a:t>— the go/no-go instrument per phase.</a:t>
+            </a:r>
+          </a:p>
+        </p:txBody>
+      </p:sp>
+      <p:sp>
+        <p:nvSpPr>
+          <p:cNvPr id="44" name="Rounded Rectangle 43"/>
+          <p:cNvSpPr/>
+          <p:nvPr/>
+        </p:nvSpPr>
+        <p:spPr>
+          <a:xfrm>
+            <a:off x="7985760" y="3246120"/>
+            <a:ext cx="3535680" cy="2514600"/>
+          </a:xfrm>
+          <a:prstGeom prst="roundRect">
+            <a:avLst>
+              <a:gd name="adj" fmla="val 12000"/>
+            </a:avLst>
+          </a:prstGeom>
+          <a:solidFill>
+            <a:srgbClr val="FFFFFF"/>
+          </a:solidFill>
+          <a:ln w="9525">
+            <a:solidFill>
+              <a:srgbClr val="1A214D"/>
+            </a:solidFill>
+          </a:ln>
+          <a:effectLst/>
+        </p:spPr>
+        <p:style>
+          <a:lnRef idx="1">
+            <a:schemeClr val="accent1"/>
+          </a:lnRef>
+          <a:fillRef idx="3">
+            <a:schemeClr val="accent1"/>
+          </a:fillRef>
+          <a:effectRef idx="0">
+            <a:schemeClr val="accent1"/>
+          </a:effectRef>
+          <a:fontRef idx="minor">
+            <a:schemeClr val="lt1"/>
+          </a:fontRef>
+        </p:style>
+        <p:txBody>
+          <a:bodyPr rtlCol="0" anchor="ctr"/>
+          <a:lstStyle/>
+          <a:p>
+            <a:pPr algn="ctr"/>
+          </a:p>
+        </p:txBody>
+      </p:sp>
+      <p:sp>
+        <p:nvSpPr>
+          <p:cNvPr id="45" name="TextBox 44"/>
+          <p:cNvSpPr txBox="1"/>
+          <p:nvPr/>
+        </p:nvSpPr>
+        <p:spPr>
+          <a:xfrm>
+            <a:off x="8132064" y="3355848"/>
+            <a:ext cx="3243072" cy="274320"/>
+          </a:xfrm>
+          <a:prstGeom prst="rect">
+            <a:avLst/>
+          </a:prstGeom>
+          <a:noFill/>
+        </p:spPr>
+        <p:txBody>
+          <a:bodyPr wrap="square" lIns="0" rIns="0" tIns="0" bIns="0">
+            <a:spAutoFit/>
+          </a:bodyPr>
+          <a:lstStyle/>
+          <a:p>
+            <a:pPr algn="l"/>
+            <a:r>
+              <a:rPr sz="1100" b="1" i="0">
+                <a:solidFill>
+                  <a:srgbClr val="3B7EF6"/>
+                </a:solidFill>
+                <a:latin typeface="Lato"/>
+              </a:rPr>
+              <a:t>Reusable if we swap models</a:t>
+            </a:r>
+          </a:p>
+        </p:txBody>
+      </p:sp>
+      <p:sp>
+        <p:nvSpPr>
+          <p:cNvPr id="46" name="TextBox 45"/>
+          <p:cNvSpPr txBox="1"/>
+          <p:nvPr/>
+        </p:nvSpPr>
+        <p:spPr>
+          <a:xfrm>
+            <a:off x="8132064" y="3666744"/>
+            <a:ext cx="3243072" cy="1984248"/>
+          </a:xfrm>
+          <a:prstGeom prst="rect">
+            <a:avLst/>
+          </a:prstGeom>
+          <a:noFill/>
+        </p:spPr>
+        <p:txBody>
+          <a:bodyPr wrap="square" lIns="0" rIns="0" tIns="0">
+            <a:spAutoFit/>
+          </a:bodyPr>
+          <a:lstStyle/>
+          <a:p>
+            <a:pPr>
+              <a:spcAft>
+                <a:spcPts val="300"/>
+              </a:spcAft>
+            </a:pPr>
+            <a:r>
+              <a:rPr sz="900" b="1" i="0">
+                <a:solidFill>
+                  <a:srgbClr val="1A214D"/>
+                </a:solidFill>
+                <a:latin typeface="Lato"/>
+              </a:rPr>
+              <a:t>Model-agnostic: </a:t>
+            </a:r>
+            <a:r>
+              <a:rPr sz="900" b="0" i="0">
+                <a:solidFill>
+                  <a:srgbClr val="1A214D"/>
+                </a:solidFill>
+                <a:latin typeface="Lato"/>
+              </a:rPr>
+              <a:t>prompts, task schemas, eval sets, guardrails, validators, UI.</a:t>
+            </a:r>
+          </a:p>
+          <a:p>
+            <a:pPr>
+              <a:spcAft>
+                <a:spcPts val="300"/>
+              </a:spcAft>
+            </a:pPr>
+            <a:r>
+              <a:rPr sz="900" b="1" i="0">
+                <a:solidFill>
+                  <a:srgbClr val="1A214D"/>
+                </a:solidFill>
+                <a:latin typeface="Lato"/>
+              </a:rPr>
+              <a:t>Model-bound: </a:t>
+            </a:r>
+            <a:r>
+              <a:rPr sz="900" b="0" i="0">
+                <a:solidFill>
+                  <a:srgbClr val="1A214D"/>
+                </a:solidFill>
+                <a:latin typeface="Lato"/>
+              </a:rPr>
+              <a:t>fine-tuned weights only.</a:t>
+            </a:r>
+          </a:p>
+          <a:p>
+            <a:pPr>
+              <a:spcAft>
+                <a:spcPts val="300"/>
+              </a:spcAft>
+            </a:pPr>
+            <a:r>
+              <a:rPr sz="900" b="1" i="0">
+                <a:solidFill>
+                  <a:srgbClr val="1A214D"/>
+                </a:solidFill>
+                <a:latin typeface="Lato"/>
+              </a:rPr>
+              <a:t>Swap the model tomorrow </a:t>
+            </a:r>
+            <a:r>
+              <a:rPr sz="900" b="0" i="0">
+                <a:solidFill>
+                  <a:srgbClr val="1A214D"/>
+                </a:solidFill>
+                <a:latin typeface="Lato"/>
+              </a:rPr>
+              <a:t>and the training assets survive — the platform investment is protected.</a:t>
+            </a:r>
+          </a:p>
+        </p:txBody>
+      </p:sp>
+      <p:sp>
+        <p:nvSpPr>
+          <p:cNvPr id="47" name="TextBox 46"/>
+          <p:cNvSpPr txBox="1"/>
+          <p:nvPr/>
+        </p:nvSpPr>
+        <p:spPr>
+          <a:xfrm>
+            <a:off x="457200" y="6336792"/>
+            <a:ext cx="10515600" cy="164592"/>
+          </a:xfrm>
+          <a:prstGeom prst="rect">
+            <a:avLst/>
+          </a:prstGeom>
+          <a:noFill/>
+        </p:spPr>
+        <p:txBody>
+          <a:bodyPr wrap="square" lIns="0" rIns="0" tIns="0" bIns="0">
+            <a:spAutoFit/>
+          </a:bodyPr>
+          <a:lstStyle/>
+          <a:p>
+            <a:pPr algn="l"/>
+            <a:r>
+              <a:rPr sz="700" b="0" i="1">
+                <a:solidFill>
+                  <a:srgbClr val="1A214D"/>
+                </a:solidFill>
+                <a:latin typeface="Lato"/>
+              </a:rPr>
+              <a:t>Sources: Azure AI Foundry / Phi model documentation (licence to be confirmed on model card)</a:t>
+            </a:r>
+          </a:p>
+        </p:txBody>
+      </p:sp>
+    </p:spTree>
+  </p:cSld>
+  <p:clrMapOvr>
+    <a:masterClrMapping/>
+  </p:clrMapOvr>
+</p:sld>
+</file>
+
+<file path=ppt/slides/slide13.xml><?xml version="1.0" encoding="utf-8"?>
+<p:sld xmlns:a="http://schemas.openxmlformats.org/drawingml/2006/main" xmlns:p="http://schemas.openxmlformats.org/presentationml/2006/main" xmlns:r="http://schemas.openxmlformats.org/officeDocument/2006/relationships">
+  <p:cSld>
+    <p:bg>
+      <p:bgPr>
+        <a:solidFill>
+          <a:srgbClr val="FFFFFF"/>
+        </a:solidFill>
+        <a:effectLst/>
+      </p:bgPr>
+    </p:bg>
+    <p:spTree>
+      <p:nvGrpSpPr>
+        <p:cNvPr id="1" name=""/>
+        <p:cNvGrpSpPr/>
+        <p:nvPr/>
+      </p:nvGrpSpPr>
+      <p:grpSpPr/>
+      <p:sp>
+        <p:nvSpPr>
+          <p:cNvPr id="2" name="Oval 1"/>
+          <p:cNvSpPr/>
+          <p:nvPr/>
+        </p:nvSpPr>
+        <p:spPr>
+          <a:xfrm>
+            <a:off x="10515600" y="-2011680"/>
+            <a:ext cx="4114800" cy="4114800"/>
+          </a:xfrm>
+          <a:prstGeom prst="ellipse">
+            <a:avLst/>
+          </a:prstGeom>
+          <a:solidFill>
+            <a:srgbClr val="1A214D"/>
+          </a:solidFill>
+          <a:ln>
+            <a:noFill/>
+          </a:ln>
+          <a:effectLst/>
+        </p:spPr>
+        <p:style>
+          <a:lnRef idx="1">
+            <a:schemeClr val="accent1"/>
+          </a:lnRef>
+          <a:fillRef idx="3">
+            <a:schemeClr val="accent1"/>
+          </a:fillRef>
+          <a:effectRef idx="0">
+            <a:schemeClr val="accent1"/>
+          </a:effectRef>
+          <a:fontRef idx="minor">
+            <a:schemeClr val="lt1"/>
+          </a:fontRef>
+        </p:style>
+        <p:txBody>
+          <a:bodyPr rtlCol="0" anchor="ctr"/>
+          <a:lstStyle/>
+          <a:p>
+            <a:pPr algn="ctr"/>
+          </a:p>
+        </p:txBody>
+      </p:sp>
+      <p:sp>
+        <p:nvSpPr>
+          <p:cNvPr id="3" name="TextBox 2"/>
+          <p:cNvSpPr txBox="1"/>
+          <p:nvPr/>
+        </p:nvSpPr>
+        <p:spPr>
+          <a:xfrm>
+            <a:off x="228600" y="36576"/>
+            <a:ext cx="10058400" cy="164592"/>
+          </a:xfrm>
+          <a:prstGeom prst="rect">
+            <a:avLst/>
+          </a:prstGeom>
+          <a:noFill/>
+        </p:spPr>
+        <p:txBody>
+          <a:bodyPr wrap="square" lIns="0" rIns="0" tIns="0" bIns="0">
+            <a:spAutoFit/>
+          </a:bodyPr>
+          <a:lstStyle/>
+          <a:p>
+            <a:pPr algn="l"/>
+            <a:r>
+              <a:rPr sz="700" b="0" i="0">
+                <a:solidFill>
+                  <a:srgbClr val="1A214D"/>
+                </a:solidFill>
+                <a:latin typeface="Lato"/>
+              </a:rPr>
+              <a:t>APPRO – INTERNAL &amp; APPROVED DOMAINS | Controlled Distribution</a:t>
+            </a:r>
+          </a:p>
+        </p:txBody>
+      </p:sp>
+      <p:pic>
+        <p:nvPicPr>
+          <p:cNvPr id="4" name="Picture 3" descr="logo-white.png"/>
+          <p:cNvPicPr>
+            <a:picLocks noChangeAspect="1"/>
+          </p:cNvPicPr>
+          <p:nvPr/>
+        </p:nvPicPr>
+        <p:blipFill>
+          <a:blip r:embed="rId2"/>
+          <a:stretch>
+            <a:fillRect/>
+          </a:stretch>
+        </p:blipFill>
+        <p:spPr>
+          <a:xfrm>
+            <a:off x="10744200" y="274320"/>
+            <a:ext cx="1280160" cy="373807"/>
+          </a:xfrm>
+          <a:prstGeom prst="rect">
+            <a:avLst/>
+          </a:prstGeom>
+        </p:spPr>
+      </p:pic>
+      <p:sp>
+        <p:nvSpPr>
+          <p:cNvPr id="5" name="Rounded Rectangle 4"/>
+          <p:cNvSpPr/>
+          <p:nvPr/>
+        </p:nvSpPr>
+        <p:spPr>
+          <a:xfrm>
+            <a:off x="228600" y="493776"/>
+            <a:ext cx="1640433" cy="274320"/>
+          </a:xfrm>
+          <a:prstGeom prst="roundRect">
+            <a:avLst>
+              <a:gd name="adj" fmla="val 50000"/>
+            </a:avLst>
+          </a:prstGeom>
+          <a:solidFill>
+            <a:srgbClr val="FDBA23"/>
+          </a:solidFill>
+          <a:ln>
+            <a:noFill/>
+          </a:ln>
+          <a:effectLst/>
+        </p:spPr>
+        <p:style>
+          <a:lnRef idx="1">
+            <a:schemeClr val="accent1"/>
+          </a:lnRef>
+          <a:fillRef idx="3">
+            <a:schemeClr val="accent1"/>
+          </a:fillRef>
+          <a:effectRef idx="0">
+            <a:schemeClr val="accent1"/>
+          </a:effectRef>
+          <a:fontRef idx="minor">
+            <a:schemeClr val="lt1"/>
+          </a:fontRef>
+        </p:style>
+        <p:txBody>
+          <a:bodyPr rtlCol="0" anchor="ctr"/>
+          <a:lstStyle/>
+          <a:p>
+            <a:pPr algn="ctr"/>
+          </a:p>
+        </p:txBody>
+      </p:sp>
+      <p:sp>
+        <p:nvSpPr>
+          <p:cNvPr id="6" name="TextBox 5"/>
+          <p:cNvSpPr txBox="1"/>
+          <p:nvPr/>
+        </p:nvSpPr>
+        <p:spPr>
+          <a:xfrm>
+            <a:off x="274320" y="365760"/>
+            <a:ext cx="10058400" cy="502920"/>
+          </a:xfrm>
+          <a:prstGeom prst="rect">
+            <a:avLst/>
+          </a:prstGeom>
+          <a:noFill/>
+        </p:spPr>
+        <p:txBody>
+          <a:bodyPr wrap="square" lIns="0" rIns="0" tIns="0" bIns="0">
+            <a:spAutoFit/>
+          </a:bodyPr>
+          <a:lstStyle/>
+          <a:p>
+            <a:pPr algn="l"/>
+            <a:r>
+              <a:rPr sz="2000" b="1" i="0">
+                <a:solidFill>
+                  <a:srgbClr val="1A214D"/>
+                </a:solidFill>
+                <a:latin typeface="Lato"/>
+              </a:rPr>
+              <a:t>Governance </a:t>
+            </a:r>
+            <a:r>
+              <a:rPr sz="2000" b="1" i="0">
+                <a:solidFill>
+                  <a:srgbClr val="3B7EF6"/>
+                </a:solidFill>
+                <a:latin typeface="Lato"/>
+              </a:rPr>
+              <a:t>— Designed To Pass Review</a:t>
+            </a:r>
+          </a:p>
+        </p:txBody>
+      </p:sp>
+      <p:sp>
+        <p:nvSpPr>
+          <p:cNvPr id="7" name="Oval 6"/>
+          <p:cNvSpPr/>
+          <p:nvPr/>
+        </p:nvSpPr>
+        <p:spPr>
+          <a:xfrm>
+            <a:off x="274320" y="6473952"/>
+            <a:ext cx="164592" cy="164592"/>
+          </a:xfrm>
+          <a:prstGeom prst="ellipse">
+            <a:avLst/>
+          </a:prstGeom>
+          <a:solidFill>
+            <a:srgbClr val="3B7EF6"/>
+          </a:solidFill>
+          <a:ln>
+            <a:noFill/>
+          </a:ln>
+          <a:effectLst/>
+        </p:spPr>
+        <p:style>
+          <a:lnRef idx="1">
+            <a:schemeClr val="accent1"/>
+          </a:lnRef>
+          <a:fillRef idx="3">
+            <a:schemeClr val="accent1"/>
+          </a:fillRef>
+          <a:effectRef idx="0">
+            <a:schemeClr val="accent1"/>
+          </a:effectRef>
+          <a:fontRef idx="minor">
+            <a:schemeClr val="lt1"/>
+          </a:fontRef>
+        </p:style>
+        <p:txBody>
+          <a:bodyPr rtlCol="0" anchor="ctr"/>
+          <a:lstStyle/>
+          <a:p>
+            <a:pPr algn="ctr"/>
+          </a:p>
+        </p:txBody>
+      </p:sp>
+      <p:sp>
+        <p:nvSpPr>
+          <p:cNvPr id="8" name="Oval 7"/>
+          <p:cNvSpPr/>
+          <p:nvPr/>
+        </p:nvSpPr>
+        <p:spPr>
+          <a:xfrm>
+            <a:off x="493776" y="6473952"/>
+            <a:ext cx="164592" cy="164592"/>
+          </a:xfrm>
+          <a:prstGeom prst="ellipse">
+            <a:avLst/>
+          </a:prstGeom>
+          <a:solidFill>
+            <a:srgbClr val="3B7EF6"/>
+          </a:solidFill>
+          <a:ln>
+            <a:noFill/>
+          </a:ln>
+          <a:effectLst/>
+        </p:spPr>
+        <p:style>
+          <a:lnRef idx="1">
+            <a:schemeClr val="accent1"/>
+          </a:lnRef>
+          <a:fillRef idx="3">
+            <a:schemeClr val="accent1"/>
+          </a:fillRef>
+          <a:effectRef idx="0">
+            <a:schemeClr val="accent1"/>
+          </a:effectRef>
+          <a:fontRef idx="minor">
+            <a:schemeClr val="lt1"/>
+          </a:fontRef>
+        </p:style>
+        <p:txBody>
+          <a:bodyPr rtlCol="0" anchor="ctr"/>
+          <a:lstStyle/>
+          <a:p>
+            <a:pPr algn="ctr"/>
+          </a:p>
+        </p:txBody>
+      </p:sp>
+      <p:sp>
+        <p:nvSpPr>
+          <p:cNvPr id="9" name="Oval 8"/>
+          <p:cNvSpPr/>
+          <p:nvPr/>
+        </p:nvSpPr>
+        <p:spPr>
+          <a:xfrm>
+            <a:off x="713232" y="6473952"/>
+            <a:ext cx="164592" cy="164592"/>
+          </a:xfrm>
+          <a:prstGeom prst="ellipse">
+            <a:avLst/>
+          </a:prstGeom>
+          <a:solidFill>
+            <a:srgbClr val="3B7EF6"/>
+          </a:solidFill>
+          <a:ln>
+            <a:noFill/>
+          </a:ln>
+          <a:effectLst/>
+        </p:spPr>
+        <p:style>
+          <a:lnRef idx="1">
+            <a:schemeClr val="accent1"/>
+          </a:lnRef>
+          <a:fillRef idx="3">
+            <a:schemeClr val="accent1"/>
+          </a:fillRef>
+          <a:effectRef idx="0">
+            <a:schemeClr val="accent1"/>
+          </a:effectRef>
+          <a:fontRef idx="minor">
+            <a:schemeClr val="lt1"/>
+          </a:fontRef>
+        </p:style>
+        <p:txBody>
+          <a:bodyPr rtlCol="0" anchor="ctr"/>
+          <a:lstStyle/>
+          <a:p>
+            <a:pPr algn="ctr"/>
+          </a:p>
+        </p:txBody>
+      </p:sp>
+      <p:sp>
+        <p:nvSpPr>
+          <p:cNvPr id="10" name="Oval 9"/>
+          <p:cNvSpPr/>
+          <p:nvPr/>
+        </p:nvSpPr>
+        <p:spPr>
+          <a:xfrm>
+            <a:off x="969264" y="6473952"/>
+            <a:ext cx="164592" cy="164592"/>
+          </a:xfrm>
+          <a:prstGeom prst="ellipse">
+            <a:avLst/>
+          </a:prstGeom>
+          <a:solidFill>
+            <a:srgbClr val="3B7EF6"/>
+          </a:solidFill>
+          <a:ln>
+            <a:noFill/>
+          </a:ln>
+          <a:effectLst/>
+        </p:spPr>
+        <p:style>
+          <a:lnRef idx="1">
+            <a:schemeClr val="accent1"/>
+          </a:lnRef>
+          <a:fillRef idx="3">
+            <a:schemeClr val="accent1"/>
+          </a:fillRef>
+          <a:effectRef idx="0">
+            <a:schemeClr val="accent1"/>
+          </a:effectRef>
+          <a:fontRef idx="minor">
+            <a:schemeClr val="lt1"/>
+          </a:fontRef>
+        </p:style>
+        <p:txBody>
+          <a:bodyPr rtlCol="0" anchor="ctr"/>
+          <a:lstStyle/>
+          <a:p>
+            <a:pPr algn="ctr"/>
+          </a:p>
+        </p:txBody>
+      </p:sp>
+      <p:sp>
+        <p:nvSpPr>
+          <p:cNvPr id="11" name="TextBox 10"/>
+          <p:cNvSpPr txBox="1"/>
+          <p:nvPr/>
+        </p:nvSpPr>
+        <p:spPr>
+          <a:xfrm>
+            <a:off x="1371600" y="6565392"/>
+            <a:ext cx="9144000" cy="182880"/>
+          </a:xfrm>
+          <a:prstGeom prst="rect">
+            <a:avLst/>
+          </a:prstGeom>
+          <a:noFill/>
+        </p:spPr>
+        <p:txBody>
+          <a:bodyPr wrap="square" lIns="0" rIns="0" tIns="0" bIns="0">
+            <a:spAutoFit/>
+          </a:bodyPr>
+          <a:lstStyle/>
+          <a:p>
+            <a:pPr algn="ctr"/>
+            <a:r>
+              <a:rPr sz="700" b="0" i="0">
+                <a:solidFill>
+                  <a:srgbClr val="1A214D"/>
+                </a:solidFill>
+                <a:latin typeface="Lato"/>
+              </a:rPr>
+              <a:t>This document is classified as INTERNAL &amp; WHITELISTED | Sharing allowed only with approved external domains</a:t>
+            </a:r>
+          </a:p>
+        </p:txBody>
+      </p:sp>
+      <p:sp>
+        <p:nvSpPr>
+          <p:cNvPr id="12" name="TextBox 11"/>
+          <p:cNvSpPr txBox="1"/>
+          <p:nvPr/>
+        </p:nvSpPr>
+        <p:spPr>
+          <a:xfrm>
+            <a:off x="11475720" y="6565392"/>
+            <a:ext cx="548640" cy="182880"/>
+          </a:xfrm>
+          <a:prstGeom prst="rect">
+            <a:avLst/>
+          </a:prstGeom>
+          <a:noFill/>
+        </p:spPr>
+        <p:txBody>
+          <a:bodyPr wrap="square" lIns="0" rIns="0" tIns="0" bIns="0">
+            <a:spAutoFit/>
+          </a:bodyPr>
+          <a:lstStyle/>
+          <a:p>
+            <a:pPr algn="r"/>
+            <a:r>
+              <a:rPr sz="800" b="0" i="0">
+                <a:solidFill>
+                  <a:srgbClr val="1A214D"/>
+                </a:solidFill>
+                <a:latin typeface="Lato"/>
+              </a:rPr>
+              <a:t>12</a:t>
+            </a:r>
+          </a:p>
+        </p:txBody>
+      </p:sp>
+      <p:sp>
+        <p:nvSpPr>
+          <p:cNvPr id="13" name="Rounded Rectangle 12"/>
+          <p:cNvSpPr/>
+          <p:nvPr/>
+        </p:nvSpPr>
+        <p:spPr>
+          <a:xfrm>
+            <a:off x="457200" y="969264"/>
+            <a:ext cx="9921240" cy="749808"/>
+          </a:xfrm>
+          <a:prstGeom prst="roundRect">
+            <a:avLst>
+              <a:gd name="adj" fmla="val 18000"/>
+            </a:avLst>
+          </a:prstGeom>
+          <a:solidFill>
+            <a:srgbClr val="EDF2FF"/>
+          </a:solidFill>
+          <a:ln w="9525">
+            <a:solidFill>
+              <a:srgbClr val="3B7EF6"/>
+            </a:solidFill>
+          </a:ln>
+          <a:effectLst/>
+        </p:spPr>
+        <p:style>
+          <a:lnRef idx="1">
+            <a:schemeClr val="accent1"/>
+          </a:lnRef>
+          <a:fillRef idx="3">
+            <a:schemeClr val="accent1"/>
+          </a:fillRef>
+          <a:effectRef idx="0">
+            <a:schemeClr val="accent1"/>
+          </a:effectRef>
+          <a:fontRef idx="minor">
+            <a:schemeClr val="lt1"/>
+          </a:fontRef>
+        </p:style>
+        <p:txBody>
+          <a:bodyPr rtlCol="0" anchor="ctr"/>
+          <a:lstStyle/>
+          <a:p>
+            <a:pPr algn="ctr"/>
+          </a:p>
+        </p:txBody>
+      </p:sp>
+      <p:sp>
+        <p:nvSpPr>
+          <p:cNvPr id="14" name="TextBox 13"/>
+          <p:cNvSpPr txBox="1"/>
+          <p:nvPr/>
+        </p:nvSpPr>
+        <p:spPr>
+          <a:xfrm>
+            <a:off x="658368" y="969264"/>
+            <a:ext cx="9518904" cy="749808"/>
+          </a:xfrm>
+          <a:prstGeom prst="rect">
+            <a:avLst/>
+          </a:prstGeom>
+          <a:noFill/>
+        </p:spPr>
+        <p:txBody>
+          <a:bodyPr wrap="square" lIns="0" rIns="0" anchor="ctr">
+            <a:spAutoFit/>
+          </a:bodyPr>
+          <a:lstStyle/>
+          <a:p>
+            <a:r>
+              <a:rPr sz="1200" b="1" i="0">
+                <a:solidFill>
+                  <a:srgbClr val="1A214D"/>
+                </a:solidFill>
+                <a:latin typeface="Lato"/>
+              </a:rPr>
+              <a:t>The CBUAE's Feb-2026 AI guidance maps directly onto maker-checker controls the portal already runs.</a:t>
+            </a:r>
+          </a:p>
+        </p:txBody>
+      </p:sp>
+      <p:sp>
+        <p:nvSpPr>
+          <p:cNvPr id="15" name="Rounded Rectangle 14"/>
+          <p:cNvSpPr/>
+          <p:nvPr/>
+        </p:nvSpPr>
+        <p:spPr>
+          <a:xfrm>
+            <a:off x="457200" y="1874519"/>
+            <a:ext cx="5303520" cy="1920240"/>
+          </a:xfrm>
+          <a:prstGeom prst="roundRect">
+            <a:avLst>
+              <a:gd name="adj" fmla="val 12000"/>
+            </a:avLst>
+          </a:prstGeom>
+          <a:solidFill>
+            <a:srgbClr val="FFFFFF"/>
+          </a:solidFill>
+          <a:ln w="9525">
+            <a:solidFill>
+              <a:srgbClr val="1A214D"/>
+            </a:solidFill>
+          </a:ln>
+          <a:effectLst/>
+        </p:spPr>
+        <p:style>
+          <a:lnRef idx="1">
+            <a:schemeClr val="accent1"/>
+          </a:lnRef>
+          <a:fillRef idx="3">
+            <a:schemeClr val="accent1"/>
+          </a:fillRef>
+          <a:effectRef idx="0">
+            <a:schemeClr val="accent1"/>
+          </a:effectRef>
+          <a:fontRef idx="minor">
+            <a:schemeClr val="lt1"/>
+          </a:fontRef>
+        </p:style>
+        <p:txBody>
+          <a:bodyPr rtlCol="0" anchor="ctr"/>
+          <a:lstStyle/>
+          <a:p>
+            <a:pPr algn="ctr"/>
+          </a:p>
+        </p:txBody>
+      </p:sp>
+      <p:sp>
+        <p:nvSpPr>
+          <p:cNvPr id="16" name="TextBox 15"/>
+          <p:cNvSpPr txBox="1"/>
+          <p:nvPr/>
+        </p:nvSpPr>
+        <p:spPr>
+          <a:xfrm>
+            <a:off x="603504" y="1984248"/>
+            <a:ext cx="5010912" cy="274320"/>
+          </a:xfrm>
+          <a:prstGeom prst="rect">
+            <a:avLst/>
+          </a:prstGeom>
+          <a:noFill/>
+        </p:spPr>
+        <p:txBody>
+          <a:bodyPr wrap="square" lIns="0" rIns="0" tIns="0" bIns="0">
+            <a:spAutoFit/>
+          </a:bodyPr>
+          <a:lstStyle/>
+          <a:p>
+            <a:pPr algn="l"/>
+            <a:r>
+              <a:rPr sz="1100" b="1" i="0">
+                <a:solidFill>
+                  <a:srgbClr val="3B7EF6"/>
+                </a:solidFill>
+                <a:latin typeface="Lato"/>
+              </a:rPr>
+              <a:t>CBUAE expectations (Feb 2026)</a:t>
+            </a:r>
+          </a:p>
+        </p:txBody>
+      </p:sp>
+      <p:sp>
+        <p:nvSpPr>
+          <p:cNvPr id="17" name="TextBox 16"/>
+          <p:cNvSpPr txBox="1"/>
+          <p:nvPr/>
+        </p:nvSpPr>
+        <p:spPr>
+          <a:xfrm>
+            <a:off x="603504" y="2295144"/>
+            <a:ext cx="5010912" cy="1389888"/>
+          </a:xfrm>
+          <a:prstGeom prst="rect">
+            <a:avLst/>
+          </a:prstGeom>
+          <a:noFill/>
+        </p:spPr>
+        <p:txBody>
+          <a:bodyPr wrap="square" lIns="0" rIns="0" tIns="0">
+            <a:spAutoFit/>
+          </a:bodyPr>
+          <a:lstStyle/>
+          <a:p>
+            <a:pPr>
+              <a:spcAft>
+                <a:spcPts val="300"/>
+              </a:spcAft>
+            </a:pPr>
+            <a:r>
+              <a:rPr sz="1000" b="1" i="0">
+                <a:solidFill>
+                  <a:srgbClr val="1A214D"/>
+                </a:solidFill>
+                <a:latin typeface="Lato"/>
+              </a:rPr>
+              <a:t>Guidance Note on responsible AI/ML </a:t>
+            </a:r>
+            <a:r>
+              <a:rPr sz="1000" b="0" i="0">
+                <a:solidFill>
+                  <a:srgbClr val="1A214D"/>
+                </a:solidFill>
+                <a:latin typeface="Lato"/>
+              </a:rPr>
+              <a:t>for licensed financial institutions: human oversight on high-impact decisions, validation before deployment, monitoring for model drift, periodic bias testing. Not legally binding — but the supervisory direction.</a:t>
+            </a:r>
+          </a:p>
+        </p:txBody>
+      </p:sp>
+      <p:sp>
+        <p:nvSpPr>
+          <p:cNvPr id="18" name="Rounded Rectangle 17"/>
+          <p:cNvSpPr/>
+          <p:nvPr/>
+        </p:nvSpPr>
+        <p:spPr>
+          <a:xfrm>
+            <a:off x="6217920" y="1874519"/>
+            <a:ext cx="5303520" cy="1920240"/>
+          </a:xfrm>
+          <a:prstGeom prst="roundRect">
+            <a:avLst>
+              <a:gd name="adj" fmla="val 12000"/>
+            </a:avLst>
+          </a:prstGeom>
+          <a:solidFill>
+            <a:srgbClr val="FFFFFF"/>
+          </a:solidFill>
+          <a:ln w="9525">
+            <a:solidFill>
+              <a:srgbClr val="1A214D"/>
+            </a:solidFill>
+          </a:ln>
+          <a:effectLst/>
+        </p:spPr>
+        <p:style>
+          <a:lnRef idx="1">
+            <a:schemeClr val="accent1"/>
+          </a:lnRef>
+          <a:fillRef idx="3">
+            <a:schemeClr val="accent1"/>
+          </a:fillRef>
+          <a:effectRef idx="0">
+            <a:schemeClr val="accent1"/>
+          </a:effectRef>
+          <a:fontRef idx="minor">
+            <a:schemeClr val="lt1"/>
+          </a:fontRef>
+        </p:style>
+        <p:txBody>
+          <a:bodyPr rtlCol="0" anchor="ctr"/>
+          <a:lstStyle/>
+          <a:p>
+            <a:pPr algn="ctr"/>
+          </a:p>
+        </p:txBody>
+      </p:sp>
+      <p:sp>
+        <p:nvSpPr>
+          <p:cNvPr id="19" name="TextBox 18"/>
+          <p:cNvSpPr txBox="1"/>
+          <p:nvPr/>
+        </p:nvSpPr>
+        <p:spPr>
+          <a:xfrm>
+            <a:off x="6364224" y="1984248"/>
+            <a:ext cx="5010912" cy="274320"/>
+          </a:xfrm>
+          <a:prstGeom prst="rect">
+            <a:avLst/>
+          </a:prstGeom>
+          <a:noFill/>
+        </p:spPr>
+        <p:txBody>
+          <a:bodyPr wrap="square" lIns="0" rIns="0" tIns="0" bIns="0">
+            <a:spAutoFit/>
+          </a:bodyPr>
+          <a:lstStyle/>
+          <a:p>
+            <a:pPr algn="l"/>
+            <a:r>
+              <a:rPr sz="1100" b="1" i="0">
+                <a:solidFill>
+                  <a:srgbClr val="3B7EF6"/>
+                </a:solidFill>
+                <a:latin typeface="Lato"/>
+              </a:rPr>
+              <a:t>Our answer, by design</a:t>
+            </a:r>
+          </a:p>
+        </p:txBody>
+      </p:sp>
+      <p:sp>
+        <p:nvSpPr>
+          <p:cNvPr id="20" name="TextBox 19"/>
+          <p:cNvSpPr txBox="1"/>
+          <p:nvPr/>
+        </p:nvSpPr>
+        <p:spPr>
+          <a:xfrm>
+            <a:off x="6364224" y="2295144"/>
+            <a:ext cx="5010912" cy="1389888"/>
+          </a:xfrm>
+          <a:prstGeom prst="rect">
+            <a:avLst/>
+          </a:prstGeom>
+          <a:noFill/>
+        </p:spPr>
+        <p:txBody>
+          <a:bodyPr wrap="square" lIns="0" rIns="0" tIns="0">
+            <a:spAutoFit/>
+          </a:bodyPr>
+          <a:lstStyle/>
+          <a:p>
+            <a:pPr>
+              <a:spcAft>
+                <a:spcPts val="300"/>
+              </a:spcAft>
+            </a:pPr>
+            <a:r>
+              <a:rPr sz="1000" b="1" i="0">
+                <a:solidFill>
+                  <a:srgbClr val="1A214D"/>
+                </a:solidFill>
+                <a:latin typeface="Lato"/>
+              </a:rPr>
+              <a:t>AI stops at draft. </a:t>
+            </a:r>
+            <a:r>
+              <a:rPr sz="1000" b="0" i="0">
+                <a:solidFill>
+                  <a:srgbClr val="1A214D"/>
+                </a:solidFill>
+                <a:latin typeface="Lato"/>
+              </a:rPr>
+              <a:t>Credit decisions stay deterministic in the Rule Engine; every AI-assisted change is a Maker request with checker approval; new policies run in shadow mode before production.</a:t>
+            </a:r>
+          </a:p>
+        </p:txBody>
+      </p:sp>
+      <p:sp>
+        <p:nvSpPr>
+          <p:cNvPr id="21" name="Rounded Rectangle 20"/>
+          <p:cNvSpPr/>
+          <p:nvPr/>
+        </p:nvSpPr>
+        <p:spPr>
+          <a:xfrm>
+            <a:off x="457200" y="3977639"/>
+            <a:ext cx="5303520" cy="1920240"/>
+          </a:xfrm>
+          <a:prstGeom prst="roundRect">
+            <a:avLst>
+              <a:gd name="adj" fmla="val 12000"/>
+            </a:avLst>
+          </a:prstGeom>
+          <a:solidFill>
+            <a:srgbClr val="FFFFFF"/>
+          </a:solidFill>
+          <a:ln w="9525">
+            <a:solidFill>
+              <a:srgbClr val="1A214D"/>
+            </a:solidFill>
+          </a:ln>
+          <a:effectLst/>
+        </p:spPr>
+        <p:style>
+          <a:lnRef idx="1">
+            <a:schemeClr val="accent1"/>
+          </a:lnRef>
+          <a:fillRef idx="3">
+            <a:schemeClr val="accent1"/>
+          </a:fillRef>
+          <a:effectRef idx="0">
+            <a:schemeClr val="accent1"/>
+          </a:effectRef>
+          <a:fontRef idx="minor">
+            <a:schemeClr val="lt1"/>
+          </a:fontRef>
+        </p:style>
+        <p:txBody>
+          <a:bodyPr rtlCol="0" anchor="ctr"/>
+          <a:lstStyle/>
+          <a:p>
+            <a:pPr algn="ctr"/>
+          </a:p>
+        </p:txBody>
+      </p:sp>
+      <p:sp>
+        <p:nvSpPr>
+          <p:cNvPr id="22" name="TextBox 21"/>
+          <p:cNvSpPr txBox="1"/>
+          <p:nvPr/>
+        </p:nvSpPr>
+        <p:spPr>
+          <a:xfrm>
+            <a:off x="603504" y="4087368"/>
+            <a:ext cx="5010912" cy="274320"/>
+          </a:xfrm>
+          <a:prstGeom prst="rect">
+            <a:avLst/>
+          </a:prstGeom>
+          <a:noFill/>
+        </p:spPr>
+        <p:txBody>
+          <a:bodyPr wrap="square" lIns="0" rIns="0" tIns="0" bIns="0">
+            <a:spAutoFit/>
+          </a:bodyPr>
+          <a:lstStyle/>
+          <a:p>
+            <a:pPr algn="l"/>
+            <a:r>
+              <a:rPr sz="1100" b="1" i="0">
+                <a:solidFill>
+                  <a:srgbClr val="3B7EF6"/>
+                </a:solidFill>
+                <a:latin typeface="Lato"/>
+              </a:rPr>
+              <a:t>Auditability</a:t>
+            </a:r>
+          </a:p>
+        </p:txBody>
+      </p:sp>
+      <p:sp>
+        <p:nvSpPr>
+          <p:cNvPr id="23" name="TextBox 22"/>
+          <p:cNvSpPr txBox="1"/>
+          <p:nvPr/>
+        </p:nvSpPr>
+        <p:spPr>
+          <a:xfrm>
+            <a:off x="603504" y="4398264"/>
+            <a:ext cx="5010912" cy="1389888"/>
+          </a:xfrm>
+          <a:prstGeom prst="rect">
+            <a:avLst/>
+          </a:prstGeom>
+          <a:noFill/>
+        </p:spPr>
+        <p:txBody>
+          <a:bodyPr wrap="square" lIns="0" rIns="0" tIns="0">
+            <a:spAutoFit/>
+          </a:bodyPr>
+          <a:lstStyle/>
+          <a:p>
+            <a:pPr>
+              <a:spcAft>
+                <a:spcPts val="300"/>
+              </a:spcAft>
+            </a:pPr>
+            <a:r>
+              <a:rPr sz="1000" b="1" i="0">
+                <a:solidFill>
+                  <a:srgbClr val="1A214D"/>
+                </a:solidFill>
+                <a:latin typeface="Lato"/>
+              </a:rPr>
+              <a:t>Log per change: </a:t>
+            </a:r>
+            <a:r>
+              <a:rPr sz="1000" b="0" i="0">
+                <a:solidFill>
+                  <a:srgbClr val="1A214D"/>
+                </a:solidFill>
+                <a:latin typeface="Lato"/>
+              </a:rPr>
+              <a:t>prompt, model version, draft, validation result, approver.</a:t>
+            </a:r>
+          </a:p>
+          <a:p>
+            <a:pPr>
+              <a:spcAft>
+                <a:spcPts val="300"/>
+              </a:spcAft>
+            </a:pPr>
+            <a:r>
+              <a:rPr sz="1000" b="1" i="0">
+                <a:solidFill>
+                  <a:srgbClr val="1A214D"/>
+                </a:solidFill>
+                <a:latin typeface="Lato"/>
+              </a:rPr>
+              <a:t>Same maker-checker trail </a:t>
+            </a:r>
+            <a:r>
+              <a:rPr sz="1000" b="0" i="0">
+                <a:solidFill>
+                  <a:srgbClr val="1A214D"/>
+                </a:solidFill>
+                <a:latin typeface="Lato"/>
+              </a:rPr>
+              <a:t>banks already audit — no new audit framework to invent.</a:t>
+            </a:r>
+          </a:p>
+        </p:txBody>
+      </p:sp>
+      <p:sp>
+        <p:nvSpPr>
+          <p:cNvPr id="24" name="Rounded Rectangle 23"/>
+          <p:cNvSpPr/>
+          <p:nvPr/>
+        </p:nvSpPr>
+        <p:spPr>
+          <a:xfrm>
+            <a:off x="6217920" y="3977639"/>
+            <a:ext cx="5303520" cy="1920240"/>
+          </a:xfrm>
+          <a:prstGeom prst="roundRect">
+            <a:avLst>
+              <a:gd name="adj" fmla="val 12000"/>
+            </a:avLst>
+          </a:prstGeom>
+          <a:solidFill>
+            <a:srgbClr val="FFFFFF"/>
+          </a:solidFill>
+          <a:ln w="9525">
+            <a:solidFill>
+              <a:srgbClr val="1A214D"/>
+            </a:solidFill>
+          </a:ln>
+          <a:effectLst/>
+        </p:spPr>
+        <p:style>
+          <a:lnRef idx="1">
+            <a:schemeClr val="accent1"/>
+          </a:lnRef>
+          <a:fillRef idx="3">
+            <a:schemeClr val="accent1"/>
+          </a:fillRef>
+          <a:effectRef idx="0">
+            <a:schemeClr val="accent1"/>
+          </a:effectRef>
+          <a:fontRef idx="minor">
+            <a:schemeClr val="lt1"/>
+          </a:fontRef>
+        </p:style>
+        <p:txBody>
+          <a:bodyPr rtlCol="0" anchor="ctr"/>
+          <a:lstStyle/>
+          <a:p>
+            <a:pPr algn="ctr"/>
+          </a:p>
+        </p:txBody>
+      </p:sp>
+      <p:sp>
+        <p:nvSpPr>
+          <p:cNvPr id="25" name="TextBox 24"/>
+          <p:cNvSpPr txBox="1"/>
+          <p:nvPr/>
+        </p:nvSpPr>
+        <p:spPr>
+          <a:xfrm>
+            <a:off x="6364224" y="4087368"/>
+            <a:ext cx="5010912" cy="274320"/>
+          </a:xfrm>
+          <a:prstGeom prst="rect">
+            <a:avLst/>
+          </a:prstGeom>
+          <a:noFill/>
+        </p:spPr>
+        <p:txBody>
+          <a:bodyPr wrap="square" lIns="0" rIns="0" tIns="0" bIns="0">
+            <a:spAutoFit/>
+          </a:bodyPr>
+          <a:lstStyle/>
+          <a:p>
+            <a:pPr algn="l"/>
+            <a:r>
+              <a:rPr sz="1100" b="1" i="0">
+                <a:solidFill>
+                  <a:srgbClr val="3B7EF6"/>
+                </a:solidFill>
+                <a:latin typeface="Lato"/>
+              </a:rPr>
+              <a:t>Data protection</a:t>
+            </a:r>
+          </a:p>
+        </p:txBody>
+      </p:sp>
+      <p:sp>
+        <p:nvSpPr>
+          <p:cNvPr id="26" name="TextBox 25"/>
+          <p:cNvSpPr txBox="1"/>
+          <p:nvPr/>
+        </p:nvSpPr>
+        <p:spPr>
+          <a:xfrm>
+            <a:off x="6364224" y="4398264"/>
+            <a:ext cx="5010912" cy="1389888"/>
+          </a:xfrm>
+          <a:prstGeom prst="rect">
+            <a:avLst/>
+          </a:prstGeom>
+          <a:noFill/>
+        </p:spPr>
+        <p:txBody>
+          <a:bodyPr wrap="square" lIns="0" rIns="0" tIns="0">
+            <a:spAutoFit/>
+          </a:bodyPr>
+          <a:lstStyle/>
+          <a:p>
+            <a:pPr>
+              <a:spcAft>
+                <a:spcPts val="300"/>
+              </a:spcAft>
+            </a:pPr>
+            <a:r>
+              <a:rPr sz="1000" b="1" i="0">
+                <a:solidFill>
+                  <a:srgbClr val="1A214D"/>
+                </a:solidFill>
+                <a:latin typeface="Lato"/>
+              </a:rPr>
+              <a:t>Offline UAE hosting </a:t>
+            </a:r>
+            <a:r>
+              <a:rPr sz="1000" b="0" i="0">
+                <a:solidFill>
+                  <a:srgbClr val="1A214D"/>
+                </a:solidFill>
+                <a:latin typeface="Lato"/>
+              </a:rPr>
+              <a:t>keeps bank data in-country.</a:t>
+            </a:r>
+          </a:p>
+          <a:p>
+            <a:pPr>
+              <a:spcAft>
+                <a:spcPts val="300"/>
+              </a:spcAft>
+            </a:pPr>
+            <a:r>
+              <a:rPr sz="1000" b="1" i="0">
+                <a:solidFill>
+                  <a:srgbClr val="1A214D"/>
+                </a:solidFill>
+                <a:latin typeface="Lato"/>
+              </a:rPr>
+              <a:t>Training data anonymised </a:t>
+            </a:r>
+            <a:r>
+              <a:rPr sz="1000" b="0" i="0">
+                <a:solidFill>
+                  <a:srgbClr val="1A214D"/>
+                </a:solidFill>
+                <a:latin typeface="Lato"/>
+              </a:rPr>
+              <a:t>before any use — owned by the data-readiness workstream.</a:t>
+            </a:r>
+          </a:p>
+        </p:txBody>
+      </p:sp>
+      <p:sp>
+        <p:nvSpPr>
+          <p:cNvPr id="27" name="TextBox 26"/>
+          <p:cNvSpPr txBox="1"/>
+          <p:nvPr/>
+        </p:nvSpPr>
+        <p:spPr>
+          <a:xfrm>
+            <a:off x="457200" y="6336792"/>
+            <a:ext cx="10515600" cy="164592"/>
+          </a:xfrm>
+          <a:prstGeom prst="rect">
+            <a:avLst/>
+          </a:prstGeom>
+          <a:noFill/>
+        </p:spPr>
+        <p:txBody>
+          <a:bodyPr wrap="square" lIns="0" rIns="0" tIns="0" bIns="0">
+            <a:spAutoFit/>
+          </a:bodyPr>
+          <a:lstStyle/>
+          <a:p>
+            <a:pPr algn="l"/>
+            <a:r>
+              <a:rPr sz="700" b="0" i="1">
+                <a:solidFill>
+                  <a:srgbClr val="1A214D"/>
+                </a:solidFill>
+                <a:latin typeface="Lato"/>
+              </a:rPr>
+              <a:t>Sources: CBUAE Guidance Note on AI/ML (Feb 2026) — verify specifics against the original text before external use</a:t>
+            </a:r>
+          </a:p>
+        </p:txBody>
+      </p:sp>
+    </p:spTree>
+  </p:cSld>
+  <p:clrMapOvr>
+    <a:masterClrMapping/>
+  </p:clrMapOvr>
+</p:sld>
+</file>
+
+<file path=ppt/slides/slide14.xml><?xml version="1.0" encoding="utf-8"?>
+<p:sld xmlns:a="http://schemas.openxmlformats.org/drawingml/2006/main" xmlns:p="http://schemas.openxmlformats.org/presentationml/2006/main" xmlns:r="http://schemas.openxmlformats.org/officeDocument/2006/relationships">
+  <p:cSld>
+    <p:bg>
+      <p:bgPr>
+        <a:solidFill>
+          <a:srgbClr val="FFFFFF"/>
+        </a:solidFill>
+        <a:effectLst/>
+      </p:bgPr>
+    </p:bg>
+    <p:spTree>
+      <p:nvGrpSpPr>
+        <p:cNvPr id="1" name=""/>
+        <p:cNvGrpSpPr/>
+        <p:nvPr/>
+      </p:nvGrpSpPr>
+      <p:grpSpPr/>
+      <p:sp>
+        <p:nvSpPr>
+          <p:cNvPr id="2" name="Oval 1"/>
+          <p:cNvSpPr/>
+          <p:nvPr/>
+        </p:nvSpPr>
+        <p:spPr>
+          <a:xfrm>
+            <a:off x="10515600" y="-2011680"/>
+            <a:ext cx="4114800" cy="4114800"/>
+          </a:xfrm>
+          <a:prstGeom prst="ellipse">
+            <a:avLst/>
+          </a:prstGeom>
+          <a:solidFill>
+            <a:srgbClr val="1A214D"/>
+          </a:solidFill>
+          <a:ln>
+            <a:noFill/>
+          </a:ln>
+          <a:effectLst/>
+        </p:spPr>
+        <p:style>
+          <a:lnRef idx="1">
+            <a:schemeClr val="accent1"/>
+          </a:lnRef>
+          <a:fillRef idx="3">
+            <a:schemeClr val="accent1"/>
+          </a:fillRef>
+          <a:effectRef idx="0">
+            <a:schemeClr val="accent1"/>
+          </a:effectRef>
+          <a:fontRef idx="minor">
+            <a:schemeClr val="lt1"/>
+          </a:fontRef>
+        </p:style>
+        <p:txBody>
+          <a:bodyPr rtlCol="0" anchor="ctr"/>
+          <a:lstStyle/>
+          <a:p>
+            <a:pPr algn="ctr"/>
+          </a:p>
+        </p:txBody>
+      </p:sp>
+      <p:sp>
+        <p:nvSpPr>
+          <p:cNvPr id="3" name="TextBox 2"/>
+          <p:cNvSpPr txBox="1"/>
+          <p:nvPr/>
+        </p:nvSpPr>
+        <p:spPr>
+          <a:xfrm>
+            <a:off x="228600" y="36576"/>
+            <a:ext cx="10058400" cy="164592"/>
+          </a:xfrm>
+          <a:prstGeom prst="rect">
+            <a:avLst/>
+          </a:prstGeom>
+          <a:noFill/>
+        </p:spPr>
+        <p:txBody>
+          <a:bodyPr wrap="square" lIns="0" rIns="0" tIns="0" bIns="0">
+            <a:spAutoFit/>
+          </a:bodyPr>
+          <a:lstStyle/>
+          <a:p>
+            <a:pPr algn="l"/>
+            <a:r>
+              <a:rPr sz="700" b="0" i="0">
+                <a:solidFill>
+                  <a:srgbClr val="1A214D"/>
+                </a:solidFill>
+                <a:latin typeface="Lato"/>
+              </a:rPr>
+              <a:t>APPRO – INTERNAL &amp; APPROVED DOMAINS | Controlled Distribution</a:t>
+            </a:r>
+          </a:p>
+        </p:txBody>
+      </p:sp>
+      <p:pic>
+        <p:nvPicPr>
+          <p:cNvPr id="4" name="Picture 3" descr="logo-white.png"/>
+          <p:cNvPicPr>
+            <a:picLocks noChangeAspect="1"/>
+          </p:cNvPicPr>
+          <p:nvPr/>
+        </p:nvPicPr>
+        <p:blipFill>
+          <a:blip r:embed="rId2"/>
+          <a:stretch>
+            <a:fillRect/>
+          </a:stretch>
+        </p:blipFill>
+        <p:spPr>
+          <a:xfrm>
+            <a:off x="10744200" y="274320"/>
+            <a:ext cx="1280160" cy="373807"/>
+          </a:xfrm>
+          <a:prstGeom prst="rect">
+            <a:avLst/>
+          </a:prstGeom>
+        </p:spPr>
+      </p:pic>
+      <p:sp>
+        <p:nvSpPr>
+          <p:cNvPr id="5" name="Rounded Rectangle 4"/>
+          <p:cNvSpPr/>
+          <p:nvPr/>
+        </p:nvSpPr>
+        <p:spPr>
+          <a:xfrm>
+            <a:off x="228600" y="493776"/>
+            <a:ext cx="1640433" cy="274320"/>
+          </a:xfrm>
+          <a:prstGeom prst="roundRect">
+            <a:avLst>
+              <a:gd name="adj" fmla="val 50000"/>
+            </a:avLst>
+          </a:prstGeom>
+          <a:solidFill>
+            <a:srgbClr val="FDBA23"/>
+          </a:solidFill>
+          <a:ln>
+            <a:noFill/>
+          </a:ln>
+          <a:effectLst/>
+        </p:spPr>
+        <p:style>
+          <a:lnRef idx="1">
+            <a:schemeClr val="accent1"/>
+          </a:lnRef>
+          <a:fillRef idx="3">
+            <a:schemeClr val="accent1"/>
+          </a:fillRef>
+          <a:effectRef idx="0">
+            <a:schemeClr val="accent1"/>
+          </a:effectRef>
+          <a:fontRef idx="minor">
+            <a:schemeClr val="lt1"/>
+          </a:fontRef>
+        </p:style>
+        <p:txBody>
+          <a:bodyPr rtlCol="0" anchor="ctr"/>
+          <a:lstStyle/>
+          <a:p>
+            <a:pPr algn="ctr"/>
+          </a:p>
+        </p:txBody>
+      </p:sp>
+      <p:sp>
+        <p:nvSpPr>
+          <p:cNvPr id="6" name="TextBox 5"/>
+          <p:cNvSpPr txBox="1"/>
+          <p:nvPr/>
+        </p:nvSpPr>
+        <p:spPr>
+          <a:xfrm>
+            <a:off x="274320" y="365760"/>
+            <a:ext cx="10058400" cy="502920"/>
+          </a:xfrm>
+          <a:prstGeom prst="rect">
+            <a:avLst/>
+          </a:prstGeom>
+          <a:noFill/>
+        </p:spPr>
+        <p:txBody>
+          <a:bodyPr wrap="square" lIns="0" rIns="0" tIns="0" bIns="0">
+            <a:spAutoFit/>
+          </a:bodyPr>
+          <a:lstStyle/>
+          <a:p>
+            <a:pPr algn="l"/>
+            <a:r>
+              <a:rPr sz="2000" b="1" i="0">
+                <a:solidFill>
+                  <a:srgbClr val="1A214D"/>
+                </a:solidFill>
+                <a:latin typeface="Lato"/>
+              </a:rPr>
+              <a:t>Data Readiness </a:t>
+            </a:r>
+            <a:r>
+              <a:rPr sz="2000" b="1" i="0">
+                <a:solidFill>
+                  <a:srgbClr val="3B7EF6"/>
+                </a:solidFill>
+                <a:latin typeface="Lato"/>
+              </a:rPr>
+              <a:t>— What We Have vs What Training Needs</a:t>
+            </a:r>
+          </a:p>
+        </p:txBody>
+      </p:sp>
+      <p:sp>
+        <p:nvSpPr>
+          <p:cNvPr id="7" name="Oval 6"/>
+          <p:cNvSpPr/>
+          <p:nvPr/>
+        </p:nvSpPr>
+        <p:spPr>
+          <a:xfrm>
+            <a:off x="274320" y="6473952"/>
+            <a:ext cx="164592" cy="164592"/>
+          </a:xfrm>
+          <a:prstGeom prst="ellipse">
+            <a:avLst/>
+          </a:prstGeom>
+          <a:solidFill>
+            <a:srgbClr val="3B7EF6"/>
+          </a:solidFill>
+          <a:ln>
+            <a:noFill/>
+          </a:ln>
+          <a:effectLst/>
+        </p:spPr>
+        <p:style>
+          <a:lnRef idx="1">
+            <a:schemeClr val="accent1"/>
+          </a:lnRef>
+          <a:fillRef idx="3">
+            <a:schemeClr val="accent1"/>
+          </a:fillRef>
+          <a:effectRef idx="0">
+            <a:schemeClr val="accent1"/>
+          </a:effectRef>
+          <a:fontRef idx="minor">
+            <a:schemeClr val="lt1"/>
+          </a:fontRef>
+        </p:style>
+        <p:txBody>
+          <a:bodyPr rtlCol="0" anchor="ctr"/>
+          <a:lstStyle/>
+          <a:p>
+            <a:pPr algn="ctr"/>
+          </a:p>
+        </p:txBody>
+      </p:sp>
+      <p:sp>
+        <p:nvSpPr>
+          <p:cNvPr id="8" name="Oval 7"/>
+          <p:cNvSpPr/>
+          <p:nvPr/>
+        </p:nvSpPr>
+        <p:spPr>
+          <a:xfrm>
+            <a:off x="493776" y="6473952"/>
+            <a:ext cx="164592" cy="164592"/>
+          </a:xfrm>
+          <a:prstGeom prst="ellipse">
+            <a:avLst/>
+          </a:prstGeom>
+          <a:solidFill>
+            <a:srgbClr val="3B7EF6"/>
+          </a:solidFill>
+          <a:ln>
+            <a:noFill/>
+          </a:ln>
+          <a:effectLst/>
+        </p:spPr>
+        <p:style>
+          <a:lnRef idx="1">
+            <a:schemeClr val="accent1"/>
+          </a:lnRef>
+          <a:fillRef idx="3">
+            <a:schemeClr val="accent1"/>
+          </a:fillRef>
+          <a:effectRef idx="0">
+            <a:schemeClr val="accent1"/>
+          </a:effectRef>
+          <a:fontRef idx="minor">
+            <a:schemeClr val="lt1"/>
+          </a:fontRef>
+        </p:style>
+        <p:txBody>
+          <a:bodyPr rtlCol="0" anchor="ctr"/>
+          <a:lstStyle/>
+          <a:p>
+            <a:pPr algn="ctr"/>
+          </a:p>
+        </p:txBody>
+      </p:sp>
+      <p:sp>
+        <p:nvSpPr>
+          <p:cNvPr id="9" name="Oval 8"/>
+          <p:cNvSpPr/>
+          <p:nvPr/>
+        </p:nvSpPr>
+        <p:spPr>
+          <a:xfrm>
+            <a:off x="713232" y="6473952"/>
+            <a:ext cx="164592" cy="164592"/>
+          </a:xfrm>
+          <a:prstGeom prst="ellipse">
+            <a:avLst/>
+          </a:prstGeom>
+          <a:solidFill>
+            <a:srgbClr val="3B7EF6"/>
+          </a:solidFill>
+          <a:ln>
+            <a:noFill/>
+          </a:ln>
+          <a:effectLst/>
+        </p:spPr>
+        <p:style>
+          <a:lnRef idx="1">
+            <a:schemeClr val="accent1"/>
+          </a:lnRef>
+          <a:fillRef idx="3">
+            <a:schemeClr val="accent1"/>
+          </a:fillRef>
+          <a:effectRef idx="0">
+            <a:schemeClr val="accent1"/>
+          </a:effectRef>
+          <a:fontRef idx="minor">
+            <a:schemeClr val="lt1"/>
+          </a:fontRef>
+        </p:style>
+        <p:txBody>
+          <a:bodyPr rtlCol="0" anchor="ctr"/>
+          <a:lstStyle/>
+          <a:p>
+            <a:pPr algn="ctr"/>
+          </a:p>
+        </p:txBody>
+      </p:sp>
+      <p:sp>
+        <p:nvSpPr>
+          <p:cNvPr id="10" name="Oval 9"/>
+          <p:cNvSpPr/>
+          <p:nvPr/>
+        </p:nvSpPr>
+        <p:spPr>
+          <a:xfrm>
+            <a:off x="969264" y="6473952"/>
+            <a:ext cx="164592" cy="164592"/>
+          </a:xfrm>
+          <a:prstGeom prst="ellipse">
+            <a:avLst/>
+          </a:prstGeom>
+          <a:solidFill>
+            <a:srgbClr val="3B7EF6"/>
+          </a:solidFill>
+          <a:ln>
+            <a:noFill/>
+          </a:ln>
+          <a:effectLst/>
+        </p:spPr>
+        <p:style>
+          <a:lnRef idx="1">
+            <a:schemeClr val="accent1"/>
+          </a:lnRef>
+          <a:fillRef idx="3">
+            <a:schemeClr val="accent1"/>
+          </a:fillRef>
+          <a:effectRef idx="0">
+            <a:schemeClr val="accent1"/>
+          </a:effectRef>
+          <a:fontRef idx="minor">
+            <a:schemeClr val="lt1"/>
+          </a:fontRef>
+        </p:style>
+        <p:txBody>
+          <a:bodyPr rtlCol="0" anchor="ctr"/>
+          <a:lstStyle/>
+          <a:p>
+            <a:pPr algn="ctr"/>
+          </a:p>
+        </p:txBody>
+      </p:sp>
+      <p:sp>
+        <p:nvSpPr>
+          <p:cNvPr id="11" name="TextBox 10"/>
+          <p:cNvSpPr txBox="1"/>
+          <p:nvPr/>
+        </p:nvSpPr>
+        <p:spPr>
+          <a:xfrm>
+            <a:off x="1371600" y="6565392"/>
+            <a:ext cx="9144000" cy="182880"/>
+          </a:xfrm>
+          <a:prstGeom prst="rect">
+            <a:avLst/>
+          </a:prstGeom>
+          <a:noFill/>
+        </p:spPr>
+        <p:txBody>
+          <a:bodyPr wrap="square" lIns="0" rIns="0" tIns="0" bIns="0">
+            <a:spAutoFit/>
+          </a:bodyPr>
+          <a:lstStyle/>
+          <a:p>
+            <a:pPr algn="ctr"/>
+            <a:r>
+              <a:rPr sz="700" b="0" i="0">
+                <a:solidFill>
+                  <a:srgbClr val="1A214D"/>
+                </a:solidFill>
+                <a:latin typeface="Lato"/>
+              </a:rPr>
+              <a:t>This document is classified as INTERNAL &amp; WHITELISTED | Sharing allowed only with approved external domains</a:t>
+            </a:r>
+          </a:p>
+        </p:txBody>
+      </p:sp>
+      <p:sp>
+        <p:nvSpPr>
+          <p:cNvPr id="12" name="TextBox 11"/>
+          <p:cNvSpPr txBox="1"/>
+          <p:nvPr/>
+        </p:nvSpPr>
+        <p:spPr>
+          <a:xfrm>
+            <a:off x="11475720" y="6565392"/>
+            <a:ext cx="548640" cy="182880"/>
+          </a:xfrm>
+          <a:prstGeom prst="rect">
+            <a:avLst/>
+          </a:prstGeom>
+          <a:noFill/>
+        </p:spPr>
+        <p:txBody>
+          <a:bodyPr wrap="square" lIns="0" rIns="0" tIns="0" bIns="0">
+            <a:spAutoFit/>
+          </a:bodyPr>
+          <a:lstStyle/>
+          <a:p>
+            <a:pPr algn="r"/>
+            <a:r>
+              <a:rPr sz="800" b="0" i="0">
+                <a:solidFill>
+                  <a:srgbClr val="1A214D"/>
+                </a:solidFill>
+                <a:latin typeface="Lato"/>
+              </a:rPr>
+              <a:t>13</a:t>
             </a:r>
           </a:p>
         </p:txBody>
@@ -5645,7 +10897,7 @@
 </p:sld>
 </file>
 
-<file path=ppt/slides/slide11.xml><?xml version="1.0" encoding="utf-8"?>
+<file path=ppt/slides/slide15.xml><?xml version="1.0" encoding="utf-8"?>
 <p:sld xmlns:a="http://schemas.openxmlformats.org/drawingml/2006/main" xmlns:p="http://schemas.openxmlformats.org/presentationml/2006/main" xmlns:r="http://schemas.openxmlformats.org/officeDocument/2006/relationships">
   <p:cSld>
     <p:bg>
@@ -6097,7 +11349,7 @@
                 </a:solidFill>
                 <a:latin typeface="Lato"/>
               </a:rPr>
-              <a:t>10</a:t>
+              <a:t>14</a:t>
             </a:r>
           </a:p>
         </p:txBody>
@@ -6916,7 +12168,7 @@
 </p:sld>
 </file>
 
-<file path=ppt/slides/slide12.xml><?xml version="1.0" encoding="utf-8"?>
+<file path=ppt/slides/slide16.xml><?xml version="1.0" encoding="utf-8"?>
 <p:sld xmlns:a="http://schemas.openxmlformats.org/drawingml/2006/main" xmlns:p="http://schemas.openxmlformats.org/presentationml/2006/main" xmlns:r="http://schemas.openxmlformats.org/officeDocument/2006/relationships">
   <p:cSld>
     <p:bg>
@@ -7368,7 +12620,7 @@
                 </a:solidFill>
                 <a:latin typeface="Lato"/>
               </a:rPr>
-              <a:t>11</a:t>
+              <a:t>15</a:t>
             </a:r>
           </a:p>
         </p:txBody>
@@ -8615,7 +13867,7 @@
                 </a:solidFill>
                 <a:latin typeface="Lato"/>
               </a:rPr>
-              <a:t>per slide 10: which tables and datasets exist for training and grounding, anonymisation approach, collection plan for the gaps.</a:t>
+              <a:t>per the data-readiness slide: which tables and datasets exist for training and grounding, anonymisation approach, collection plan for the gaps.</a:t>
             </a:r>
           </a:p>
         </p:txBody>
@@ -8841,7 +14093,7 @@
 </p:sld>
 </file>
 
-<file path=ppt/slides/slide13.xml><?xml version="1.0" encoding="utf-8"?>
+<file path=ppt/slides/slide17.xml><?xml version="1.0" encoding="utf-8"?>
 <p:sld xmlns:a="http://schemas.openxmlformats.org/drawingml/2006/main" xmlns:p="http://schemas.openxmlformats.org/presentationml/2006/main" xmlns:r="http://schemas.openxmlformats.org/officeDocument/2006/relationships">
   <p:cSld>
     <p:bg>
@@ -9293,7 +14545,7 @@
                 </a:solidFill>
                 <a:latin typeface="Lato"/>
               </a:rPr>
-              <a:t>12</a:t>
+              <a:t>16</a:t>
             </a:r>
           </a:p>
         </p:txBody>
@@ -9585,7 +14837,7 @@
                 </a:solidFill>
                 <a:latin typeface="Lato"/>
               </a:rPr>
-              <a:t>(slide 12). Use case 5 delivered inside FEEL Assist.</a:t>
+              <a:t>(delivery-sequence slide). Use case 5 delivered inside FEEL Assist.</a:t>
             </a:r>
           </a:p>
         </p:txBody>
@@ -10005,7 +15257,7 @@
                 </a:solidFill>
                 <a:latin typeface="Lato"/>
               </a:rPr>
-              <a:t>and gap list (slide 10) as a tracked workstream.</a:t>
+              <a:t>and gap list (data-readiness slide) as a tracked workstream.</a:t>
             </a:r>
           </a:p>
         </p:txBody>
@@ -10263,7 +15515,7 @@
 </p:sld>
 </file>
 
-<file path=ppt/slides/slide14.xml><?xml version="1.0" encoding="utf-8"?>
+<file path=ppt/slides/slide18.xml><?xml version="1.0" encoding="utf-8"?>
 <p:sld xmlns:a="http://schemas.openxmlformats.org/drawingml/2006/main" xmlns:p="http://schemas.openxmlformats.org/presentationml/2006/main" xmlns:r="http://schemas.openxmlformats.org/officeDocument/2006/relationships">
   <p:cSld>
     <p:bg>
@@ -14729,7 +19981,7 @@
                 </a:solidFill>
                 <a:latin typeface="Lato"/>
               </a:rPr>
-              <a:t>AI Reports </a:t>
+              <a:t>Policy Copilot </a:t>
             </a:r>
             <a:r>
               <a:rPr sz="2000" b="1" i="0">
@@ -14738,7 +19990,7 @@
                 </a:solidFill>
                 <a:latin typeface="Lato"/>
               </a:rPr>
-              <a:t>— Governed Semantic Layer, Not Raw NL-to-SQL</a:t>
+              <a:t>— How It Looks</a:t>
             </a:r>
           </a:p>
         </p:txBody>
@@ -14997,21 +20249,19 @@
         </p:nvSpPr>
         <p:spPr>
           <a:xfrm>
-            <a:off x="457200" y="969264"/>
-            <a:ext cx="9921240" cy="749808"/>
+            <a:off x="457200" y="1024128"/>
+            <a:ext cx="3063240" cy="292608"/>
           </a:xfrm>
           <a:prstGeom prst="roundRect">
             <a:avLst>
-              <a:gd name="adj" fmla="val 18000"/>
+              <a:gd name="adj" fmla="val 50000"/>
             </a:avLst>
           </a:prstGeom>
           <a:solidFill>
-            <a:srgbClr val="EDF2FF"/>
+            <a:srgbClr val="FDBA23"/>
           </a:solidFill>
-          <a:ln w="9525">
-            <a:solidFill>
-              <a:srgbClr val="3B7EF6"/>
-            </a:solidFill>
+          <a:ln>
+            <a:noFill/>
           </a:ln>
           <a:effectLst/>
         </p:spPr>
@@ -15045,8 +20295,8 @@
         </p:nvSpPr>
         <p:spPr>
           <a:xfrm>
-            <a:off x="658368" y="969264"/>
-            <a:ext cx="9518904" cy="749808"/>
+            <a:off x="457200" y="1074420"/>
+            <a:ext cx="3063240" cy="228600"/>
           </a:xfrm>
           <a:prstGeom prst="rect">
             <a:avLst/>
@@ -15054,26 +20304,27 @@
           <a:noFill/>
         </p:spPr>
         <p:txBody>
-          <a:bodyPr wrap="square" lIns="0" rIns="0" anchor="ctr">
+          <a:bodyPr wrap="square" lIns="0" rIns="0" tIns="0" bIns="0">
             <a:spAutoFit/>
           </a:bodyPr>
           <a:lstStyle/>
           <a:p>
-            <a:r>
-              <a:rPr sz="1200" b="1" i="0">
-                <a:solidFill>
-                  <a:srgbClr val="1A214D"/>
-                </a:solidFill>
-                <a:latin typeface="Lato"/>
-              </a:rPr>
-              <a:t>Prompt-to-report is feasible — if we constrain it to a governed semantic layer. Raw NL-to-SQL fails on enterprise schemas.</a:t>
+            <a:pPr algn="ctr"/>
+            <a:r>
+              <a:rPr sz="1000" b="1" i="0">
+                <a:solidFill>
+                  <a:srgbClr val="1A214D"/>
+                </a:solidFill>
+                <a:latin typeface="Lato"/>
+              </a:rPr>
+              <a:t>ILLUSTRATIVE MOCKUP — SAMPLE DATA</a:t>
             </a:r>
           </a:p>
         </p:txBody>
       </p:sp>
       <p:pic>
         <p:nvPicPr>
-          <p:cNvPr id="15" name="Picture 14" descr="02-report-enquiry.png"/>
+          <p:cNvPr id="15" name="Picture 14" descr="mock-1-policy-copilot.png"/>
           <p:cNvPicPr>
             <a:picLocks noChangeAspect="1"/>
           </p:cNvPicPr>
@@ -15087,8 +20338,8 @@
         </p:blipFill>
         <p:spPr>
           <a:xfrm>
-            <a:off x="457200" y="1920240"/>
-            <a:ext cx="6675120" cy="3608737"/>
+            <a:off x="1843887" y="1818655"/>
+            <a:ext cx="8503920" cy="3906488"/>
           </a:xfrm>
           <a:prstGeom prst="rect">
             <a:avLst/>
@@ -15103,8 +20354,8 @@
         </p:nvSpPr>
         <p:spPr>
           <a:xfrm>
-            <a:off x="443484" y="1906524"/>
-            <a:ext cx="6702552" cy="3636168"/>
+            <a:off x="1830171" y="1804939"/>
+            <a:ext cx="8531352" cy="3933920"/>
           </a:xfrm>
           <a:prstGeom prst="roundRect">
             <a:avLst>
@@ -15149,8 +20400,8 @@
         </p:nvSpPr>
         <p:spPr>
           <a:xfrm>
-            <a:off x="457200" y="5592984"/>
-            <a:ext cx="6675120" cy="228600"/>
+            <a:off x="1843887" y="5816584"/>
+            <a:ext cx="8503920" cy="365760"/>
           </a:xfrm>
           <a:prstGeom prst="rect">
             <a:avLst/>
@@ -15165,541 +20416,13 @@
           <a:p>
             <a:pPr algn="l"/>
             <a:r>
-              <a:rPr sz="800" b="0" i="1">
-                <a:solidFill>
-                  <a:srgbClr val="1A214D"/>
-                </a:solidFill>
-                <a:latin typeface="Lato"/>
-              </a:rPr>
-              <a:t>Enquiry › Report Enquiry — today: pick a report type and date range. Target: ask in plain language, see SQL + chart.</a:t>
-            </a:r>
-          </a:p>
-        </p:txBody>
-      </p:sp>
-      <p:sp>
-        <p:nvSpPr>
-          <p:cNvPr id="18" name="Rounded Rectangle 17"/>
-          <p:cNvSpPr/>
-          <p:nvPr/>
-        </p:nvSpPr>
-        <p:spPr>
-          <a:xfrm>
-            <a:off x="7315200" y="1920240"/>
-            <a:ext cx="4206240" cy="1444752"/>
-          </a:xfrm>
-          <a:prstGeom prst="roundRect">
-            <a:avLst>
-              <a:gd name="adj" fmla="val 12000"/>
-            </a:avLst>
-          </a:prstGeom>
-          <a:solidFill>
-            <a:srgbClr val="FFFFFF"/>
-          </a:solidFill>
-          <a:ln w="9525">
-            <a:solidFill>
-              <a:srgbClr val="1A214D"/>
-            </a:solidFill>
-          </a:ln>
-          <a:effectLst/>
-        </p:spPr>
-        <p:style>
-          <a:lnRef idx="1">
-            <a:schemeClr val="accent1"/>
-          </a:lnRef>
-          <a:fillRef idx="3">
-            <a:schemeClr val="accent1"/>
-          </a:fillRef>
-          <a:effectRef idx="0">
-            <a:schemeClr val="accent1"/>
-          </a:effectRef>
-          <a:fontRef idx="minor">
-            <a:schemeClr val="lt1"/>
-          </a:fontRef>
-        </p:style>
-        <p:txBody>
-          <a:bodyPr rtlCol="0" anchor="ctr"/>
-          <a:lstStyle/>
-          <a:p>
-            <a:pPr algn="ctr"/>
-          </a:p>
-        </p:txBody>
-      </p:sp>
-      <p:sp>
-        <p:nvSpPr>
-          <p:cNvPr id="19" name="TextBox 18"/>
-          <p:cNvSpPr txBox="1"/>
-          <p:nvPr/>
-        </p:nvSpPr>
-        <p:spPr>
-          <a:xfrm>
-            <a:off x="7461504" y="2029968"/>
-            <a:ext cx="3913631" cy="274320"/>
-          </a:xfrm>
-          <a:prstGeom prst="rect">
-            <a:avLst/>
-          </a:prstGeom>
-          <a:noFill/>
-        </p:spPr>
-        <p:txBody>
-          <a:bodyPr wrap="square" lIns="0" rIns="0" tIns="0" bIns="0">
-            <a:spAutoFit/>
-          </a:bodyPr>
-          <a:lstStyle/>
-          <a:p>
-            <a:pPr algn="l"/>
-            <a:r>
-              <a:rPr sz="1100" b="1" i="0">
-                <a:solidFill>
-                  <a:srgbClr val="3B7EF6"/>
-                </a:solidFill>
-                <a:latin typeface="Lato"/>
-              </a:rPr>
-              <a:t>Requirement · prompt → SQL  (20 Oct)</a:t>
-            </a:r>
-          </a:p>
-        </p:txBody>
-      </p:sp>
-      <p:sp>
-        <p:nvSpPr>
-          <p:cNvPr id="20" name="TextBox 19"/>
-          <p:cNvSpPr txBox="1"/>
-          <p:nvPr/>
-        </p:nvSpPr>
-        <p:spPr>
-          <a:xfrm>
-            <a:off x="7461504" y="2340864"/>
-            <a:ext cx="3913631" cy="914400"/>
-          </a:xfrm>
-          <a:prstGeom prst="rect">
-            <a:avLst/>
-          </a:prstGeom>
-          <a:noFill/>
-        </p:spPr>
-        <p:txBody>
-          <a:bodyPr wrap="square" lIns="0" rIns="0" tIns="0">
-            <a:spAutoFit/>
-          </a:bodyPr>
-          <a:lstStyle/>
-          <a:p>
-            <a:pPr>
-              <a:spcAft>
-                <a:spcPts val="300"/>
-              </a:spcAft>
-            </a:pPr>
-            <a:r>
-              <a:rPr sz="900" b="1" i="0">
-                <a:solidFill>
-                  <a:srgbClr val="1A214D"/>
-                </a:solidFill>
-                <a:latin typeface="Lato"/>
-              </a:rPr>
-              <a:t>Ask in plain language; </a:t>
-            </a:r>
-            <a:r>
-              <a:rPr sz="900" b="0" i="0">
-                <a:solidFill>
-                  <a:srgbClr val="1A214D"/>
-                </a:solidFill>
-                <a:latin typeface="Lato"/>
-              </a:rPr>
-              <a:t>the system queries the database and returns the generated SQL with a visualization.</a:t>
-            </a:r>
-          </a:p>
-          <a:p>
-            <a:pPr>
-              <a:spcAft>
-                <a:spcPts val="300"/>
-              </a:spcAft>
-            </a:pPr>
-            <a:r>
-              <a:rPr sz="900" b="1" i="0">
-                <a:solidFill>
-                  <a:srgbClr val="1A214D"/>
-                </a:solidFill>
-                <a:latin typeface="Lato"/>
-              </a:rPr>
-              <a:t>MCP: </a:t>
-            </a:r>
-            <a:r>
-              <a:rPr sz="900" b="0" i="0">
-                <a:solidFill>
-                  <a:srgbClr val="1A214D"/>
-                </a:solidFill>
-                <a:latin typeface="Lato"/>
-              </a:rPr>
-              <a:t>Cathal — expose the capability to the bank through MCP.</a:t>
-            </a:r>
-          </a:p>
-        </p:txBody>
-      </p:sp>
-      <p:sp>
-        <p:nvSpPr>
-          <p:cNvPr id="21" name="Rounded Rectangle 20"/>
-          <p:cNvSpPr/>
-          <p:nvPr/>
-        </p:nvSpPr>
-        <p:spPr>
-          <a:xfrm>
-            <a:off x="7315200" y="3456432"/>
-            <a:ext cx="4206240" cy="1353312"/>
-          </a:xfrm>
-          <a:prstGeom prst="roundRect">
-            <a:avLst>
-              <a:gd name="adj" fmla="val 12000"/>
-            </a:avLst>
-          </a:prstGeom>
-          <a:solidFill>
-            <a:srgbClr val="FFFFFF"/>
-          </a:solidFill>
-          <a:ln w="9525">
-            <a:solidFill>
-              <a:srgbClr val="1A214D"/>
-            </a:solidFill>
-          </a:ln>
-          <a:effectLst/>
-        </p:spPr>
-        <p:style>
-          <a:lnRef idx="1">
-            <a:schemeClr val="accent1"/>
-          </a:lnRef>
-          <a:fillRef idx="3">
-            <a:schemeClr val="accent1"/>
-          </a:fillRef>
-          <a:effectRef idx="0">
-            <a:schemeClr val="accent1"/>
-          </a:effectRef>
-          <a:fontRef idx="minor">
-            <a:schemeClr val="lt1"/>
-          </a:fontRef>
-        </p:style>
-        <p:txBody>
-          <a:bodyPr rtlCol="0" anchor="ctr"/>
-          <a:lstStyle/>
-          <a:p>
-            <a:pPr algn="ctr"/>
-          </a:p>
-        </p:txBody>
-      </p:sp>
-      <p:sp>
-        <p:nvSpPr>
-          <p:cNvPr id="22" name="TextBox 21"/>
-          <p:cNvSpPr txBox="1"/>
-          <p:nvPr/>
-        </p:nvSpPr>
-        <p:spPr>
-          <a:xfrm>
-            <a:off x="7461504" y="3566160"/>
-            <a:ext cx="3913631" cy="274320"/>
-          </a:xfrm>
-          <a:prstGeom prst="rect">
-            <a:avLst/>
-          </a:prstGeom>
-          <a:noFill/>
-        </p:spPr>
-        <p:txBody>
-          <a:bodyPr wrap="square" lIns="0" rIns="0" tIns="0" bIns="0">
-            <a:spAutoFit/>
-          </a:bodyPr>
-          <a:lstStyle/>
-          <a:p>
-            <a:pPr algn="l"/>
-            <a:r>
-              <a:rPr sz="1100" b="1" i="0">
-                <a:solidFill>
-                  <a:srgbClr val="3B7EF6"/>
-                </a:solidFill>
-                <a:latin typeface="Lato"/>
-              </a:rPr>
-              <a:t>Market reality check</a:t>
-            </a:r>
-          </a:p>
-        </p:txBody>
-      </p:sp>
-      <p:sp>
-        <p:nvSpPr>
-          <p:cNvPr id="23" name="TextBox 22"/>
-          <p:cNvSpPr txBox="1"/>
-          <p:nvPr/>
-        </p:nvSpPr>
-        <p:spPr>
-          <a:xfrm>
-            <a:off x="7461504" y="3877056"/>
-            <a:ext cx="3913631" cy="822960"/>
-          </a:xfrm>
-          <a:prstGeom prst="rect">
-            <a:avLst/>
-          </a:prstGeom>
-          <a:noFill/>
-        </p:spPr>
-        <p:txBody>
-          <a:bodyPr wrap="square" lIns="0" rIns="0" tIns="0">
-            <a:spAutoFit/>
-          </a:bodyPr>
-          <a:lstStyle/>
-          <a:p>
-            <a:pPr>
-              <a:spcAft>
-                <a:spcPts val="300"/>
-              </a:spcAft>
-            </a:pPr>
-            <a:r>
-              <a:rPr sz="900" b="1" i="0">
-                <a:solidFill>
-                  <a:srgbClr val="1A214D"/>
-                </a:solidFill>
-                <a:latin typeface="Lato"/>
-              </a:rPr>
-              <a:t>≈80% </a:t>
-            </a:r>
-            <a:r>
-              <a:rPr sz="900" b="0" i="0">
-                <a:solidFill>
-                  <a:srgbClr val="1A214D"/>
-                </a:solidFill>
-                <a:latin typeface="Lato"/>
-              </a:rPr>
-              <a:t>on academic leaderboards (BIRD) — but on real enterprise warehouses:</a:t>
-            </a:r>
-          </a:p>
-          <a:p>
-            <a:pPr>
-              <a:spcAft>
-                <a:spcPts val="300"/>
-              </a:spcAft>
-            </a:pPr>
-            <a:r>
-              <a:rPr sz="900" b="1" i="0">
-                <a:solidFill>
-                  <a:srgbClr val="1A214D"/>
-                </a:solidFill>
-                <a:latin typeface="Lato"/>
-              </a:rPr>
-              <a:t>10.8% </a:t>
-            </a:r>
-            <a:r>
-              <a:rPr sz="900" b="0" i="0">
-                <a:solidFill>
-                  <a:srgbClr val="1A214D"/>
-                </a:solidFill>
-                <a:latin typeface="Lato"/>
-              </a:rPr>
-              <a:t>execution accuracy (BEAVER, GPT-5.2 agents)</a:t>
-            </a:r>
-          </a:p>
-          <a:p>
-            <a:pPr>
-              <a:spcAft>
-                <a:spcPts val="300"/>
-              </a:spcAft>
-            </a:pPr>
-            <a:r>
-              <a:rPr sz="900" b="1" i="0">
-                <a:solidFill>
-                  <a:srgbClr val="1A214D"/>
-                </a:solidFill>
-                <a:latin typeface="Lato"/>
-              </a:rPr>
-              <a:t>21.3% </a:t>
-            </a:r>
-            <a:r>
-              <a:rPr sz="900" b="0" i="0">
-                <a:solidFill>
-                  <a:srgbClr val="1A214D"/>
-                </a:solidFill>
-                <a:latin typeface="Lato"/>
-              </a:rPr>
-              <a:t>on Spider 2.0 vs 91.2% on Spider 1.0. The schema is the bottleneck, not the model.</a:t>
-            </a:r>
-          </a:p>
-        </p:txBody>
-      </p:sp>
-      <p:sp>
-        <p:nvSpPr>
-          <p:cNvPr id="24" name="Rounded Rectangle 23"/>
-          <p:cNvSpPr/>
-          <p:nvPr/>
-        </p:nvSpPr>
-        <p:spPr>
-          <a:xfrm>
-            <a:off x="7315200" y="4901184"/>
-            <a:ext cx="4206240" cy="1362456"/>
-          </a:xfrm>
-          <a:prstGeom prst="roundRect">
-            <a:avLst>
-              <a:gd name="adj" fmla="val 12000"/>
-            </a:avLst>
-          </a:prstGeom>
-          <a:solidFill>
-            <a:srgbClr val="FFFFFF"/>
-          </a:solidFill>
-          <a:ln w="9525">
-            <a:solidFill>
-              <a:srgbClr val="1A214D"/>
-            </a:solidFill>
-          </a:ln>
-          <a:effectLst/>
-        </p:spPr>
-        <p:style>
-          <a:lnRef idx="1">
-            <a:schemeClr val="accent1"/>
-          </a:lnRef>
-          <a:fillRef idx="3">
-            <a:schemeClr val="accent1"/>
-          </a:fillRef>
-          <a:effectRef idx="0">
-            <a:schemeClr val="accent1"/>
-          </a:effectRef>
-          <a:fontRef idx="minor">
-            <a:schemeClr val="lt1"/>
-          </a:fontRef>
-        </p:style>
-        <p:txBody>
-          <a:bodyPr rtlCol="0" anchor="ctr"/>
-          <a:lstStyle/>
-          <a:p>
-            <a:pPr algn="ctr"/>
-          </a:p>
-        </p:txBody>
-      </p:sp>
-      <p:sp>
-        <p:nvSpPr>
-          <p:cNvPr id="25" name="TextBox 24"/>
-          <p:cNvSpPr txBox="1"/>
-          <p:nvPr/>
-        </p:nvSpPr>
-        <p:spPr>
-          <a:xfrm>
-            <a:off x="7461504" y="5010912"/>
-            <a:ext cx="3913631" cy="274320"/>
-          </a:xfrm>
-          <a:prstGeom prst="rect">
-            <a:avLst/>
-          </a:prstGeom>
-          <a:noFill/>
-        </p:spPr>
-        <p:txBody>
-          <a:bodyPr wrap="square" lIns="0" rIns="0" tIns="0" bIns="0">
-            <a:spAutoFit/>
-          </a:bodyPr>
-          <a:lstStyle/>
-          <a:p>
-            <a:pPr algn="l"/>
-            <a:r>
-              <a:rPr sz="1100" b="1" i="0">
-                <a:solidFill>
-                  <a:srgbClr val="3B7EF6"/>
-                </a:solidFill>
-                <a:latin typeface="Lato"/>
-              </a:rPr>
-              <a:t>Hypothesis &amp; gate</a:t>
-            </a:r>
-          </a:p>
-        </p:txBody>
-      </p:sp>
-      <p:sp>
-        <p:nvSpPr>
-          <p:cNvPr id="26" name="TextBox 25"/>
-          <p:cNvSpPr txBox="1"/>
-          <p:nvPr/>
-        </p:nvSpPr>
-        <p:spPr>
-          <a:xfrm>
-            <a:off x="7461504" y="5321808"/>
-            <a:ext cx="3913631" cy="832104"/>
-          </a:xfrm>
-          <a:prstGeom prst="rect">
-            <a:avLst/>
-          </a:prstGeom>
-          <a:noFill/>
-        </p:spPr>
-        <p:txBody>
-          <a:bodyPr wrap="square" lIns="0" rIns="0" tIns="0">
-            <a:spAutoFit/>
-          </a:bodyPr>
-          <a:lstStyle/>
-          <a:p>
-            <a:pPr>
-              <a:spcAft>
-                <a:spcPts val="300"/>
-              </a:spcAft>
-            </a:pPr>
-            <a:r>
-              <a:rPr sz="900" b="1" i="0">
-                <a:solidFill>
-                  <a:srgbClr val="1A214D"/>
-                </a:solidFill>
-                <a:latin typeface="Lato"/>
-              </a:rPr>
-              <a:t>Constrain: </a:t>
-            </a:r>
-            <a:r>
-              <a:rPr sz="900" b="0" i="0">
-                <a:solidFill>
-                  <a:srgbClr val="1A214D"/>
-                </a:solidFill>
-                <a:latin typeface="Lato"/>
-              </a:rPr>
-              <a:t>curated reporting views + the report types already in Report Enquiry; SQL always visible; read-only replica.</a:t>
-            </a:r>
-          </a:p>
-          <a:p>
-            <a:pPr>
-              <a:spcAft>
-                <a:spcPts val="300"/>
-              </a:spcAft>
-            </a:pPr>
-            <a:r>
-              <a:rPr sz="900" b="1" i="0">
-                <a:solidFill>
-                  <a:srgbClr val="1A214D"/>
-                </a:solidFill>
-                <a:latin typeface="Lato"/>
-              </a:rPr>
-              <a:t>Gate: </a:t>
-            </a:r>
-            <a:r>
-              <a:rPr sz="900" b="0" i="0">
-                <a:solidFill>
-                  <a:srgbClr val="1A214D"/>
-                </a:solidFill>
-                <a:latin typeface="Lato"/>
-              </a:rPr>
-              <a:t>top report intents validated against analyst-written SQL before free-form prompts unlock. MCP serves the same governed layer — never raw tables.</a:t>
-            </a:r>
-          </a:p>
-        </p:txBody>
-      </p:sp>
-      <p:sp>
-        <p:nvSpPr>
-          <p:cNvPr id="27" name="TextBox 26"/>
-          <p:cNvSpPr txBox="1"/>
-          <p:nvPr/>
-        </p:nvSpPr>
-        <p:spPr>
-          <a:xfrm>
-            <a:off x="457200" y="6336792"/>
-            <a:ext cx="10515600" cy="164592"/>
-          </a:xfrm>
-          <a:prstGeom prst="rect">
-            <a:avLst/>
-          </a:prstGeom>
-          <a:noFill/>
-        </p:spPr>
-        <p:txBody>
-          <a:bodyPr wrap="square" lIns="0" rIns="0" tIns="0" bIns="0">
-            <a:spAutoFit/>
-          </a:bodyPr>
-          <a:lstStyle/>
-          <a:p>
-            <a:pPr algn="l"/>
-            <a:r>
-              <a:rPr sz="700" b="0" i="1">
-                <a:solidFill>
-                  <a:srgbClr val="1A214D"/>
-                </a:solidFill>
-                <a:latin typeface="Lato"/>
-              </a:rPr>
-              <a:t>Sources: BEAVER (arXiv 2409.02038) · Spider 2.0 (ICLR 2025) · BIRD leaderboard (Gemini-SQL2 80.04%)</a:t>
+              <a:rPr sz="900" b="0" i="1">
+                <a:solidFill>
+                  <a:srgbClr val="1A214D"/>
+                </a:solidFill>
+                <a:latin typeface="Lato"/>
+              </a:rPr>
+              <a:t>Copilot drawer in Credit Decision › Strategies — plain-language prompt, AI checklist of the proposed changes, deterministic back-test on past applications, then submission as a Maker request.</a:t>
             </a:r>
           </a:p>
         </p:txBody>
@@ -15909,7 +20632,7 @@
                 </a:solidFill>
                 <a:latin typeface="Lato"/>
               </a:rPr>
-              <a:t>Document Validation </a:t>
+              <a:t>AI Reports </a:t>
             </a:r>
             <a:r>
               <a:rPr sz="2000" b="1" i="0">
@@ -15918,7 +20641,7 @@
                 </a:solidFill>
                 <a:latin typeface="Lato"/>
               </a:rPr>
-              <a:t>— Checkers Review Exceptions, Not Everything</a:t>
+              <a:t>— Governed Semantic Layer, Not Raw NL-to-SQL</a:t>
             </a:r>
           </a:p>
         </p:txBody>
@@ -16246,14 +20969,14 @@
                 </a:solidFill>
                 <a:latin typeface="Lato"/>
               </a:rPr>
-              <a:t>AI pre-checks every document so checkers spend their time on exceptions — not on 100% review.</a:t>
+              <a:t>Prompt-to-report is feasible — if we constrain it to a governed semantic layer. Raw NL-to-SQL fails on enterprise schemas.</a:t>
             </a:r>
           </a:p>
         </p:txBody>
       </p:sp>
       <p:pic>
         <p:nvPicPr>
-          <p:cNvPr id="15" name="Picture 14" descr="05-document-setup.png"/>
+          <p:cNvPr id="15" name="Picture 14" descr="02-report-enquiry.png"/>
           <p:cNvPicPr>
             <a:picLocks noChangeAspect="1"/>
           </p:cNvPicPr>
@@ -16351,7 +21074,7 @@
                 </a:solidFill>
                 <a:latin typeface="Lato"/>
               </a:rPr>
-              <a:t>Document Management › Document Set Up — mandatory documents are already modelled per product and journey.</a:t>
+              <a:t>Enquiry › Report Enquiry — today: pick a report type and date range. Target: ask in plain language, see SQL + chart.</a:t>
             </a:r>
           </a:p>
         </p:txBody>
@@ -16434,7 +21157,7 @@
                 </a:solidFill>
                 <a:latin typeface="Lato"/>
               </a:rPr>
-              <a:t>Requirement · doc comparison  (20 Oct)</a:t>
+              <a:t>Requirement · prompt → SQL  (20 Oct)</a:t>
             </a:r>
           </a:p>
         </p:txBody>
@@ -16473,7 +21196,7 @@
                 </a:solidFill>
                 <a:latin typeface="Lato"/>
               </a:rPr>
-              <a:t>Validate documents </a:t>
+              <a:t>Ask in plain language; </a:t>
             </a:r>
             <a:r>
               <a:rPr sz="900" b="0" i="0">
@@ -16482,7 +21205,32 @@
                 </a:solidFill>
                 <a:latin typeface="Lato"/>
               </a:rPr>
-              <a:t>in the new Document setup module — security cheques, source-of-income proofs, clearance letters — against application data before ops review.</a:t>
+              <a:t>the system queries the database and returns the generated SQL with a visualization.</a:t>
+            </a:r>
+          </a:p>
+          <a:p>
+            <a:pPr>
+              <a:spcAft>
+                <a:spcPts val="300"/>
+              </a:spcAft>
+            </a:pPr>
+            <a:r>
+              <a:rPr sz="900" b="1" i="0">
+                <a:solidFill>
+                  <a:srgbClr val="1A214D"/>
+                </a:solidFill>
+                <a:latin typeface="Lato"/>
+              </a:rPr>
+              <a:t>MCP: </a:t>
+            </a:r>
+            <a:r>
+              <a:rPr sz="900" b="0" i="0">
+                <a:solidFill>
+                  <a:srgbClr val="1A214D"/>
+                </a:solidFill>
+                <a:latin typeface="Lato"/>
+              </a:rPr>
+              <a:t>Cathal — expose the capability to the bank through MCP.</a:t>
             </a:r>
           </a:p>
         </p:txBody>
@@ -16565,7 +21313,7 @@
                 </a:solidFill>
                 <a:latin typeface="Lato"/>
               </a:rPr>
-              <a:t>Market base</a:t>
+              <a:t>Market reality check</a:t>
             </a:r>
           </a:p>
         </p:txBody>
@@ -16604,7 +21352,7 @@
                 </a:solidFill>
                 <a:latin typeface="Lato"/>
               </a:rPr>
-              <a:t>Ocrolus: </a:t>
+              <a:t>≈80% </a:t>
             </a:r>
             <a:r>
               <a:rPr sz="900" b="0" i="0">
@@ -16613,7 +21361,7 @@
                 </a:solidFill>
                 <a:latin typeface="Lato"/>
               </a:rPr>
-              <a:t>classifies &amp; analyses 1,150+ financial document types with fraud-signal detection (vendor).</a:t>
+              <a:t>on academic leaderboards (BIRD) — but on real enterprise warehouses:</a:t>
             </a:r>
           </a:p>
           <a:p>
@@ -16629,7 +21377,7 @@
                 </a:solidFill>
                 <a:latin typeface="Lato"/>
               </a:rPr>
-              <a:t>Informed.IQ: </a:t>
+              <a:t>10.8% </a:t>
             </a:r>
             <a:r>
               <a:rPr sz="900" b="0" i="0">
@@ -16638,7 +21386,32 @@
                 </a:solidFill>
                 <a:latin typeface="Lato"/>
               </a:rPr>
-              <a:t>automated stip verification; works with 7 of the top-10 US auto lenders (company-reported).</a:t>
+              <a:t>execution accuracy (BEAVER, GPT-5.2 agents)</a:t>
+            </a:r>
+          </a:p>
+          <a:p>
+            <a:pPr>
+              <a:spcAft>
+                <a:spcPts val="300"/>
+              </a:spcAft>
+            </a:pPr>
+            <a:r>
+              <a:rPr sz="900" b="1" i="0">
+                <a:solidFill>
+                  <a:srgbClr val="1A214D"/>
+                </a:solidFill>
+                <a:latin typeface="Lato"/>
+              </a:rPr>
+              <a:t>21.3% </a:t>
+            </a:r>
+            <a:r>
+              <a:rPr sz="900" b="0" i="0">
+                <a:solidFill>
+                  <a:srgbClr val="1A214D"/>
+                </a:solidFill>
+                <a:latin typeface="Lato"/>
+              </a:rPr>
+              <a:t>on Spider 2.0 vs 91.2% on Spider 1.0. The schema is the bottleneck, not the model.</a:t>
             </a:r>
           </a:p>
         </p:txBody>
@@ -16721,7 +21494,7 @@
                 </a:solidFill>
                 <a:latin typeface="Lato"/>
               </a:rPr>
-              <a:t>Feasibility &amp; gate</a:t>
+              <a:t>Hypothesis &amp; gate</a:t>
             </a:r>
           </a:p>
         </p:txBody>
@@ -16760,7 +21533,7 @@
                 </a:solidFill>
                 <a:latin typeface="Lato"/>
               </a:rPr>
-              <a:t>Task: </a:t>
+              <a:t>Constrain: </a:t>
             </a:r>
             <a:r>
               <a:rPr sz="900" b="0" i="0">
@@ -16769,7 +21542,7 @@
                 </a:solidFill>
                 <a:latin typeface="Lato"/>
               </a:rPr>
-              <a:t>extract fields, compare to the application (amount, names, IBAN, dates), flag missing or inconsistent items into the ops Maker queue.</a:t>
+              <a:t>curated reporting views + the report types already in Report Enquiry; SQL always visible; read-only replica.</a:t>
             </a:r>
           </a:p>
           <a:p>
@@ -16785,7 +21558,7 @@
                 </a:solidFill>
                 <a:latin typeface="Lato"/>
               </a:rPr>
-              <a:t>Dependency: </a:t>
+              <a:t>Gate: </a:t>
             </a:r>
             <a:r>
               <a:rPr sz="900" b="0" i="0">
@@ -16794,7 +21567,7 @@
                 </a:solidFill>
                 <a:latin typeface="Lato"/>
               </a:rPr>
-              <a:t>labelled document samples — the largest data gap. Gate: model agrees with checker verdicts on a labelled pilot set.</a:t>
+              <a:t>top report intents validated against analyst-written SQL before free-form prompts unlock. MCP serves the same governed layer — never raw tables.</a:t>
             </a:r>
           </a:p>
         </p:txBody>
@@ -16829,7 +21602,7 @@
                 </a:solidFill>
                 <a:latin typeface="Lato"/>
               </a:rPr>
-              <a:t>Sources: Ocrolus (vendor) · Informed.IQ (company-reported)</a:t>
+              <a:t>Sources: BEAVER (arXiv 2409.02038) · Spider 2.0 (ICLR 2025) · BIRD leaderboard (Gemini-SQL2 80.04%)</a:t>
             </a:r>
           </a:p>
         </p:txBody>
@@ -17039,7 +21812,7 @@
                 </a:solidFill>
                 <a:latin typeface="Lato"/>
               </a:rPr>
-              <a:t>FEEL Assist </a:t>
+              <a:t>AI Reports </a:t>
             </a:r>
             <a:r>
               <a:rPr sz="2000" b="1" i="0">
@@ -17048,7 +21821,7 @@
                 </a:solidFill>
                 <a:latin typeface="Lato"/>
               </a:rPr>
-              <a:t>— The Fastest Win On The List</a:t>
+              <a:t>— How It Looks</a:t>
             </a:r>
           </a:p>
         </p:txBody>
@@ -17307,21 +22080,19 @@
         </p:nvSpPr>
         <p:spPr>
           <a:xfrm>
-            <a:off x="457200" y="969264"/>
-            <a:ext cx="9921240" cy="749808"/>
+            <a:off x="457200" y="1024128"/>
+            <a:ext cx="3063240" cy="292608"/>
           </a:xfrm>
           <a:prstGeom prst="roundRect">
             <a:avLst>
-              <a:gd name="adj" fmla="val 18000"/>
+              <a:gd name="adj" fmla="val 50000"/>
             </a:avLst>
           </a:prstGeom>
           <a:solidFill>
-            <a:srgbClr val="EDF2FF"/>
+            <a:srgbClr val="FDBA23"/>
           </a:solidFill>
-          <a:ln w="9525">
-            <a:solidFill>
-              <a:srgbClr val="3B7EF6"/>
-            </a:solidFill>
+          <a:ln>
+            <a:noFill/>
           </a:ln>
           <a:effectLst/>
         </p:spPr>
@@ -17355,8 +22126,8 @@
         </p:nvSpPr>
         <p:spPr>
           <a:xfrm>
-            <a:off x="658368" y="969264"/>
-            <a:ext cx="9518904" cy="749808"/>
+            <a:off x="457200" y="1074420"/>
+            <a:ext cx="3063240" cy="228600"/>
           </a:xfrm>
           <a:prstGeom prst="rect">
             <a:avLst/>
@@ -17364,26 +22135,27 @@
           <a:noFill/>
         </p:spPr>
         <p:txBody>
-          <a:bodyPr wrap="square" lIns="0" rIns="0" anchor="ctr">
+          <a:bodyPr wrap="square" lIns="0" rIns="0" tIns="0" bIns="0">
             <a:spAutoFit/>
           </a:bodyPr>
           <a:lstStyle/>
           <a:p>
-            <a:r>
-              <a:rPr sz="1200" b="1" i="0">
-                <a:solidFill>
-                  <a:srgbClr val="1A214D"/>
-                </a:solidFill>
-                <a:latin typeface="Lato"/>
-              </a:rPr>
-              <a:t>The fastest win: FEEL has a formal grammar, a built-in validator — and users who struggle with it today.</a:t>
+            <a:pPr algn="ctr"/>
+            <a:r>
+              <a:rPr sz="1000" b="1" i="0">
+                <a:solidFill>
+                  <a:srgbClr val="1A214D"/>
+                </a:solidFill>
+                <a:latin typeface="Lato"/>
+              </a:rPr>
+              <a:t>ILLUSTRATIVE MOCKUP — SAMPLE DATA</a:t>
             </a:r>
           </a:p>
         </p:txBody>
       </p:sp>
       <p:pic>
         <p:nvPicPr>
-          <p:cNvPr id="15" name="Picture 14" descr="04-calculated-variable.png"/>
+          <p:cNvPr id="15" name="Picture 14" descr="mock-2-ai-reports.png"/>
           <p:cNvPicPr>
             <a:picLocks noChangeAspect="1"/>
           </p:cNvPicPr>
@@ -17397,8 +22169,8 @@
         </p:blipFill>
         <p:spPr>
           <a:xfrm>
-            <a:off x="457200" y="1920240"/>
-            <a:ext cx="6675120" cy="3608737"/>
+            <a:off x="2322744" y="1531619"/>
+            <a:ext cx="7546206" cy="4480560"/>
           </a:xfrm>
           <a:prstGeom prst="rect">
             <a:avLst/>
@@ -17413,8 +22185,8 @@
         </p:nvSpPr>
         <p:spPr>
           <a:xfrm>
-            <a:off x="443484" y="1906524"/>
-            <a:ext cx="6702552" cy="3636168"/>
+            <a:off x="2309028" y="1517904"/>
+            <a:ext cx="7573638" cy="4507992"/>
           </a:xfrm>
           <a:prstGeom prst="roundRect">
             <a:avLst>
@@ -17459,8 +22231,8 @@
         </p:nvSpPr>
         <p:spPr>
           <a:xfrm>
-            <a:off x="457200" y="5592984"/>
-            <a:ext cx="6675120" cy="228600"/>
+            <a:off x="2322744" y="6103620"/>
+            <a:ext cx="7546206" cy="365760"/>
           </a:xfrm>
           <a:prstGeom prst="rect">
             <a:avLst/>
@@ -17475,516 +22247,13 @@
           <a:p>
             <a:pPr algn="l"/>
             <a:r>
-              <a:rPr sz="800" b="0" i="1">
-                <a:solidFill>
-                  <a:srgbClr val="1A214D"/>
-                </a:solidFill>
-                <a:latin typeface="Lato"/>
-              </a:rPr>
-              <a:t>Limit Assignment › Calculated Variable — DBR, MUEx, Max Eligibility: the formulas users build by hand today.</a:t>
-            </a:r>
-          </a:p>
-        </p:txBody>
-      </p:sp>
-      <p:sp>
-        <p:nvSpPr>
-          <p:cNvPr id="18" name="Rounded Rectangle 17"/>
-          <p:cNvSpPr/>
-          <p:nvPr/>
-        </p:nvSpPr>
-        <p:spPr>
-          <a:xfrm>
-            <a:off x="7315200" y="1920240"/>
-            <a:ext cx="4206240" cy="1444752"/>
-          </a:xfrm>
-          <a:prstGeom prst="roundRect">
-            <a:avLst>
-              <a:gd name="adj" fmla="val 12000"/>
-            </a:avLst>
-          </a:prstGeom>
-          <a:solidFill>
-            <a:srgbClr val="FFFFFF"/>
-          </a:solidFill>
-          <a:ln w="9525">
-            <a:solidFill>
-              <a:srgbClr val="1A214D"/>
-            </a:solidFill>
-          </a:ln>
-          <a:effectLst/>
-        </p:spPr>
-        <p:style>
-          <a:lnRef idx="1">
-            <a:schemeClr val="accent1"/>
-          </a:lnRef>
-          <a:fillRef idx="3">
-            <a:schemeClr val="accent1"/>
-          </a:fillRef>
-          <a:effectRef idx="0">
-            <a:schemeClr val="accent1"/>
-          </a:effectRef>
-          <a:fontRef idx="minor">
-            <a:schemeClr val="lt1"/>
-          </a:fontRef>
-        </p:style>
-        <p:txBody>
-          <a:bodyPr rtlCol="0" anchor="ctr"/>
-          <a:lstStyle/>
-          <a:p>
-            <a:pPr algn="ctr"/>
-          </a:p>
-        </p:txBody>
-      </p:sp>
-      <p:sp>
-        <p:nvSpPr>
-          <p:cNvPr id="19" name="TextBox 18"/>
-          <p:cNvSpPr txBox="1"/>
-          <p:nvPr/>
-        </p:nvSpPr>
-        <p:spPr>
-          <a:xfrm>
-            <a:off x="7461504" y="2029968"/>
-            <a:ext cx="3913631" cy="274320"/>
-          </a:xfrm>
-          <a:prstGeom prst="rect">
-            <a:avLst/>
-          </a:prstGeom>
-          <a:noFill/>
-        </p:spPr>
-        <p:txBody>
-          <a:bodyPr wrap="square" lIns="0" rIns="0" tIns="0" bIns="0">
-            <a:spAutoFit/>
-          </a:bodyPr>
-          <a:lstStyle/>
-          <a:p>
-            <a:pPr algn="l"/>
-            <a:r>
-              <a:rPr sz="1100" b="1" i="0">
-                <a:solidFill>
-                  <a:srgbClr val="3B7EF6"/>
-                </a:solidFill>
-                <a:latin typeface="Lato"/>
-              </a:rPr>
-              <a:t>Requirement · prompt → FEEL  (20 Oct)</a:t>
-            </a:r>
-          </a:p>
-        </p:txBody>
-      </p:sp>
-      <p:sp>
-        <p:nvSpPr>
-          <p:cNvPr id="20" name="TextBox 19"/>
-          <p:cNvSpPr txBox="1"/>
-          <p:nvPr/>
-        </p:nvSpPr>
-        <p:spPr>
-          <a:xfrm>
-            <a:off x="7461504" y="2340864"/>
-            <a:ext cx="3913631" cy="914400"/>
-          </a:xfrm>
-          <a:prstGeom prst="rect">
-            <a:avLst/>
-          </a:prstGeom>
-          <a:noFill/>
-        </p:spPr>
-        <p:txBody>
-          <a:bodyPr wrap="square" lIns="0" rIns="0" tIns="0">
-            <a:spAutoFit/>
-          </a:bodyPr>
-          <a:lstStyle/>
-          <a:p>
-            <a:pPr>
-              <a:spcAft>
-                <a:spcPts val="300"/>
-              </a:spcAft>
-            </a:pPr>
-            <a:r>
-              <a:rPr sz="900" b="1" i="0">
-                <a:solidFill>
-                  <a:srgbClr val="1A214D"/>
-                </a:solidFill>
-                <a:latin typeface="Lato"/>
-              </a:rPr>
-              <a:t>Write FEEL formulas from a prompt </a:t>
-            </a:r>
-            <a:r>
-              <a:rPr sz="900" b="0" i="0">
-                <a:solidFill>
-                  <a:srgbClr val="1A214D"/>
-                </a:solidFill>
-                <a:latin typeface="Lato"/>
-              </a:rPr>
-              <a:t>in Limit Assignment › Calculated Variables — configuring them is too difficult for users today (Anto).</a:t>
-            </a:r>
-          </a:p>
-          <a:p>
-            <a:pPr>
-              <a:spcAft>
-                <a:spcPts val="300"/>
-              </a:spcAft>
-            </a:pPr>
-            <a:r>
-              <a:rPr sz="900" b="1" i="0">
-                <a:solidFill>
-                  <a:srgbClr val="1A214D"/>
-                </a:solidFill>
-                <a:latin typeface="Lato"/>
-              </a:rPr>
-              <a:t>Use case 5 folds in: </a:t>
-            </a:r>
-            <a:r>
-              <a:rPr sz="900" b="0" i="0">
-                <a:solidFill>
-                  <a:srgbClr val="1A214D"/>
-                </a:solidFill>
-                <a:latin typeface="Lato"/>
-              </a:rPr>
-              <a:t>create new Rule Engine variables with FEEL expressions.</a:t>
-            </a:r>
-          </a:p>
-        </p:txBody>
-      </p:sp>
-      <p:sp>
-        <p:nvSpPr>
-          <p:cNvPr id="21" name="Rounded Rectangle 20"/>
-          <p:cNvSpPr/>
-          <p:nvPr/>
-        </p:nvSpPr>
-        <p:spPr>
-          <a:xfrm>
-            <a:off x="7315200" y="3456432"/>
-            <a:ext cx="4206240" cy="1353312"/>
-          </a:xfrm>
-          <a:prstGeom prst="roundRect">
-            <a:avLst>
-              <a:gd name="adj" fmla="val 12000"/>
-            </a:avLst>
-          </a:prstGeom>
-          <a:solidFill>
-            <a:srgbClr val="FFFFFF"/>
-          </a:solidFill>
-          <a:ln w="9525">
-            <a:solidFill>
-              <a:srgbClr val="1A214D"/>
-            </a:solidFill>
-          </a:ln>
-          <a:effectLst/>
-        </p:spPr>
-        <p:style>
-          <a:lnRef idx="1">
-            <a:schemeClr val="accent1"/>
-          </a:lnRef>
-          <a:fillRef idx="3">
-            <a:schemeClr val="accent1"/>
-          </a:fillRef>
-          <a:effectRef idx="0">
-            <a:schemeClr val="accent1"/>
-          </a:effectRef>
-          <a:fontRef idx="minor">
-            <a:schemeClr val="lt1"/>
-          </a:fontRef>
-        </p:style>
-        <p:txBody>
-          <a:bodyPr rtlCol="0" anchor="ctr"/>
-          <a:lstStyle/>
-          <a:p>
-            <a:pPr algn="ctr"/>
-          </a:p>
-        </p:txBody>
-      </p:sp>
-      <p:sp>
-        <p:nvSpPr>
-          <p:cNvPr id="22" name="TextBox 21"/>
-          <p:cNvSpPr txBox="1"/>
-          <p:nvPr/>
-        </p:nvSpPr>
-        <p:spPr>
-          <a:xfrm>
-            <a:off x="7461504" y="3566160"/>
-            <a:ext cx="3913631" cy="274320"/>
-          </a:xfrm>
-          <a:prstGeom prst="rect">
-            <a:avLst/>
-          </a:prstGeom>
-          <a:noFill/>
-        </p:spPr>
-        <p:txBody>
-          <a:bodyPr wrap="square" lIns="0" rIns="0" tIns="0" bIns="0">
-            <a:spAutoFit/>
-          </a:bodyPr>
-          <a:lstStyle/>
-          <a:p>
-            <a:pPr algn="l"/>
-            <a:r>
-              <a:rPr sz="1100" b="1" i="0">
-                <a:solidFill>
-                  <a:srgbClr val="3B7EF6"/>
-                </a:solidFill>
-                <a:latin typeface="Lato"/>
-              </a:rPr>
-              <a:t>Technical base</a:t>
-            </a:r>
-          </a:p>
-        </p:txBody>
-      </p:sp>
-      <p:sp>
-        <p:nvSpPr>
-          <p:cNvPr id="23" name="TextBox 22"/>
-          <p:cNvSpPr txBox="1"/>
-          <p:nvPr/>
-        </p:nvSpPr>
-        <p:spPr>
-          <a:xfrm>
-            <a:off x="7461504" y="3877056"/>
-            <a:ext cx="3913631" cy="822960"/>
-          </a:xfrm>
-          <a:prstGeom prst="rect">
-            <a:avLst/>
-          </a:prstGeom>
-          <a:noFill/>
-        </p:spPr>
-        <p:txBody>
-          <a:bodyPr wrap="square" lIns="0" rIns="0" tIns="0">
-            <a:spAutoFit/>
-          </a:bodyPr>
-          <a:lstStyle/>
-          <a:p>
-            <a:pPr>
-              <a:spcAft>
-                <a:spcPts val="300"/>
-              </a:spcAft>
-            </a:pPr>
-            <a:r>
-              <a:rPr sz="900" b="1" i="0">
-                <a:solidFill>
-                  <a:srgbClr val="1A214D"/>
-                </a:solidFill>
-                <a:latin typeface="Lato"/>
-              </a:rPr>
-              <a:t>FEEL </a:t>
-            </a:r>
-            <a:r>
-              <a:rPr sz="900" b="0" i="0">
-                <a:solidFill>
-                  <a:srgbClr val="1A214D"/>
-                </a:solidFill>
-                <a:latin typeface="Lato"/>
-              </a:rPr>
-              <a:t>is the DMN-standard expression language — a small formal grammar.</a:t>
-            </a:r>
-          </a:p>
-          <a:p>
-            <a:pPr>
-              <a:spcAft>
-                <a:spcPts val="300"/>
-              </a:spcAft>
-            </a:pPr>
-            <a:r>
-              <a:rPr sz="900" b="1" i="0">
-                <a:solidFill>
-                  <a:srgbClr val="1A214D"/>
-                </a:solidFill>
-                <a:latin typeface="Lato"/>
-              </a:rPr>
-              <a:t>Constrained code generation </a:t>
-            </a:r>
-            <a:r>
-              <a:rPr sz="900" b="0" i="0">
-                <a:solidFill>
-                  <a:srgbClr val="1A214D"/>
-                </a:solidFill>
-                <a:latin typeface="Lato"/>
-              </a:rPr>
-              <a:t>with instant parser validation is the most mature LLM pattern in production copilots.</a:t>
-            </a:r>
-          </a:p>
-        </p:txBody>
-      </p:sp>
-      <p:sp>
-        <p:nvSpPr>
-          <p:cNvPr id="24" name="Rounded Rectangle 23"/>
-          <p:cNvSpPr/>
-          <p:nvPr/>
-        </p:nvSpPr>
-        <p:spPr>
-          <a:xfrm>
-            <a:off x="7315200" y="4901184"/>
-            <a:ext cx="4206240" cy="1362456"/>
-          </a:xfrm>
-          <a:prstGeom prst="roundRect">
-            <a:avLst>
-              <a:gd name="adj" fmla="val 12000"/>
-            </a:avLst>
-          </a:prstGeom>
-          <a:solidFill>
-            <a:srgbClr val="FFFFFF"/>
-          </a:solidFill>
-          <a:ln w="9525">
-            <a:solidFill>
-              <a:srgbClr val="1A214D"/>
-            </a:solidFill>
-          </a:ln>
-          <a:effectLst/>
-        </p:spPr>
-        <p:style>
-          <a:lnRef idx="1">
-            <a:schemeClr val="accent1"/>
-          </a:lnRef>
-          <a:fillRef idx="3">
-            <a:schemeClr val="accent1"/>
-          </a:fillRef>
-          <a:effectRef idx="0">
-            <a:schemeClr val="accent1"/>
-          </a:effectRef>
-          <a:fontRef idx="minor">
-            <a:schemeClr val="lt1"/>
-          </a:fontRef>
-        </p:style>
-        <p:txBody>
-          <a:bodyPr rtlCol="0" anchor="ctr"/>
-          <a:lstStyle/>
-          <a:p>
-            <a:pPr algn="ctr"/>
-          </a:p>
-        </p:txBody>
-      </p:sp>
-      <p:sp>
-        <p:nvSpPr>
-          <p:cNvPr id="25" name="TextBox 24"/>
-          <p:cNvSpPr txBox="1"/>
-          <p:nvPr/>
-        </p:nvSpPr>
-        <p:spPr>
-          <a:xfrm>
-            <a:off x="7461504" y="5010912"/>
-            <a:ext cx="3913631" cy="274320"/>
-          </a:xfrm>
-          <a:prstGeom prst="rect">
-            <a:avLst/>
-          </a:prstGeom>
-          <a:noFill/>
-        </p:spPr>
-        <p:txBody>
-          <a:bodyPr wrap="square" lIns="0" rIns="0" tIns="0" bIns="0">
-            <a:spAutoFit/>
-          </a:bodyPr>
-          <a:lstStyle/>
-          <a:p>
-            <a:pPr algn="l"/>
-            <a:r>
-              <a:rPr sz="1100" b="1" i="0">
-                <a:solidFill>
-                  <a:srgbClr val="3B7EF6"/>
-                </a:solidFill>
-                <a:latin typeface="Lato"/>
-              </a:rPr>
-              <a:t>Feasibility &amp; gate</a:t>
-            </a:r>
-          </a:p>
-        </p:txBody>
-      </p:sp>
-      <p:sp>
-        <p:nvSpPr>
-          <p:cNvPr id="26" name="TextBox 25"/>
-          <p:cNvSpPr txBox="1"/>
-          <p:nvPr/>
-        </p:nvSpPr>
-        <p:spPr>
-          <a:xfrm>
-            <a:off x="7461504" y="5321808"/>
-            <a:ext cx="3913631" cy="832104"/>
-          </a:xfrm>
-          <a:prstGeom prst="rect">
-            <a:avLst/>
-          </a:prstGeom>
-          <a:noFill/>
-        </p:spPr>
-        <p:txBody>
-          <a:bodyPr wrap="square" lIns="0" rIns="0" tIns="0">
-            <a:spAutoFit/>
-          </a:bodyPr>
-          <a:lstStyle/>
-          <a:p>
-            <a:pPr>
-              <a:spcAft>
-                <a:spcPts val="300"/>
-              </a:spcAft>
-            </a:pPr>
-            <a:r>
-              <a:rPr sz="900" b="1" i="0">
-                <a:solidFill>
-                  <a:srgbClr val="1A214D"/>
-                </a:solidFill>
-                <a:latin typeface="Lato"/>
-              </a:rPr>
-              <a:t>Flow: </a:t>
-            </a:r>
-            <a:r>
-              <a:rPr sz="900" b="0" i="0">
-                <a:solidFill>
-                  <a:srgbClr val="1A214D"/>
-                </a:solidFill>
-                <a:latin typeface="Lato"/>
-              </a:rPr>
-              <a:t>generate → parse → preview on sample values → save as Maker request.</a:t>
-            </a:r>
-          </a:p>
-          <a:p>
-            <a:pPr>
-              <a:spcAft>
-                <a:spcPts val="300"/>
-              </a:spcAft>
-            </a:pPr>
-            <a:r>
-              <a:rPr sz="900" b="1" i="0">
-                <a:solidFill>
-                  <a:srgbClr val="1A214D"/>
-                </a:solidFill>
-                <a:latin typeface="Lato"/>
-              </a:rPr>
-              <a:t>Zero customer data to start: </a:t>
-            </a:r>
-            <a:r>
-              <a:rPr sz="900" b="0" i="0">
-                <a:solidFill>
-                  <a:srgbClr val="1A214D"/>
-                </a:solidFill>
-                <a:latin typeface="Lato"/>
-              </a:rPr>
-              <a:t>ground on the existing formula library. Gate: BA panel signs off a replay of the current formulas from plain-language descriptions. Recommended v1.</a:t>
-            </a:r>
-          </a:p>
-        </p:txBody>
-      </p:sp>
-      <p:sp>
-        <p:nvSpPr>
-          <p:cNvPr id="27" name="TextBox 26"/>
-          <p:cNvSpPr txBox="1"/>
-          <p:nvPr/>
-        </p:nvSpPr>
-        <p:spPr>
-          <a:xfrm>
-            <a:off x="457200" y="6336792"/>
-            <a:ext cx="10515600" cy="164592"/>
-          </a:xfrm>
-          <a:prstGeom prst="rect">
-            <a:avLst/>
-          </a:prstGeom>
-          <a:noFill/>
-        </p:spPr>
-        <p:txBody>
-          <a:bodyPr wrap="square" lIns="0" rIns="0" tIns="0" bIns="0">
-            <a:spAutoFit/>
-          </a:bodyPr>
-          <a:lstStyle/>
-          <a:p>
-            <a:pPr algn="l"/>
-            <a:r>
-              <a:rPr sz="700" b="0" i="1">
-                <a:solidFill>
-                  <a:srgbClr val="1A214D"/>
-                </a:solidFill>
-                <a:latin typeface="Lato"/>
-              </a:rPr>
-              <a:t>Sources: OMG DMN / FEEL specification · SMBP portal mirror (Appro build)</a:t>
+              <a:rPr sz="900" b="0" i="1">
+                <a:solidFill>
+                  <a:srgbClr val="1A214D"/>
+                </a:solidFill>
+                <a:latin typeface="Lato"/>
+              </a:rPr>
+              <a:t>Report Enquiry with a prompt bar — the generated SQL is always shown for review beside the chart; the same governed reporting views serve bank clients through MCP.</a:t>
             </a:r>
           </a:p>
         </p:txBody>
@@ -18194,7 +22463,7 @@
                 </a:solidFill>
                 <a:latin typeface="Lato"/>
               </a:rPr>
-              <a:t>Solution Direction </a:t>
+              <a:t>Document Validation </a:t>
             </a:r>
             <a:r>
               <a:rPr sz="2000" b="1" i="0">
@@ -18203,7 +22472,7 @@
                 </a:solidFill>
                 <a:latin typeface="Lato"/>
               </a:rPr>
-              <a:t>— One Model, Four Adapters</a:t>
+              <a:t>— Checkers Review Exceptions, Not Everything</a:t>
             </a:r>
           </a:p>
         </p:txBody>
@@ -18531,33 +22800,55 @@
                 </a:solidFill>
                 <a:latin typeface="Lato"/>
               </a:rPr>
-              <a:t>One offline small language model behind all four use cases — the adapters differ, the controls stay the same.</a:t>
-            </a:r>
-          </a:p>
-        </p:txBody>
-      </p:sp>
-      <p:sp>
-        <p:nvSpPr>
-          <p:cNvPr id="15" name="Rounded Rectangle 14"/>
+              <a:t>AI pre-checks every document so checkers spend their time on exceptions — not on 100% review.</a:t>
+            </a:r>
+          </a:p>
+        </p:txBody>
+      </p:sp>
+      <p:pic>
+        <p:nvPicPr>
+          <p:cNvPr id="15" name="Picture 14" descr="05-document-setup.png"/>
+          <p:cNvPicPr>
+            <a:picLocks noChangeAspect="1"/>
+          </p:cNvPicPr>
+          <p:nvPr/>
+        </p:nvPicPr>
+        <p:blipFill>
+          <a:blip r:embed="rId4"/>
+          <a:stretch>
+            <a:fillRect/>
+          </a:stretch>
+        </p:blipFill>
+        <p:spPr>
+          <a:xfrm>
+            <a:off x="457200" y="1920240"/>
+            <a:ext cx="6675120" cy="3608737"/>
+          </a:xfrm>
+          <a:prstGeom prst="rect">
+            <a:avLst/>
+          </a:prstGeom>
+        </p:spPr>
+      </p:pic>
+      <p:sp>
+        <p:nvSpPr>
+          <p:cNvPr id="16" name="Rounded Rectangle 15"/>
           <p:cNvSpPr/>
           <p:nvPr/>
         </p:nvSpPr>
         <p:spPr>
           <a:xfrm>
-            <a:off x="457200" y="1874519"/>
-            <a:ext cx="1691640" cy="914400"/>
+            <a:off x="443484" y="1906524"/>
+            <a:ext cx="6702552" cy="3636168"/>
           </a:xfrm>
           <a:prstGeom prst="roundRect">
             <a:avLst>
-              <a:gd name="adj" fmla="val 15000"/>
+              <a:gd name="adj" fmla="val 3000"/>
             </a:avLst>
           </a:prstGeom>
-          <a:solidFill>
-            <a:srgbClr val="EDF2FF"/>
-          </a:solidFill>
-          <a:ln w="9525">
+          <a:noFill/>
+          <a:ln w="12700">
             <a:solidFill>
-              <a:srgbClr val="3B7EF6"/>
+              <a:srgbClr val="1A214D"/>
             </a:solidFill>
           </a:ln>
           <a:effectLst/>
@@ -18586,14 +22877,14 @@
       </p:sp>
       <p:sp>
         <p:nvSpPr>
-          <p:cNvPr id="16" name="TextBox 15"/>
+          <p:cNvPr id="17" name="TextBox 16"/>
           <p:cNvSpPr txBox="1"/>
           <p:nvPr/>
         </p:nvSpPr>
         <p:spPr>
           <a:xfrm>
-            <a:off x="530352" y="2039112"/>
-            <a:ext cx="1545336" cy="274320"/>
+            <a:off x="457200" y="5592984"/>
+            <a:ext cx="6675120" cy="228600"/>
           </a:xfrm>
           <a:prstGeom prst="rect">
             <a:avLst/>
@@ -18606,827 +22897,29 @@
           </a:bodyPr>
           <a:lstStyle/>
           <a:p>
-            <a:pPr algn="ctr"/>
-            <a:r>
-              <a:rPr sz="1100" b="1" i="0">
-                <a:solidFill>
-                  <a:srgbClr val="1A214D"/>
-                </a:solidFill>
-                <a:latin typeface="Lato"/>
-              </a:rPr>
-              <a:t>Prompt</a:t>
-            </a:r>
-          </a:p>
-        </p:txBody>
-      </p:sp>
-      <p:sp>
-        <p:nvSpPr>
-          <p:cNvPr id="17" name="TextBox 16"/>
-          <p:cNvSpPr txBox="1"/>
-          <p:nvPr/>
-        </p:nvSpPr>
-        <p:spPr>
-          <a:xfrm>
-            <a:off x="530352" y="2350008"/>
-            <a:ext cx="1545336" cy="365760"/>
-          </a:xfrm>
-          <a:prstGeom prst="rect">
-            <a:avLst/>
-          </a:prstGeom>
-          <a:noFill/>
-        </p:spPr>
-        <p:txBody>
-          <a:bodyPr wrap="square" lIns="0" rIns="0" tIns="0" bIns="0">
-            <a:spAutoFit/>
-          </a:bodyPr>
-          <a:lstStyle/>
-          <a:p>
-            <a:pPr algn="ctr"/>
-            <a:r>
-              <a:rPr sz="800" b="0" i="0">
-                <a:solidFill>
-                  <a:srgbClr val="1A214D"/>
-                </a:solidFill>
-                <a:latin typeface="Lato"/>
-              </a:rPr>
-              <a:t>in-module UI</a:t>
-            </a:r>
-          </a:p>
-        </p:txBody>
-      </p:sp>
-      <p:sp>
-        <p:nvSpPr>
-          <p:cNvPr id="18" name="TextBox 17"/>
-          <p:cNvSpPr txBox="1"/>
-          <p:nvPr/>
-        </p:nvSpPr>
-        <p:spPr>
-          <a:xfrm>
-            <a:off x="2130552" y="2167127"/>
-            <a:ext cx="283464" cy="320040"/>
-          </a:xfrm>
-          <a:prstGeom prst="rect">
-            <a:avLst/>
-          </a:prstGeom>
-          <a:noFill/>
-        </p:spPr>
-        <p:txBody>
-          <a:bodyPr wrap="square" lIns="0" rIns="0" tIns="0" bIns="0">
-            <a:spAutoFit/>
-          </a:bodyPr>
-          <a:lstStyle/>
-          <a:p>
-            <a:pPr algn="ctr"/>
-            <a:r>
-              <a:rPr sz="1600" b="1" i="0">
-                <a:solidFill>
-                  <a:srgbClr val="3B7EF6"/>
-                </a:solidFill>
-                <a:latin typeface="Lato"/>
-              </a:rPr>
-              <a:t>→</a:t>
-            </a:r>
-          </a:p>
-        </p:txBody>
-      </p:sp>
-      <p:sp>
-        <p:nvSpPr>
-          <p:cNvPr id="19" name="Rounded Rectangle 18"/>
+            <a:pPr algn="l"/>
+            <a:r>
+              <a:rPr sz="800" b="0" i="1">
+                <a:solidFill>
+                  <a:srgbClr val="1A214D"/>
+                </a:solidFill>
+                <a:latin typeface="Lato"/>
+              </a:rPr>
+              <a:t>Document Management › Document Set Up — mandatory documents are already modelled per product and journey.</a:t>
+            </a:r>
+          </a:p>
+        </p:txBody>
+      </p:sp>
+      <p:sp>
+        <p:nvSpPr>
+          <p:cNvPr id="18" name="Rounded Rectangle 17"/>
           <p:cNvSpPr/>
           <p:nvPr/>
         </p:nvSpPr>
         <p:spPr>
           <a:xfrm>
-            <a:off x="2377440" y="1874519"/>
-            <a:ext cx="1691640" cy="914400"/>
-          </a:xfrm>
-          <a:prstGeom prst="roundRect">
-            <a:avLst>
-              <a:gd name="adj" fmla="val 15000"/>
-            </a:avLst>
-          </a:prstGeom>
-          <a:solidFill>
-            <a:srgbClr val="EDF2FF"/>
-          </a:solidFill>
-          <a:ln w="9525">
-            <a:solidFill>
-              <a:srgbClr val="3B7EF6"/>
-            </a:solidFill>
-          </a:ln>
-          <a:effectLst/>
-        </p:spPr>
-        <p:style>
-          <a:lnRef idx="1">
-            <a:schemeClr val="accent1"/>
-          </a:lnRef>
-          <a:fillRef idx="3">
-            <a:schemeClr val="accent1"/>
-          </a:fillRef>
-          <a:effectRef idx="0">
-            <a:schemeClr val="accent1"/>
-          </a:effectRef>
-          <a:fontRef idx="minor">
-            <a:schemeClr val="lt1"/>
-          </a:fontRef>
-        </p:style>
-        <p:txBody>
-          <a:bodyPr rtlCol="0" anchor="ctr"/>
-          <a:lstStyle/>
-          <a:p>
-            <a:pPr algn="ctr"/>
-          </a:p>
-        </p:txBody>
-      </p:sp>
-      <p:sp>
-        <p:nvSpPr>
-          <p:cNvPr id="20" name="TextBox 19"/>
-          <p:cNvSpPr txBox="1"/>
-          <p:nvPr/>
-        </p:nvSpPr>
-        <p:spPr>
-          <a:xfrm>
-            <a:off x="2450592" y="2039112"/>
-            <a:ext cx="1545336" cy="274320"/>
-          </a:xfrm>
-          <a:prstGeom prst="rect">
-            <a:avLst/>
-          </a:prstGeom>
-          <a:noFill/>
-        </p:spPr>
-        <p:txBody>
-          <a:bodyPr wrap="square" lIns="0" rIns="0" tIns="0" bIns="0">
-            <a:spAutoFit/>
-          </a:bodyPr>
-          <a:lstStyle/>
-          <a:p>
-            <a:pPr algn="ctr"/>
-            <a:r>
-              <a:rPr sz="1100" b="1" i="0">
-                <a:solidFill>
-                  <a:srgbClr val="1A214D"/>
-                </a:solidFill>
-                <a:latin typeface="Lato"/>
-              </a:rPr>
-              <a:t>Guardrails</a:t>
-            </a:r>
-          </a:p>
-        </p:txBody>
-      </p:sp>
-      <p:sp>
-        <p:nvSpPr>
-          <p:cNvPr id="21" name="TextBox 20"/>
-          <p:cNvSpPr txBox="1"/>
-          <p:nvPr/>
-        </p:nvSpPr>
-        <p:spPr>
-          <a:xfrm>
-            <a:off x="2450592" y="2350008"/>
-            <a:ext cx="1545336" cy="365760"/>
-          </a:xfrm>
-          <a:prstGeom prst="rect">
-            <a:avLst/>
-          </a:prstGeom>
-          <a:noFill/>
-        </p:spPr>
-        <p:txBody>
-          <a:bodyPr wrap="square" lIns="0" rIns="0" tIns="0" bIns="0">
-            <a:spAutoFit/>
-          </a:bodyPr>
-          <a:lstStyle/>
-          <a:p>
-            <a:pPr algn="ctr"/>
-            <a:r>
-              <a:rPr sz="800" b="0" i="0">
-                <a:solidFill>
-                  <a:srgbClr val="1A214D"/>
-                </a:solidFill>
-                <a:latin typeface="Lato"/>
-              </a:rPr>
-              <a:t>scope + PII filter</a:t>
-            </a:r>
-          </a:p>
-        </p:txBody>
-      </p:sp>
-      <p:sp>
-        <p:nvSpPr>
-          <p:cNvPr id="22" name="TextBox 21"/>
-          <p:cNvSpPr txBox="1"/>
-          <p:nvPr/>
-        </p:nvSpPr>
-        <p:spPr>
-          <a:xfrm>
-            <a:off x="4050792" y="2167127"/>
-            <a:ext cx="283464" cy="320040"/>
-          </a:xfrm>
-          <a:prstGeom prst="rect">
-            <a:avLst/>
-          </a:prstGeom>
-          <a:noFill/>
-        </p:spPr>
-        <p:txBody>
-          <a:bodyPr wrap="square" lIns="0" rIns="0" tIns="0" bIns="0">
-            <a:spAutoFit/>
-          </a:bodyPr>
-          <a:lstStyle/>
-          <a:p>
-            <a:pPr algn="ctr"/>
-            <a:r>
-              <a:rPr sz="1600" b="1" i="0">
-                <a:solidFill>
-                  <a:srgbClr val="3B7EF6"/>
-                </a:solidFill>
-                <a:latin typeface="Lato"/>
-              </a:rPr>
-              <a:t>→</a:t>
-            </a:r>
-          </a:p>
-        </p:txBody>
-      </p:sp>
-      <p:sp>
-        <p:nvSpPr>
-          <p:cNvPr id="23" name="Rounded Rectangle 22"/>
-          <p:cNvSpPr/>
-          <p:nvPr/>
-        </p:nvSpPr>
-        <p:spPr>
-          <a:xfrm>
-            <a:off x="4297680" y="1874519"/>
-            <a:ext cx="1691640" cy="914400"/>
-          </a:xfrm>
-          <a:prstGeom prst="roundRect">
-            <a:avLst>
-              <a:gd name="adj" fmla="val 15000"/>
-            </a:avLst>
-          </a:prstGeom>
-          <a:solidFill>
-            <a:srgbClr val="FDBA23"/>
-          </a:solidFill>
-          <a:ln>
-            <a:noFill/>
-          </a:ln>
-          <a:effectLst/>
-        </p:spPr>
-        <p:style>
-          <a:lnRef idx="1">
-            <a:schemeClr val="accent1"/>
-          </a:lnRef>
-          <a:fillRef idx="3">
-            <a:schemeClr val="accent1"/>
-          </a:fillRef>
-          <a:effectRef idx="0">
-            <a:schemeClr val="accent1"/>
-          </a:effectRef>
-          <a:fontRef idx="minor">
-            <a:schemeClr val="lt1"/>
-          </a:fontRef>
-        </p:style>
-        <p:txBody>
-          <a:bodyPr rtlCol="0" anchor="ctr"/>
-          <a:lstStyle/>
-          <a:p>
-            <a:pPr algn="ctr"/>
-          </a:p>
-        </p:txBody>
-      </p:sp>
-      <p:sp>
-        <p:nvSpPr>
-          <p:cNvPr id="24" name="TextBox 23"/>
-          <p:cNvSpPr txBox="1"/>
-          <p:nvPr/>
-        </p:nvSpPr>
-        <p:spPr>
-          <a:xfrm>
-            <a:off x="4370832" y="2039112"/>
-            <a:ext cx="1545336" cy="274320"/>
-          </a:xfrm>
-          <a:prstGeom prst="rect">
-            <a:avLst/>
-          </a:prstGeom>
-          <a:noFill/>
-        </p:spPr>
-        <p:txBody>
-          <a:bodyPr wrap="square" lIns="0" rIns="0" tIns="0" bIns="0">
-            <a:spAutoFit/>
-          </a:bodyPr>
-          <a:lstStyle/>
-          <a:p>
-            <a:pPr algn="ctr"/>
-            <a:r>
-              <a:rPr sz="1100" b="1" i="0">
-                <a:solidFill>
-                  <a:srgbClr val="1A214D"/>
-                </a:solidFill>
-                <a:latin typeface="Lato"/>
-              </a:rPr>
-              <a:t>SLM</a:t>
-            </a:r>
-          </a:p>
-        </p:txBody>
-      </p:sp>
-      <p:sp>
-        <p:nvSpPr>
-          <p:cNvPr id="25" name="TextBox 24"/>
-          <p:cNvSpPr txBox="1"/>
-          <p:nvPr/>
-        </p:nvSpPr>
-        <p:spPr>
-          <a:xfrm>
-            <a:off x="4370832" y="2350008"/>
-            <a:ext cx="1545336" cy="365760"/>
-          </a:xfrm>
-          <a:prstGeom prst="rect">
-            <a:avLst/>
-          </a:prstGeom>
-          <a:noFill/>
-        </p:spPr>
-        <p:txBody>
-          <a:bodyPr wrap="square" lIns="0" rIns="0" tIns="0" bIns="0">
-            <a:spAutoFit/>
-          </a:bodyPr>
-          <a:lstStyle/>
-          <a:p>
-            <a:pPr algn="ctr"/>
-            <a:r>
-              <a:rPr sz="800" b="0" i="0">
-                <a:solidFill>
-                  <a:srgbClr val="1A214D"/>
-                </a:solidFill>
-                <a:latin typeface="Lato"/>
-              </a:rPr>
-              <a:t>offline · UAE-hosted</a:t>
-            </a:r>
-          </a:p>
-        </p:txBody>
-      </p:sp>
-      <p:sp>
-        <p:nvSpPr>
-          <p:cNvPr id="26" name="TextBox 25"/>
-          <p:cNvSpPr txBox="1"/>
-          <p:nvPr/>
-        </p:nvSpPr>
-        <p:spPr>
-          <a:xfrm>
-            <a:off x="5971032" y="2167127"/>
-            <a:ext cx="283464" cy="320040"/>
-          </a:xfrm>
-          <a:prstGeom prst="rect">
-            <a:avLst/>
-          </a:prstGeom>
-          <a:noFill/>
-        </p:spPr>
-        <p:txBody>
-          <a:bodyPr wrap="square" lIns="0" rIns="0" tIns="0" bIns="0">
-            <a:spAutoFit/>
-          </a:bodyPr>
-          <a:lstStyle/>
-          <a:p>
-            <a:pPr algn="ctr"/>
-            <a:r>
-              <a:rPr sz="1600" b="1" i="0">
-                <a:solidFill>
-                  <a:srgbClr val="3B7EF6"/>
-                </a:solidFill>
-                <a:latin typeface="Lato"/>
-              </a:rPr>
-              <a:t>→</a:t>
-            </a:r>
-          </a:p>
-        </p:txBody>
-      </p:sp>
-      <p:sp>
-        <p:nvSpPr>
-          <p:cNvPr id="27" name="Rounded Rectangle 26"/>
-          <p:cNvSpPr/>
-          <p:nvPr/>
-        </p:nvSpPr>
-        <p:spPr>
-          <a:xfrm>
-            <a:off x="6217920" y="1874519"/>
-            <a:ext cx="1691640" cy="914400"/>
-          </a:xfrm>
-          <a:prstGeom prst="roundRect">
-            <a:avLst>
-              <a:gd name="adj" fmla="val 15000"/>
-            </a:avLst>
-          </a:prstGeom>
-          <a:solidFill>
-            <a:srgbClr val="EDF2FF"/>
-          </a:solidFill>
-          <a:ln w="9525">
-            <a:solidFill>
-              <a:srgbClr val="3B7EF6"/>
-            </a:solidFill>
-          </a:ln>
-          <a:effectLst/>
-        </p:spPr>
-        <p:style>
-          <a:lnRef idx="1">
-            <a:schemeClr val="accent1"/>
-          </a:lnRef>
-          <a:fillRef idx="3">
-            <a:schemeClr val="accent1"/>
-          </a:fillRef>
-          <a:effectRef idx="0">
-            <a:schemeClr val="accent1"/>
-          </a:effectRef>
-          <a:fontRef idx="minor">
-            <a:schemeClr val="lt1"/>
-          </a:fontRef>
-        </p:style>
-        <p:txBody>
-          <a:bodyPr rtlCol="0" anchor="ctr"/>
-          <a:lstStyle/>
-          <a:p>
-            <a:pPr algn="ctr"/>
-          </a:p>
-        </p:txBody>
-      </p:sp>
-      <p:sp>
-        <p:nvSpPr>
-          <p:cNvPr id="28" name="TextBox 27"/>
-          <p:cNvSpPr txBox="1"/>
-          <p:nvPr/>
-        </p:nvSpPr>
-        <p:spPr>
-          <a:xfrm>
-            <a:off x="6291072" y="2039112"/>
-            <a:ext cx="1545336" cy="274320"/>
-          </a:xfrm>
-          <a:prstGeom prst="rect">
-            <a:avLst/>
-          </a:prstGeom>
-          <a:noFill/>
-        </p:spPr>
-        <p:txBody>
-          <a:bodyPr wrap="square" lIns="0" rIns="0" tIns="0" bIns="0">
-            <a:spAutoFit/>
-          </a:bodyPr>
-          <a:lstStyle/>
-          <a:p>
-            <a:pPr algn="ctr"/>
-            <a:r>
-              <a:rPr sz="1100" b="1" i="0">
-                <a:solidFill>
-                  <a:srgbClr val="1A214D"/>
-                </a:solidFill>
-                <a:latin typeface="Lato"/>
-              </a:rPr>
-              <a:t>Task adapter</a:t>
-            </a:r>
-          </a:p>
-        </p:txBody>
-      </p:sp>
-      <p:sp>
-        <p:nvSpPr>
-          <p:cNvPr id="29" name="TextBox 28"/>
-          <p:cNvSpPr txBox="1"/>
-          <p:nvPr/>
-        </p:nvSpPr>
-        <p:spPr>
-          <a:xfrm>
-            <a:off x="6291072" y="2350008"/>
-            <a:ext cx="1545336" cy="365760"/>
-          </a:xfrm>
-          <a:prstGeom prst="rect">
-            <a:avLst/>
-          </a:prstGeom>
-          <a:noFill/>
-        </p:spPr>
-        <p:txBody>
-          <a:bodyPr wrap="square" lIns="0" rIns="0" tIns="0" bIns="0">
-            <a:spAutoFit/>
-          </a:bodyPr>
-          <a:lstStyle/>
-          <a:p>
-            <a:pPr algn="ctr"/>
-            <a:r>
-              <a:rPr sz="800" b="0" i="0">
-                <a:solidFill>
-                  <a:srgbClr val="1A214D"/>
-                </a:solidFill>
-                <a:latin typeface="Lato"/>
-              </a:rPr>
-              <a:t>rule · SQL · doc · FEEL</a:t>
-            </a:r>
-          </a:p>
-        </p:txBody>
-      </p:sp>
-      <p:sp>
-        <p:nvSpPr>
-          <p:cNvPr id="30" name="TextBox 29"/>
-          <p:cNvSpPr txBox="1"/>
-          <p:nvPr/>
-        </p:nvSpPr>
-        <p:spPr>
-          <a:xfrm>
-            <a:off x="7891272" y="2167127"/>
-            <a:ext cx="283464" cy="320040"/>
-          </a:xfrm>
-          <a:prstGeom prst="rect">
-            <a:avLst/>
-          </a:prstGeom>
-          <a:noFill/>
-        </p:spPr>
-        <p:txBody>
-          <a:bodyPr wrap="square" lIns="0" rIns="0" tIns="0" bIns="0">
-            <a:spAutoFit/>
-          </a:bodyPr>
-          <a:lstStyle/>
-          <a:p>
-            <a:pPr algn="ctr"/>
-            <a:r>
-              <a:rPr sz="1600" b="1" i="0">
-                <a:solidFill>
-                  <a:srgbClr val="3B7EF6"/>
-                </a:solidFill>
-                <a:latin typeface="Lato"/>
-              </a:rPr>
-              <a:t>→</a:t>
-            </a:r>
-          </a:p>
-        </p:txBody>
-      </p:sp>
-      <p:sp>
-        <p:nvSpPr>
-          <p:cNvPr id="31" name="Rounded Rectangle 30"/>
-          <p:cNvSpPr/>
-          <p:nvPr/>
-        </p:nvSpPr>
-        <p:spPr>
-          <a:xfrm>
-            <a:off x="8138160" y="1874519"/>
-            <a:ext cx="1691640" cy="914400"/>
-          </a:xfrm>
-          <a:prstGeom prst="roundRect">
-            <a:avLst>
-              <a:gd name="adj" fmla="val 15000"/>
-            </a:avLst>
-          </a:prstGeom>
-          <a:solidFill>
-            <a:srgbClr val="EDF2FF"/>
-          </a:solidFill>
-          <a:ln w="9525">
-            <a:solidFill>
-              <a:srgbClr val="3B7EF6"/>
-            </a:solidFill>
-          </a:ln>
-          <a:effectLst/>
-        </p:spPr>
-        <p:style>
-          <a:lnRef idx="1">
-            <a:schemeClr val="accent1"/>
-          </a:lnRef>
-          <a:fillRef idx="3">
-            <a:schemeClr val="accent1"/>
-          </a:fillRef>
-          <a:effectRef idx="0">
-            <a:schemeClr val="accent1"/>
-          </a:effectRef>
-          <a:fontRef idx="minor">
-            <a:schemeClr val="lt1"/>
-          </a:fontRef>
-        </p:style>
-        <p:txBody>
-          <a:bodyPr rtlCol="0" anchor="ctr"/>
-          <a:lstStyle/>
-          <a:p>
-            <a:pPr algn="ctr"/>
-          </a:p>
-        </p:txBody>
-      </p:sp>
-      <p:sp>
-        <p:nvSpPr>
-          <p:cNvPr id="32" name="TextBox 31"/>
-          <p:cNvSpPr txBox="1"/>
-          <p:nvPr/>
-        </p:nvSpPr>
-        <p:spPr>
-          <a:xfrm>
-            <a:off x="8211312" y="2039112"/>
-            <a:ext cx="1545336" cy="274320"/>
-          </a:xfrm>
-          <a:prstGeom prst="rect">
-            <a:avLst/>
-          </a:prstGeom>
-          <a:noFill/>
-        </p:spPr>
-        <p:txBody>
-          <a:bodyPr wrap="square" lIns="0" rIns="0" tIns="0" bIns="0">
-            <a:spAutoFit/>
-          </a:bodyPr>
-          <a:lstStyle/>
-          <a:p>
-            <a:pPr algn="ctr"/>
-            <a:r>
-              <a:rPr sz="1100" b="1" i="0">
-                <a:solidFill>
-                  <a:srgbClr val="1A214D"/>
-                </a:solidFill>
-                <a:latin typeface="Lato"/>
-              </a:rPr>
-              <a:t>Validator</a:t>
-            </a:r>
-          </a:p>
-        </p:txBody>
-      </p:sp>
-      <p:sp>
-        <p:nvSpPr>
-          <p:cNvPr id="33" name="TextBox 32"/>
-          <p:cNvSpPr txBox="1"/>
-          <p:nvPr/>
-        </p:nvSpPr>
-        <p:spPr>
-          <a:xfrm>
-            <a:off x="8211312" y="2350008"/>
-            <a:ext cx="1545336" cy="365760"/>
-          </a:xfrm>
-          <a:prstGeom prst="rect">
-            <a:avLst/>
-          </a:prstGeom>
-          <a:noFill/>
-        </p:spPr>
-        <p:txBody>
-          <a:bodyPr wrap="square" lIns="0" rIns="0" tIns="0" bIns="0">
-            <a:spAutoFit/>
-          </a:bodyPr>
-          <a:lstStyle/>
-          <a:p>
-            <a:pPr algn="ctr"/>
-            <a:r>
-              <a:rPr sz="800" b="0" i="0">
-                <a:solidFill>
-                  <a:srgbClr val="1A214D"/>
-                </a:solidFill>
-                <a:latin typeface="Lato"/>
-              </a:rPr>
-              <a:t>parser · replay · match</a:t>
-            </a:r>
-          </a:p>
-        </p:txBody>
-      </p:sp>
-      <p:sp>
-        <p:nvSpPr>
-          <p:cNvPr id="34" name="TextBox 33"/>
-          <p:cNvSpPr txBox="1"/>
-          <p:nvPr/>
-        </p:nvSpPr>
-        <p:spPr>
-          <a:xfrm>
-            <a:off x="9811512" y="2167127"/>
-            <a:ext cx="283464" cy="320040"/>
-          </a:xfrm>
-          <a:prstGeom prst="rect">
-            <a:avLst/>
-          </a:prstGeom>
-          <a:noFill/>
-        </p:spPr>
-        <p:txBody>
-          <a:bodyPr wrap="square" lIns="0" rIns="0" tIns="0" bIns="0">
-            <a:spAutoFit/>
-          </a:bodyPr>
-          <a:lstStyle/>
-          <a:p>
-            <a:pPr algn="ctr"/>
-            <a:r>
-              <a:rPr sz="1600" b="1" i="0">
-                <a:solidFill>
-                  <a:srgbClr val="3B7EF6"/>
-                </a:solidFill>
-                <a:latin typeface="Lato"/>
-              </a:rPr>
-              <a:t>→</a:t>
-            </a:r>
-          </a:p>
-        </p:txBody>
-      </p:sp>
-      <p:sp>
-        <p:nvSpPr>
-          <p:cNvPr id="35" name="Rounded Rectangle 34"/>
-          <p:cNvSpPr/>
-          <p:nvPr/>
-        </p:nvSpPr>
-        <p:spPr>
-          <a:xfrm>
-            <a:off x="10058400" y="1874519"/>
-            <a:ext cx="1691640" cy="914400"/>
-          </a:xfrm>
-          <a:prstGeom prst="roundRect">
-            <a:avLst>
-              <a:gd name="adj" fmla="val 15000"/>
-            </a:avLst>
-          </a:prstGeom>
-          <a:solidFill>
-            <a:srgbClr val="EDF2FF"/>
-          </a:solidFill>
-          <a:ln w="9525">
-            <a:solidFill>
-              <a:srgbClr val="3B7EF6"/>
-            </a:solidFill>
-          </a:ln>
-          <a:effectLst/>
-        </p:spPr>
-        <p:style>
-          <a:lnRef idx="1">
-            <a:schemeClr val="accent1"/>
-          </a:lnRef>
-          <a:fillRef idx="3">
-            <a:schemeClr val="accent1"/>
-          </a:fillRef>
-          <a:effectRef idx="0">
-            <a:schemeClr val="accent1"/>
-          </a:effectRef>
-          <a:fontRef idx="minor">
-            <a:schemeClr val="lt1"/>
-          </a:fontRef>
-        </p:style>
-        <p:txBody>
-          <a:bodyPr rtlCol="0" anchor="ctr"/>
-          <a:lstStyle/>
-          <a:p>
-            <a:pPr algn="ctr"/>
-          </a:p>
-        </p:txBody>
-      </p:sp>
-      <p:sp>
-        <p:nvSpPr>
-          <p:cNvPr id="36" name="TextBox 35"/>
-          <p:cNvSpPr txBox="1"/>
-          <p:nvPr/>
-        </p:nvSpPr>
-        <p:spPr>
-          <a:xfrm>
-            <a:off x="10131552" y="2039112"/>
-            <a:ext cx="1545336" cy="274320"/>
-          </a:xfrm>
-          <a:prstGeom prst="rect">
-            <a:avLst/>
-          </a:prstGeom>
-          <a:noFill/>
-        </p:spPr>
-        <p:txBody>
-          <a:bodyPr wrap="square" lIns="0" rIns="0" tIns="0" bIns="0">
-            <a:spAutoFit/>
-          </a:bodyPr>
-          <a:lstStyle/>
-          <a:p>
-            <a:pPr algn="ctr"/>
-            <a:r>
-              <a:rPr sz="1100" b="1" i="0">
-                <a:solidFill>
-                  <a:srgbClr val="1A214D"/>
-                </a:solidFill>
-                <a:latin typeface="Lato"/>
-              </a:rPr>
-              <a:t>Maker-Checker</a:t>
-            </a:r>
-          </a:p>
-        </p:txBody>
-      </p:sp>
-      <p:sp>
-        <p:nvSpPr>
-          <p:cNvPr id="37" name="TextBox 36"/>
-          <p:cNvSpPr txBox="1"/>
-          <p:nvPr/>
-        </p:nvSpPr>
-        <p:spPr>
-          <a:xfrm>
-            <a:off x="10131552" y="2350008"/>
-            <a:ext cx="1545336" cy="365760"/>
-          </a:xfrm>
-          <a:prstGeom prst="rect">
-            <a:avLst/>
-          </a:prstGeom>
-          <a:noFill/>
-        </p:spPr>
-        <p:txBody>
-          <a:bodyPr wrap="square" lIns="0" rIns="0" tIns="0" bIns="0">
-            <a:spAutoFit/>
-          </a:bodyPr>
-          <a:lstStyle/>
-          <a:p>
-            <a:pPr algn="ctr"/>
-            <a:r>
-              <a:rPr sz="800" b="0" i="0">
-                <a:solidFill>
-                  <a:srgbClr val="1A214D"/>
-                </a:solidFill>
-                <a:latin typeface="Lato"/>
-              </a:rPr>
-              <a:t>approve &amp; publish</a:t>
-            </a:r>
-          </a:p>
-        </p:txBody>
-      </p:sp>
-      <p:sp>
-        <p:nvSpPr>
-          <p:cNvPr id="38" name="Rounded Rectangle 37"/>
-          <p:cNvSpPr/>
-          <p:nvPr/>
-        </p:nvSpPr>
-        <p:spPr>
-          <a:xfrm>
-            <a:off x="457200" y="3246120"/>
-            <a:ext cx="3535680" cy="2514600"/>
+            <a:off x="7315200" y="1920240"/>
+            <a:ext cx="4206240" cy="1444752"/>
           </a:xfrm>
           <a:prstGeom prst="roundRect">
             <a:avLst>
@@ -19467,14 +22960,14 @@
       </p:sp>
       <p:sp>
         <p:nvSpPr>
-          <p:cNvPr id="39" name="TextBox 38"/>
+          <p:cNvPr id="19" name="TextBox 18"/>
           <p:cNvSpPr txBox="1"/>
           <p:nvPr/>
         </p:nvSpPr>
         <p:spPr>
           <a:xfrm>
-            <a:off x="603504" y="3355848"/>
-            <a:ext cx="3243072" cy="274320"/>
+            <a:off x="7461504" y="2029968"/>
+            <a:ext cx="3913631" cy="274320"/>
           </a:xfrm>
           <a:prstGeom prst="rect">
             <a:avLst/>
@@ -19495,21 +22988,21 @@
                 </a:solidFill>
                 <a:latin typeface="Lato"/>
               </a:rPr>
-              <a:t>Model direction — Foundry SLM</a:t>
-            </a:r>
-          </a:p>
-        </p:txBody>
-      </p:sp>
-      <p:sp>
-        <p:nvSpPr>
-          <p:cNvPr id="40" name="TextBox 39"/>
+              <a:t>Requirement · doc comparison  (20 Oct)</a:t>
+            </a:r>
+          </a:p>
+        </p:txBody>
+      </p:sp>
+      <p:sp>
+        <p:nvSpPr>
+          <p:cNvPr id="20" name="TextBox 19"/>
           <p:cNvSpPr txBox="1"/>
           <p:nvPr/>
         </p:nvSpPr>
         <p:spPr>
           <a:xfrm>
-            <a:off x="603504" y="3666744"/>
-            <a:ext cx="3243072" cy="1984248"/>
+            <a:off x="7461504" y="2340864"/>
+            <a:ext cx="3913631" cy="914400"/>
           </a:xfrm>
           <a:prstGeom prst="rect">
             <a:avLst/>
@@ -19534,7 +23027,7 @@
                 </a:solidFill>
                 <a:latin typeface="Lato"/>
               </a:rPr>
-              <a:t>Shortlist from the Foundry small-model catalog </a:t>
+              <a:t>Validate documents </a:t>
             </a:r>
             <a:r>
               <a:rPr sz="900" b="0" i="0">
@@ -19543,71 +23036,21 @@
                 </a:solidFill>
                 <a:latin typeface="Lato"/>
               </a:rPr>
-              <a:t>— e.g. the Phi-4 family: reported MIT-licensed and self-hostable (Foundry, Hugging Face, Ollama).</a:t>
-            </a:r>
-          </a:p>
-          <a:p>
-            <a:pPr>
-              <a:spcAft>
-                <a:spcPts val="300"/>
-              </a:spcAft>
-            </a:pPr>
-            <a:r>
-              <a:rPr sz="900" b="1" i="0">
-                <a:solidFill>
-                  <a:srgbClr val="1A214D"/>
-                </a:solidFill>
-                <a:latin typeface="Lato"/>
-              </a:rPr>
-              <a:t>Verify licence and commercials </a:t>
-            </a:r>
-            <a:r>
-              <a:rPr sz="900" b="0" i="0">
-                <a:solidFill>
-                  <a:srgbClr val="1A214D"/>
-                </a:solidFill>
-                <a:latin typeface="Lato"/>
-              </a:rPr>
-              <a:t>on the model card — Cathal's session output.</a:t>
-            </a:r>
-          </a:p>
-          <a:p>
-            <a:pPr>
-              <a:spcAft>
-                <a:spcPts val="300"/>
-              </a:spcAft>
-            </a:pPr>
-            <a:r>
-              <a:rPr sz="900" b="1" i="0">
-                <a:solidFill>
-                  <a:srgbClr val="1A214D"/>
-                </a:solidFill>
-                <a:latin typeface="Lato"/>
-              </a:rPr>
-              <a:t>One base model, </a:t>
-            </a:r>
-            <a:r>
-              <a:rPr sz="900" b="0" i="0">
-                <a:solidFill>
-                  <a:srgbClr val="1A214D"/>
-                </a:solidFill>
-                <a:latin typeface="Lato"/>
-              </a:rPr>
-              <a:t>per-task adapters — not four separate models.</a:t>
-            </a:r>
-          </a:p>
-        </p:txBody>
-      </p:sp>
-      <p:sp>
-        <p:nvSpPr>
-          <p:cNvPr id="41" name="Rounded Rectangle 40"/>
+              <a:t>in the new Document setup module — security cheques, source-of-income proofs, clearance letters — against application data before ops review.</a:t>
+            </a:r>
+          </a:p>
+        </p:txBody>
+      </p:sp>
+      <p:sp>
+        <p:nvSpPr>
+          <p:cNvPr id="21" name="Rounded Rectangle 20"/>
           <p:cNvSpPr/>
           <p:nvPr/>
         </p:nvSpPr>
         <p:spPr>
           <a:xfrm>
-            <a:off x="4221480" y="3246120"/>
-            <a:ext cx="3535680" cy="2514600"/>
+            <a:off x="7315200" y="3456432"/>
+            <a:ext cx="4206240" cy="1353312"/>
           </a:xfrm>
           <a:prstGeom prst="roundRect">
             <a:avLst>
@@ -19648,14 +23091,14 @@
       </p:sp>
       <p:sp>
         <p:nvSpPr>
-          <p:cNvPr id="42" name="TextBox 41"/>
+          <p:cNvPr id="22" name="TextBox 21"/>
           <p:cNvSpPr txBox="1"/>
           <p:nvPr/>
         </p:nvSpPr>
         <p:spPr>
           <a:xfrm>
-            <a:off x="4367784" y="3355848"/>
-            <a:ext cx="3243072" cy="274320"/>
+            <a:off x="7461504" y="3566160"/>
+            <a:ext cx="3913631" cy="274320"/>
           </a:xfrm>
           <a:prstGeom prst="rect">
             <a:avLst/>
@@ -19676,21 +23119,21 @@
                 </a:solidFill>
                 <a:latin typeface="Lato"/>
               </a:rPr>
-              <a:t>Grounding vs fine-tuning</a:t>
-            </a:r>
-          </a:p>
-        </p:txBody>
-      </p:sp>
-      <p:sp>
-        <p:nvSpPr>
-          <p:cNvPr id="43" name="TextBox 42"/>
+              <a:t>Market base</a:t>
+            </a:r>
+          </a:p>
+        </p:txBody>
+      </p:sp>
+      <p:sp>
+        <p:nvSpPr>
+          <p:cNvPr id="23" name="TextBox 22"/>
           <p:cNvSpPr txBox="1"/>
           <p:nvPr/>
         </p:nvSpPr>
         <p:spPr>
           <a:xfrm>
-            <a:off x="4367784" y="3666744"/>
-            <a:ext cx="3243072" cy="1984248"/>
+            <a:off x="7461504" y="3877056"/>
+            <a:ext cx="3913631" cy="822960"/>
           </a:xfrm>
           <a:prstGeom prst="rect">
             <a:avLst/>
@@ -19715,7 +23158,7 @@
                 </a:solidFill>
                 <a:latin typeface="Lato"/>
               </a:rPr>
-              <a:t>Start with RAG + few-shot </a:t>
+              <a:t>Ocrolus: </a:t>
             </a:r>
             <a:r>
               <a:rPr sz="900" b="0" i="0">
@@ -19724,7 +23167,7 @@
                 </a:solidFill>
                 <a:latin typeface="Lato"/>
               </a:rPr>
-              <a:t>on our own artefacts: attribute catalog, schema dictionary, formula library, document profiles.</a:t>
+              <a:t>classifies &amp; analyses 1,150+ financial document types with fraud-signal detection (vendor).</a:t>
             </a:r>
           </a:p>
           <a:p>
@@ -19740,7 +23183,7 @@
                 </a:solidFill>
                 <a:latin typeface="Lato"/>
               </a:rPr>
-              <a:t>Fine-tune only where evals prove a gap </a:t>
+              <a:t>Informed.IQ: </a:t>
             </a:r>
             <a:r>
               <a:rPr sz="900" b="0" i="0">
@@ -19749,46 +23192,21 @@
                 </a:solidFill>
                 <a:latin typeface="Lato"/>
               </a:rPr>
-              <a:t>— most likely prompt→rule and prompt→FEEL.</a:t>
-            </a:r>
-          </a:p>
-          <a:p>
-            <a:pPr>
-              <a:spcAft>
-                <a:spcPts val="300"/>
-              </a:spcAft>
-            </a:pPr>
-            <a:r>
-              <a:rPr sz="900" b="1" i="0">
-                <a:solidFill>
-                  <a:srgbClr val="1A214D"/>
-                </a:solidFill>
-                <a:latin typeface="Lato"/>
-              </a:rPr>
-              <a:t>Each use case keeps its own eval set </a:t>
-            </a:r>
-            <a:r>
-              <a:rPr sz="900" b="0" i="0">
-                <a:solidFill>
-                  <a:srgbClr val="1A214D"/>
-                </a:solidFill>
-                <a:latin typeface="Lato"/>
-              </a:rPr>
-              <a:t>— the go/no-go instrument per phase.</a:t>
-            </a:r>
-          </a:p>
-        </p:txBody>
-      </p:sp>
-      <p:sp>
-        <p:nvSpPr>
-          <p:cNvPr id="44" name="Rounded Rectangle 43"/>
+              <a:t>automated stip verification; works with 7 of the top-10 US auto lenders (company-reported).</a:t>
+            </a:r>
+          </a:p>
+        </p:txBody>
+      </p:sp>
+      <p:sp>
+        <p:nvSpPr>
+          <p:cNvPr id="24" name="Rounded Rectangle 23"/>
           <p:cNvSpPr/>
           <p:nvPr/>
         </p:nvSpPr>
         <p:spPr>
           <a:xfrm>
-            <a:off x="7985760" y="3246120"/>
-            <a:ext cx="3535680" cy="2514600"/>
+            <a:off x="7315200" y="4901184"/>
+            <a:ext cx="4206240" cy="1362456"/>
           </a:xfrm>
           <a:prstGeom prst="roundRect">
             <a:avLst>
@@ -19829,14 +23247,14 @@
       </p:sp>
       <p:sp>
         <p:nvSpPr>
-          <p:cNvPr id="45" name="TextBox 44"/>
+          <p:cNvPr id="25" name="TextBox 24"/>
           <p:cNvSpPr txBox="1"/>
           <p:nvPr/>
         </p:nvSpPr>
         <p:spPr>
           <a:xfrm>
-            <a:off x="8132064" y="3355848"/>
-            <a:ext cx="3243072" cy="274320"/>
+            <a:off x="7461504" y="5010912"/>
+            <a:ext cx="3913631" cy="274320"/>
           </a:xfrm>
           <a:prstGeom prst="rect">
             <a:avLst/>
@@ -19857,21 +23275,21 @@
                 </a:solidFill>
                 <a:latin typeface="Lato"/>
               </a:rPr>
-              <a:t>Reusable if we swap models</a:t>
-            </a:r>
-          </a:p>
-        </p:txBody>
-      </p:sp>
-      <p:sp>
-        <p:nvSpPr>
-          <p:cNvPr id="46" name="TextBox 45"/>
+              <a:t>Feasibility &amp; gate</a:t>
+            </a:r>
+          </a:p>
+        </p:txBody>
+      </p:sp>
+      <p:sp>
+        <p:nvSpPr>
+          <p:cNvPr id="26" name="TextBox 25"/>
           <p:cNvSpPr txBox="1"/>
           <p:nvPr/>
         </p:nvSpPr>
         <p:spPr>
           <a:xfrm>
-            <a:off x="8132064" y="3666744"/>
-            <a:ext cx="3243072" cy="1984248"/>
+            <a:off x="7461504" y="5321808"/>
+            <a:ext cx="3913631" cy="832104"/>
           </a:xfrm>
           <a:prstGeom prst="rect">
             <a:avLst/>
@@ -19896,7 +23314,7 @@
                 </a:solidFill>
                 <a:latin typeface="Lato"/>
               </a:rPr>
-              <a:t>Model-agnostic: </a:t>
+              <a:t>Task: </a:t>
             </a:r>
             <a:r>
               <a:rPr sz="900" b="0" i="0">
@@ -19905,7 +23323,7 @@
                 </a:solidFill>
                 <a:latin typeface="Lato"/>
               </a:rPr>
-              <a:t>prompts, task schemas, eval sets, guardrails, validators, UI.</a:t>
+              <a:t>extract fields, compare to the application (amount, names, IBAN, dates), flag missing or inconsistent items into the ops Maker queue.</a:t>
             </a:r>
           </a:p>
           <a:p>
@@ -19921,7 +23339,7 @@
                 </a:solidFill>
                 <a:latin typeface="Lato"/>
               </a:rPr>
-              <a:t>Model-bound: </a:t>
+              <a:t>Dependency: </a:t>
             </a:r>
             <a:r>
               <a:rPr sz="900" b="0" i="0">
@@ -19930,39 +23348,14 @@
                 </a:solidFill>
                 <a:latin typeface="Lato"/>
               </a:rPr>
-              <a:t>fine-tuned weights only.</a:t>
-            </a:r>
-          </a:p>
-          <a:p>
-            <a:pPr>
-              <a:spcAft>
-                <a:spcPts val="300"/>
-              </a:spcAft>
-            </a:pPr>
-            <a:r>
-              <a:rPr sz="900" b="1" i="0">
-                <a:solidFill>
-                  <a:srgbClr val="1A214D"/>
-                </a:solidFill>
-                <a:latin typeface="Lato"/>
-              </a:rPr>
-              <a:t>Swap the model tomorrow </a:t>
-            </a:r>
-            <a:r>
-              <a:rPr sz="900" b="0" i="0">
-                <a:solidFill>
-                  <a:srgbClr val="1A214D"/>
-                </a:solidFill>
-                <a:latin typeface="Lato"/>
-              </a:rPr>
-              <a:t>and the training assets survive — the platform investment is protected.</a:t>
-            </a:r>
-          </a:p>
-        </p:txBody>
-      </p:sp>
-      <p:sp>
-        <p:nvSpPr>
-          <p:cNvPr id="47" name="TextBox 46"/>
+              <a:t>labelled document samples — the largest data gap. Gate: model agrees with checker verdicts on a labelled pilot set.</a:t>
+            </a:r>
+          </a:p>
+        </p:txBody>
+      </p:sp>
+      <p:sp>
+        <p:nvSpPr>
+          <p:cNvPr id="27" name="TextBox 26"/>
           <p:cNvSpPr txBox="1"/>
           <p:nvPr/>
         </p:nvSpPr>
@@ -19990,7 +23383,7 @@
                 </a:solidFill>
                 <a:latin typeface="Lato"/>
               </a:rPr>
-              <a:t>Sources: Azure AI Foundry / Phi model documentation (licence to be confirmed on model card)</a:t>
+              <a:t>Sources: Ocrolus (vendor) · Informed.IQ (company-reported)</a:t>
             </a:r>
           </a:p>
         </p:txBody>
@@ -20200,7 +23593,7 @@
                 </a:solidFill>
                 <a:latin typeface="Lato"/>
               </a:rPr>
-              <a:t>Governance </a:t>
+              <a:t>Document Validation </a:t>
             </a:r>
             <a:r>
               <a:rPr sz="2000" b="1" i="0">
@@ -20209,7 +23602,7 @@
                 </a:solidFill>
                 <a:latin typeface="Lato"/>
               </a:rPr>
-              <a:t>— Designed To Pass Review</a:t>
+              <a:t>— How It Looks</a:t>
             </a:r>
           </a:p>
         </p:txBody>
@@ -20468,21 +23861,19 @@
         </p:nvSpPr>
         <p:spPr>
           <a:xfrm>
-            <a:off x="457200" y="969264"/>
-            <a:ext cx="9921240" cy="749808"/>
+            <a:off x="457200" y="1024128"/>
+            <a:ext cx="3063240" cy="292608"/>
           </a:xfrm>
           <a:prstGeom prst="roundRect">
             <a:avLst>
-              <a:gd name="adj" fmla="val 18000"/>
+              <a:gd name="adj" fmla="val 50000"/>
             </a:avLst>
           </a:prstGeom>
           <a:solidFill>
-            <a:srgbClr val="EDF2FF"/>
+            <a:srgbClr val="FDBA23"/>
           </a:solidFill>
-          <a:ln w="9525">
-            <a:solidFill>
-              <a:srgbClr val="3B7EF6"/>
-            </a:solidFill>
+          <a:ln>
+            <a:noFill/>
           </a:ln>
           <a:effectLst/>
         </p:spPr>
@@ -20516,8 +23907,8 @@
         </p:nvSpPr>
         <p:spPr>
           <a:xfrm>
-            <a:off x="658368" y="969264"/>
-            <a:ext cx="9518904" cy="749808"/>
+            <a:off x="457200" y="1074420"/>
+            <a:ext cx="3063240" cy="228600"/>
           </a:xfrm>
           <a:prstGeom prst="rect">
             <a:avLst/>
@@ -20525,43 +23916,66 @@
           <a:noFill/>
         </p:spPr>
         <p:txBody>
-          <a:bodyPr wrap="square" lIns="0" rIns="0" anchor="ctr">
+          <a:bodyPr wrap="square" lIns="0" rIns="0" tIns="0" bIns="0">
             <a:spAutoFit/>
           </a:bodyPr>
           <a:lstStyle/>
           <a:p>
-            <a:r>
-              <a:rPr sz="1200" b="1" i="0">
-                <a:solidFill>
-                  <a:srgbClr val="1A214D"/>
-                </a:solidFill>
-                <a:latin typeface="Lato"/>
-              </a:rPr>
-              <a:t>The CBUAE's Feb-2026 AI guidance maps directly onto maker-checker controls the portal already runs.</a:t>
-            </a:r>
-          </a:p>
-        </p:txBody>
-      </p:sp>
-      <p:sp>
-        <p:nvSpPr>
-          <p:cNvPr id="15" name="Rounded Rectangle 14"/>
+            <a:pPr algn="ctr"/>
+            <a:r>
+              <a:rPr sz="1000" b="1" i="0">
+                <a:solidFill>
+                  <a:srgbClr val="1A214D"/>
+                </a:solidFill>
+                <a:latin typeface="Lato"/>
+              </a:rPr>
+              <a:t>ILLUSTRATIVE MOCKUP — SAMPLE DATA</a:t>
+            </a:r>
+          </a:p>
+        </p:txBody>
+      </p:sp>
+      <p:pic>
+        <p:nvPicPr>
+          <p:cNvPr id="15" name="Picture 14" descr="mock-3-doc-validation.png"/>
+          <p:cNvPicPr>
+            <a:picLocks noChangeAspect="1"/>
+          </p:cNvPicPr>
+          <p:nvPr/>
+        </p:nvPicPr>
+        <p:blipFill>
+          <a:blip r:embed="rId4"/>
+          <a:stretch>
+            <a:fillRect/>
+          </a:stretch>
+        </p:blipFill>
+        <p:spPr>
+          <a:xfrm>
+            <a:off x="1843887" y="2057828"/>
+            <a:ext cx="8503920" cy="3428143"/>
+          </a:xfrm>
+          <a:prstGeom prst="rect">
+            <a:avLst/>
+          </a:prstGeom>
+        </p:spPr>
+      </p:pic>
+      <p:sp>
+        <p:nvSpPr>
+          <p:cNvPr id="16" name="Rounded Rectangle 15"/>
           <p:cNvSpPr/>
           <p:nvPr/>
         </p:nvSpPr>
         <p:spPr>
           <a:xfrm>
-            <a:off x="457200" y="1874519"/>
-            <a:ext cx="5303520" cy="1920240"/>
+            <a:off x="1830171" y="2044112"/>
+            <a:ext cx="8531352" cy="3455574"/>
           </a:xfrm>
           <a:prstGeom prst="roundRect">
             <a:avLst>
-              <a:gd name="adj" fmla="val 12000"/>
+              <a:gd name="adj" fmla="val 3000"/>
             </a:avLst>
           </a:prstGeom>
-          <a:solidFill>
-            <a:srgbClr val="FFFFFF"/>
-          </a:solidFill>
-          <a:ln w="9525">
+          <a:noFill/>
+          <a:ln w="12700">
             <a:solidFill>
               <a:srgbClr val="1A214D"/>
             </a:solidFill>
@@ -20592,14 +24006,14 @@
       </p:sp>
       <p:sp>
         <p:nvSpPr>
-          <p:cNvPr id="16" name="TextBox 15"/>
+          <p:cNvPr id="17" name="TextBox 16"/>
           <p:cNvSpPr txBox="1"/>
           <p:nvPr/>
         </p:nvSpPr>
         <p:spPr>
           <a:xfrm>
-            <a:off x="603504" y="1984248"/>
-            <a:ext cx="5010912" cy="274320"/>
+            <a:off x="1843887" y="5577411"/>
+            <a:ext cx="8503920" cy="365760"/>
           </a:xfrm>
           <a:prstGeom prst="rect">
             <a:avLst/>
@@ -20614,539 +24028,13 @@
           <a:p>
             <a:pPr algn="l"/>
             <a:r>
-              <a:rPr sz="1100" b="1" i="0">
-                <a:solidFill>
-                  <a:srgbClr val="3B7EF6"/>
-                </a:solidFill>
-                <a:latin typeface="Lato"/>
-              </a:rPr>
-              <a:t>CBUAE expectations (Feb 2026)</a:t>
-            </a:r>
-          </a:p>
-        </p:txBody>
-      </p:sp>
-      <p:sp>
-        <p:nvSpPr>
-          <p:cNvPr id="17" name="TextBox 16"/>
-          <p:cNvSpPr txBox="1"/>
-          <p:nvPr/>
-        </p:nvSpPr>
-        <p:spPr>
-          <a:xfrm>
-            <a:off x="603504" y="2295144"/>
-            <a:ext cx="5010912" cy="1389888"/>
-          </a:xfrm>
-          <a:prstGeom prst="rect">
-            <a:avLst/>
-          </a:prstGeom>
-          <a:noFill/>
-        </p:spPr>
-        <p:txBody>
-          <a:bodyPr wrap="square" lIns="0" rIns="0" tIns="0">
-            <a:spAutoFit/>
-          </a:bodyPr>
-          <a:lstStyle/>
-          <a:p>
-            <a:pPr>
-              <a:spcAft>
-                <a:spcPts val="300"/>
-              </a:spcAft>
-            </a:pPr>
-            <a:r>
-              <a:rPr sz="1000" b="1" i="0">
-                <a:solidFill>
-                  <a:srgbClr val="1A214D"/>
-                </a:solidFill>
-                <a:latin typeface="Lato"/>
-              </a:rPr>
-              <a:t>Guidance Note on responsible AI/ML </a:t>
-            </a:r>
-            <a:r>
-              <a:rPr sz="1000" b="0" i="0">
-                <a:solidFill>
-                  <a:srgbClr val="1A214D"/>
-                </a:solidFill>
-                <a:latin typeface="Lato"/>
-              </a:rPr>
-              <a:t>for licensed financial institutions: human oversight on high-impact decisions, validation before deployment, monitoring for model drift, periodic bias testing. Not legally binding — but the supervisory direction.</a:t>
-            </a:r>
-          </a:p>
-        </p:txBody>
-      </p:sp>
-      <p:sp>
-        <p:nvSpPr>
-          <p:cNvPr id="18" name="Rounded Rectangle 17"/>
-          <p:cNvSpPr/>
-          <p:nvPr/>
-        </p:nvSpPr>
-        <p:spPr>
-          <a:xfrm>
-            <a:off x="6217920" y="1874519"/>
-            <a:ext cx="5303520" cy="1920240"/>
-          </a:xfrm>
-          <a:prstGeom prst="roundRect">
-            <a:avLst>
-              <a:gd name="adj" fmla="val 12000"/>
-            </a:avLst>
-          </a:prstGeom>
-          <a:solidFill>
-            <a:srgbClr val="FFFFFF"/>
-          </a:solidFill>
-          <a:ln w="9525">
-            <a:solidFill>
-              <a:srgbClr val="1A214D"/>
-            </a:solidFill>
-          </a:ln>
-          <a:effectLst/>
-        </p:spPr>
-        <p:style>
-          <a:lnRef idx="1">
-            <a:schemeClr val="accent1"/>
-          </a:lnRef>
-          <a:fillRef idx="3">
-            <a:schemeClr val="accent1"/>
-          </a:fillRef>
-          <a:effectRef idx="0">
-            <a:schemeClr val="accent1"/>
-          </a:effectRef>
-          <a:fontRef idx="minor">
-            <a:schemeClr val="lt1"/>
-          </a:fontRef>
-        </p:style>
-        <p:txBody>
-          <a:bodyPr rtlCol="0" anchor="ctr"/>
-          <a:lstStyle/>
-          <a:p>
-            <a:pPr algn="ctr"/>
-          </a:p>
-        </p:txBody>
-      </p:sp>
-      <p:sp>
-        <p:nvSpPr>
-          <p:cNvPr id="19" name="TextBox 18"/>
-          <p:cNvSpPr txBox="1"/>
-          <p:nvPr/>
-        </p:nvSpPr>
-        <p:spPr>
-          <a:xfrm>
-            <a:off x="6364224" y="1984248"/>
-            <a:ext cx="5010912" cy="274320"/>
-          </a:xfrm>
-          <a:prstGeom prst="rect">
-            <a:avLst/>
-          </a:prstGeom>
-          <a:noFill/>
-        </p:spPr>
-        <p:txBody>
-          <a:bodyPr wrap="square" lIns="0" rIns="0" tIns="0" bIns="0">
-            <a:spAutoFit/>
-          </a:bodyPr>
-          <a:lstStyle/>
-          <a:p>
-            <a:pPr algn="l"/>
-            <a:r>
-              <a:rPr sz="1100" b="1" i="0">
-                <a:solidFill>
-                  <a:srgbClr val="3B7EF6"/>
-                </a:solidFill>
-                <a:latin typeface="Lato"/>
-              </a:rPr>
-              <a:t>Our answer, by design</a:t>
-            </a:r>
-          </a:p>
-        </p:txBody>
-      </p:sp>
-      <p:sp>
-        <p:nvSpPr>
-          <p:cNvPr id="20" name="TextBox 19"/>
-          <p:cNvSpPr txBox="1"/>
-          <p:nvPr/>
-        </p:nvSpPr>
-        <p:spPr>
-          <a:xfrm>
-            <a:off x="6364224" y="2295144"/>
-            <a:ext cx="5010912" cy="1389888"/>
-          </a:xfrm>
-          <a:prstGeom prst="rect">
-            <a:avLst/>
-          </a:prstGeom>
-          <a:noFill/>
-        </p:spPr>
-        <p:txBody>
-          <a:bodyPr wrap="square" lIns="0" rIns="0" tIns="0">
-            <a:spAutoFit/>
-          </a:bodyPr>
-          <a:lstStyle/>
-          <a:p>
-            <a:pPr>
-              <a:spcAft>
-                <a:spcPts val="300"/>
-              </a:spcAft>
-            </a:pPr>
-            <a:r>
-              <a:rPr sz="1000" b="1" i="0">
-                <a:solidFill>
-                  <a:srgbClr val="1A214D"/>
-                </a:solidFill>
-                <a:latin typeface="Lato"/>
-              </a:rPr>
-              <a:t>AI stops at draft. </a:t>
-            </a:r>
-            <a:r>
-              <a:rPr sz="1000" b="0" i="0">
-                <a:solidFill>
-                  <a:srgbClr val="1A214D"/>
-                </a:solidFill>
-                <a:latin typeface="Lato"/>
-              </a:rPr>
-              <a:t>Credit decisions stay deterministic in the Rule Engine; every AI-assisted change is a Maker request with checker approval; new policies run in shadow mode before production.</a:t>
-            </a:r>
-          </a:p>
-        </p:txBody>
-      </p:sp>
-      <p:sp>
-        <p:nvSpPr>
-          <p:cNvPr id="21" name="Rounded Rectangle 20"/>
-          <p:cNvSpPr/>
-          <p:nvPr/>
-        </p:nvSpPr>
-        <p:spPr>
-          <a:xfrm>
-            <a:off x="457200" y="3977639"/>
-            <a:ext cx="5303520" cy="1920240"/>
-          </a:xfrm>
-          <a:prstGeom prst="roundRect">
-            <a:avLst>
-              <a:gd name="adj" fmla="val 12000"/>
-            </a:avLst>
-          </a:prstGeom>
-          <a:solidFill>
-            <a:srgbClr val="FFFFFF"/>
-          </a:solidFill>
-          <a:ln w="9525">
-            <a:solidFill>
-              <a:srgbClr val="1A214D"/>
-            </a:solidFill>
-          </a:ln>
-          <a:effectLst/>
-        </p:spPr>
-        <p:style>
-          <a:lnRef idx="1">
-            <a:schemeClr val="accent1"/>
-          </a:lnRef>
-          <a:fillRef idx="3">
-            <a:schemeClr val="accent1"/>
-          </a:fillRef>
-          <a:effectRef idx="0">
-            <a:schemeClr val="accent1"/>
-          </a:effectRef>
-          <a:fontRef idx="minor">
-            <a:schemeClr val="lt1"/>
-          </a:fontRef>
-        </p:style>
-        <p:txBody>
-          <a:bodyPr rtlCol="0" anchor="ctr"/>
-          <a:lstStyle/>
-          <a:p>
-            <a:pPr algn="ctr"/>
-          </a:p>
-        </p:txBody>
-      </p:sp>
-      <p:sp>
-        <p:nvSpPr>
-          <p:cNvPr id="22" name="TextBox 21"/>
-          <p:cNvSpPr txBox="1"/>
-          <p:nvPr/>
-        </p:nvSpPr>
-        <p:spPr>
-          <a:xfrm>
-            <a:off x="603504" y="4087368"/>
-            <a:ext cx="5010912" cy="274320"/>
-          </a:xfrm>
-          <a:prstGeom prst="rect">
-            <a:avLst/>
-          </a:prstGeom>
-          <a:noFill/>
-        </p:spPr>
-        <p:txBody>
-          <a:bodyPr wrap="square" lIns="0" rIns="0" tIns="0" bIns="0">
-            <a:spAutoFit/>
-          </a:bodyPr>
-          <a:lstStyle/>
-          <a:p>
-            <a:pPr algn="l"/>
-            <a:r>
-              <a:rPr sz="1100" b="1" i="0">
-                <a:solidFill>
-                  <a:srgbClr val="3B7EF6"/>
-                </a:solidFill>
-                <a:latin typeface="Lato"/>
-              </a:rPr>
-              <a:t>Auditability</a:t>
-            </a:r>
-          </a:p>
-        </p:txBody>
-      </p:sp>
-      <p:sp>
-        <p:nvSpPr>
-          <p:cNvPr id="23" name="TextBox 22"/>
-          <p:cNvSpPr txBox="1"/>
-          <p:nvPr/>
-        </p:nvSpPr>
-        <p:spPr>
-          <a:xfrm>
-            <a:off x="603504" y="4398264"/>
-            <a:ext cx="5010912" cy="1389888"/>
-          </a:xfrm>
-          <a:prstGeom prst="rect">
-            <a:avLst/>
-          </a:prstGeom>
-          <a:noFill/>
-        </p:spPr>
-        <p:txBody>
-          <a:bodyPr wrap="square" lIns="0" rIns="0" tIns="0">
-            <a:spAutoFit/>
-          </a:bodyPr>
-          <a:lstStyle/>
-          <a:p>
-            <a:pPr>
-              <a:spcAft>
-                <a:spcPts val="300"/>
-              </a:spcAft>
-            </a:pPr>
-            <a:r>
-              <a:rPr sz="1000" b="1" i="0">
-                <a:solidFill>
-                  <a:srgbClr val="1A214D"/>
-                </a:solidFill>
-                <a:latin typeface="Lato"/>
-              </a:rPr>
-              <a:t>Log per change: </a:t>
-            </a:r>
-            <a:r>
-              <a:rPr sz="1000" b="0" i="0">
-                <a:solidFill>
-                  <a:srgbClr val="1A214D"/>
-                </a:solidFill>
-                <a:latin typeface="Lato"/>
-              </a:rPr>
-              <a:t>prompt, model version, draft, validation result, approver.</a:t>
-            </a:r>
-          </a:p>
-          <a:p>
-            <a:pPr>
-              <a:spcAft>
-                <a:spcPts val="300"/>
-              </a:spcAft>
-            </a:pPr>
-            <a:r>
-              <a:rPr sz="1000" b="1" i="0">
-                <a:solidFill>
-                  <a:srgbClr val="1A214D"/>
-                </a:solidFill>
-                <a:latin typeface="Lato"/>
-              </a:rPr>
-              <a:t>Same maker-checker trail </a:t>
-            </a:r>
-            <a:r>
-              <a:rPr sz="1000" b="0" i="0">
-                <a:solidFill>
-                  <a:srgbClr val="1A214D"/>
-                </a:solidFill>
-                <a:latin typeface="Lato"/>
-              </a:rPr>
-              <a:t>banks already audit — no new audit framework to invent.</a:t>
-            </a:r>
-          </a:p>
-        </p:txBody>
-      </p:sp>
-      <p:sp>
-        <p:nvSpPr>
-          <p:cNvPr id="24" name="Rounded Rectangle 23"/>
-          <p:cNvSpPr/>
-          <p:nvPr/>
-        </p:nvSpPr>
-        <p:spPr>
-          <a:xfrm>
-            <a:off x="6217920" y="3977639"/>
-            <a:ext cx="5303520" cy="1920240"/>
-          </a:xfrm>
-          <a:prstGeom prst="roundRect">
-            <a:avLst>
-              <a:gd name="adj" fmla="val 12000"/>
-            </a:avLst>
-          </a:prstGeom>
-          <a:solidFill>
-            <a:srgbClr val="FFFFFF"/>
-          </a:solidFill>
-          <a:ln w="9525">
-            <a:solidFill>
-              <a:srgbClr val="1A214D"/>
-            </a:solidFill>
-          </a:ln>
-          <a:effectLst/>
-        </p:spPr>
-        <p:style>
-          <a:lnRef idx="1">
-            <a:schemeClr val="accent1"/>
-          </a:lnRef>
-          <a:fillRef idx="3">
-            <a:schemeClr val="accent1"/>
-          </a:fillRef>
-          <a:effectRef idx="0">
-            <a:schemeClr val="accent1"/>
-          </a:effectRef>
-          <a:fontRef idx="minor">
-            <a:schemeClr val="lt1"/>
-          </a:fontRef>
-        </p:style>
-        <p:txBody>
-          <a:bodyPr rtlCol="0" anchor="ctr"/>
-          <a:lstStyle/>
-          <a:p>
-            <a:pPr algn="ctr"/>
-          </a:p>
-        </p:txBody>
-      </p:sp>
-      <p:sp>
-        <p:nvSpPr>
-          <p:cNvPr id="25" name="TextBox 24"/>
-          <p:cNvSpPr txBox="1"/>
-          <p:nvPr/>
-        </p:nvSpPr>
-        <p:spPr>
-          <a:xfrm>
-            <a:off x="6364224" y="4087368"/>
-            <a:ext cx="5010912" cy="274320"/>
-          </a:xfrm>
-          <a:prstGeom prst="rect">
-            <a:avLst/>
-          </a:prstGeom>
-          <a:noFill/>
-        </p:spPr>
-        <p:txBody>
-          <a:bodyPr wrap="square" lIns="0" rIns="0" tIns="0" bIns="0">
-            <a:spAutoFit/>
-          </a:bodyPr>
-          <a:lstStyle/>
-          <a:p>
-            <a:pPr algn="l"/>
-            <a:r>
-              <a:rPr sz="1100" b="1" i="0">
-                <a:solidFill>
-                  <a:srgbClr val="3B7EF6"/>
-                </a:solidFill>
-                <a:latin typeface="Lato"/>
-              </a:rPr>
-              <a:t>Data protection</a:t>
-            </a:r>
-          </a:p>
-        </p:txBody>
-      </p:sp>
-      <p:sp>
-        <p:nvSpPr>
-          <p:cNvPr id="26" name="TextBox 25"/>
-          <p:cNvSpPr txBox="1"/>
-          <p:nvPr/>
-        </p:nvSpPr>
-        <p:spPr>
-          <a:xfrm>
-            <a:off x="6364224" y="4398264"/>
-            <a:ext cx="5010912" cy="1389888"/>
-          </a:xfrm>
-          <a:prstGeom prst="rect">
-            <a:avLst/>
-          </a:prstGeom>
-          <a:noFill/>
-        </p:spPr>
-        <p:txBody>
-          <a:bodyPr wrap="square" lIns="0" rIns="0" tIns="0">
-            <a:spAutoFit/>
-          </a:bodyPr>
-          <a:lstStyle/>
-          <a:p>
-            <a:pPr>
-              <a:spcAft>
-                <a:spcPts val="300"/>
-              </a:spcAft>
-            </a:pPr>
-            <a:r>
-              <a:rPr sz="1000" b="1" i="0">
-                <a:solidFill>
-                  <a:srgbClr val="1A214D"/>
-                </a:solidFill>
-                <a:latin typeface="Lato"/>
-              </a:rPr>
-              <a:t>Offline UAE hosting </a:t>
-            </a:r>
-            <a:r>
-              <a:rPr sz="1000" b="0" i="0">
-                <a:solidFill>
-                  <a:srgbClr val="1A214D"/>
-                </a:solidFill>
-                <a:latin typeface="Lato"/>
-              </a:rPr>
-              <a:t>keeps bank data in-country.</a:t>
-            </a:r>
-          </a:p>
-          <a:p>
-            <a:pPr>
-              <a:spcAft>
-                <a:spcPts val="300"/>
-              </a:spcAft>
-            </a:pPr>
-            <a:r>
-              <a:rPr sz="1000" b="1" i="0">
-                <a:solidFill>
-                  <a:srgbClr val="1A214D"/>
-                </a:solidFill>
-                <a:latin typeface="Lato"/>
-              </a:rPr>
-              <a:t>Training data anonymised </a:t>
-            </a:r>
-            <a:r>
-              <a:rPr sz="1000" b="0" i="0">
-                <a:solidFill>
-                  <a:srgbClr val="1A214D"/>
-                </a:solidFill>
-                <a:latin typeface="Lato"/>
-              </a:rPr>
-              <a:t>before any use — owned by the data-readiness workstream (slide 10).</a:t>
-            </a:r>
-          </a:p>
-        </p:txBody>
-      </p:sp>
-      <p:sp>
-        <p:nvSpPr>
-          <p:cNvPr id="27" name="TextBox 26"/>
-          <p:cNvSpPr txBox="1"/>
-          <p:nvPr/>
-        </p:nvSpPr>
-        <p:spPr>
-          <a:xfrm>
-            <a:off x="457200" y="6336792"/>
-            <a:ext cx="10515600" cy="164592"/>
-          </a:xfrm>
-          <a:prstGeom prst="rect">
-            <a:avLst/>
-          </a:prstGeom>
-          <a:noFill/>
-        </p:spPr>
-        <p:txBody>
-          <a:bodyPr wrap="square" lIns="0" rIns="0" tIns="0" bIns="0">
-            <a:spAutoFit/>
-          </a:bodyPr>
-          <a:lstStyle/>
-          <a:p>
-            <a:pPr algn="l"/>
-            <a:r>
-              <a:rPr sz="700" b="0" i="1">
-                <a:solidFill>
-                  <a:srgbClr val="1A214D"/>
-                </a:solidFill>
-                <a:latin typeface="Lato"/>
-              </a:rPr>
-              <a:t>Sources: CBUAE Guidance Note on AI/ML (Feb 2026) — verify specifics against the original text before external use</a:t>
+              <a:rPr sz="900" b="0" i="1">
+                <a:solidFill>
+                  <a:srgbClr val="1A214D"/>
+                </a:solidFill>
+                <a:latin typeface="Lato"/>
+              </a:rPr>
+              <a:t>AI pre-check across the application's documents — fields extracted from the security cheque are compared to the application; matches auto-clear, and only exceptions reach the ops queue.</a:t>
             </a:r>
           </a:p>
         </p:txBody>
